--- a/lectures/L2.pptx
+++ b/lectures/L2.pptx
@@ -2107,7 +2107,7 @@
           <a:p>
             <a:fld id="{BF2DB236-4285-4D88-9992-9FF3E224851F}" type="datetime1">
               <a:rPr lang="nb-NO" smtClean="0"/>
-              <a:t>30.11.2021</a:t>
+              <a:t>27.07.2026</a:t>
             </a:fld>
             <a:endParaRPr lang="nb-NO" dirty="0"/>
           </a:p>
@@ -2285,7 +2285,7 @@
           <a:p>
             <a:fld id="{5601FF98-C2FA-4DFE-9608-59BE2C73CA2C}" type="datetime1">
               <a:rPr lang="nb-NO" smtClean="0"/>
-              <a:t>30.11.2021</a:t>
+              <a:t>27.07.2026</a:t>
             </a:fld>
             <a:endParaRPr lang="nb-NO" dirty="0"/>
           </a:p>
@@ -2552,6 +2552,4138 @@
     </a:lvl9pPr>
   </p:notesStyle>
 </p:notesMaster>
+</file>
+
+<file path=ppt/notesSlides/notesSlide1.xml><?xml version="1.0" encoding="utf-8"?>
+<p:notes xmlns:a="http://schemas.openxmlformats.org/drawingml/2006/main" xmlns:r="http://schemas.openxmlformats.org/officeDocument/2006/relationships" xmlns:p="http://schemas.openxmlformats.org/presentationml/2006/main">
+  <p:cSld>
+    <p:spTree>
+      <p:nvGrpSpPr>
+        <p:cNvPr id="1" name=""/>
+        <p:cNvGrpSpPr/>
+        <p:nvPr/>
+      </p:nvGrpSpPr>
+      <p:grpSpPr>
+        <a:xfrm>
+          <a:off x="0" y="0"/>
+          <a:ext cx="0" cy="0"/>
+          <a:chOff x="0" y="0"/>
+          <a:chExt cx="0" cy="0"/>
+        </a:xfrm>
+      </p:grpSpPr>
+      <p:sp>
+        <p:nvSpPr>
+          <p:cNvPr id="2" name="Slide Image Placeholder 1"/>
+          <p:cNvSpPr>
+            <a:spLocks noGrp="1" noRot="1" noChangeAspect="1"/>
+          </p:cNvSpPr>
+          <p:nvPr>
+            <p:ph type="sldImg" idx="2"/>
+          </p:nvPr>
+        </p:nvSpPr>
+        <p:spPr/>
+      </p:sp>
+      <p:sp>
+        <p:nvSpPr>
+          <p:cNvPr id="3" name="Notes Placeholder 2"/>
+          <p:cNvSpPr>
+            <a:spLocks noGrp="1"/>
+          </p:cNvSpPr>
+          <p:nvPr>
+            <p:ph type="body" sz="quarter" idx="3"/>
+          </p:nvPr>
+        </p:nvSpPr>
+        <p:spPr/>
+        <p:txBody>
+          <a:bodyPr/>
+          <a:lstStyle/>
+          <a:p>
+            <a:r>
+              <a:t>Recap L1 in ~1 min: economics as a science, positive vs normative. Preview today's arc: two foundational models (Circular Flow, PPF) -&gt; opportunity cost -&gt; absolute/comparative advantage -&gt; a full worked numerical trade example (David &amp; Sherry) -&gt; summary. Budget ~90 min.</a:t>
+            </a:r>
+          </a:p>
+        </p:txBody>
+      </p:sp>
+      <p:sp>
+        <p:nvSpPr>
+          <p:cNvPr id="4" name="Slide Number Placeholder 3"/>
+          <p:cNvSpPr>
+            <a:spLocks noGrp="1"/>
+          </p:cNvSpPr>
+          <p:nvPr>
+            <p:ph type="sldNum" sz="quarter" idx="5"/>
+          </p:nvPr>
+        </p:nvSpPr>
+        <p:spPr/>
+      </p:sp>
+    </p:spTree>
+  </p:cSld>
+  <p:clrMapOvr>
+    <a:masterClrMapping/>
+  </p:clrMapOvr>
+</p:notes>
+</file>
+
+<file path=ppt/notesSlides/notesSlide10.xml><?xml version="1.0" encoding="utf-8"?>
+<p:notes xmlns:a="http://schemas.openxmlformats.org/drawingml/2006/main" xmlns:r="http://schemas.openxmlformats.org/officeDocument/2006/relationships" xmlns:p="http://schemas.openxmlformats.org/presentationml/2006/main">
+  <p:cSld>
+    <p:spTree>
+      <p:nvGrpSpPr>
+        <p:cNvPr id="1" name=""/>
+        <p:cNvGrpSpPr/>
+        <p:nvPr/>
+      </p:nvGrpSpPr>
+      <p:grpSpPr>
+        <a:xfrm>
+          <a:off x="0" y="0"/>
+          <a:ext cx="0" cy="0"/>
+          <a:chOff x="0" y="0"/>
+          <a:chExt cx="0" cy="0"/>
+        </a:xfrm>
+      </p:grpSpPr>
+      <p:sp>
+        <p:nvSpPr>
+          <p:cNvPr id="2" name="Slide Image Placeholder 1"/>
+          <p:cNvSpPr>
+            <a:spLocks noGrp="1" noRot="1" noChangeAspect="1"/>
+          </p:cNvSpPr>
+          <p:nvPr>
+            <p:ph type="sldImg" idx="2"/>
+          </p:nvPr>
+        </p:nvSpPr>
+        <p:spPr/>
+      </p:sp>
+      <p:sp>
+        <p:nvSpPr>
+          <p:cNvPr id="3" name="Notes Placeholder 2"/>
+          <p:cNvSpPr>
+            <a:spLocks noGrp="1"/>
+          </p:cNvSpPr>
+          <p:nvPr>
+            <p:ph type="body" sz="quarter" idx="3"/>
+          </p:nvPr>
+        </p:nvSpPr>
+        <p:spPr/>
+        <p:txBody>
+          <a:bodyPr/>
+          <a:lstStyle/>
+          <a:p>
+            <a:r>
+              <a:t>Ask the rhetorical question FIRST ('what would happen if this was the only market?') and let 2-3 students answer before revealing the text. The examples given (Coop, Rema1000, Burger King...) are Norwegian retail - ask students to add sport-specific ones (ticket sales, merchandise, stadium concessions) to keep it relevant to Sport Management.</a:t>
+            </a:r>
+          </a:p>
+        </p:txBody>
+      </p:sp>
+      <p:sp>
+        <p:nvSpPr>
+          <p:cNvPr id="4" name="Slide Number Placeholder 3"/>
+          <p:cNvSpPr>
+            <a:spLocks noGrp="1"/>
+          </p:cNvSpPr>
+          <p:nvPr>
+            <p:ph type="sldNum" sz="quarter" idx="5"/>
+          </p:nvPr>
+        </p:nvSpPr>
+        <p:spPr/>
+      </p:sp>
+    </p:spTree>
+  </p:cSld>
+  <p:clrMapOvr>
+    <a:masterClrMapping/>
+  </p:clrMapOvr>
+</p:notes>
+</file>
+
+<file path=ppt/notesSlides/notesSlide11.xml><?xml version="1.0" encoding="utf-8"?>
+<p:notes xmlns:a="http://schemas.openxmlformats.org/drawingml/2006/main" xmlns:r="http://schemas.openxmlformats.org/officeDocument/2006/relationships" xmlns:p="http://schemas.openxmlformats.org/presentationml/2006/main">
+  <p:cSld>
+    <p:spTree>
+      <p:nvGrpSpPr>
+        <p:cNvPr id="1" name=""/>
+        <p:cNvGrpSpPr/>
+        <p:nvPr/>
+      </p:nvGrpSpPr>
+      <p:grpSpPr>
+        <a:xfrm>
+          <a:off x="0" y="0"/>
+          <a:ext cx="0" cy="0"/>
+          <a:chOff x="0" y="0"/>
+          <a:chExt cx="0" cy="0"/>
+        </a:xfrm>
+      </p:grpSpPr>
+      <p:sp>
+        <p:nvSpPr>
+          <p:cNvPr id="2" name="Slide Image Placeholder 1"/>
+          <p:cNvSpPr>
+            <a:spLocks noGrp="1" noRot="1" noChangeAspect="1"/>
+          </p:cNvSpPr>
+          <p:nvPr>
+            <p:ph type="sldImg" idx="2"/>
+          </p:nvPr>
+        </p:nvSpPr>
+        <p:spPr/>
+      </p:sp>
+      <p:sp>
+        <p:nvSpPr>
+          <p:cNvPr id="3" name="Notes Placeholder 2"/>
+          <p:cNvSpPr>
+            <a:spLocks noGrp="1"/>
+          </p:cNvSpPr>
+          <p:nvPr>
+            <p:ph type="body" sz="quarter" idx="3"/>
+          </p:nvPr>
+        </p:nvSpPr>
+        <p:spPr/>
+        <p:txBody>
+          <a:bodyPr/>
+          <a:lstStyle/>
+          <a:p>
+            <a:r>
+              <a:t>Zoom-in view of the other half of the loop (factors market).</a:t>
+            </a:r>
+          </a:p>
+        </p:txBody>
+      </p:sp>
+      <p:sp>
+        <p:nvSpPr>
+          <p:cNvPr id="4" name="Slide Number Placeholder 3"/>
+          <p:cNvSpPr>
+            <a:spLocks noGrp="1"/>
+          </p:cNvSpPr>
+          <p:nvPr>
+            <p:ph type="sldNum" sz="quarter" idx="5"/>
+          </p:nvPr>
+        </p:nvSpPr>
+        <p:spPr/>
+      </p:sp>
+    </p:spTree>
+  </p:cSld>
+  <p:clrMapOvr>
+    <a:masterClrMapping/>
+  </p:clrMapOvr>
+</p:notes>
+</file>
+
+<file path=ppt/notesSlides/notesSlide12.xml><?xml version="1.0" encoding="utf-8"?>
+<p:notes xmlns:a="http://schemas.openxmlformats.org/drawingml/2006/main" xmlns:r="http://schemas.openxmlformats.org/officeDocument/2006/relationships" xmlns:p="http://schemas.openxmlformats.org/presentationml/2006/main">
+  <p:cSld>
+    <p:spTree>
+      <p:nvGrpSpPr>
+        <p:cNvPr id="1" name=""/>
+        <p:cNvGrpSpPr/>
+        <p:nvPr/>
+      </p:nvGrpSpPr>
+      <p:grpSpPr>
+        <a:xfrm>
+          <a:off x="0" y="0"/>
+          <a:ext cx="0" cy="0"/>
+          <a:chOff x="0" y="0"/>
+          <a:chExt cx="0" cy="0"/>
+        </a:xfrm>
+      </p:grpSpPr>
+      <p:sp>
+        <p:nvSpPr>
+          <p:cNvPr id="2" name="Slide Image Placeholder 1"/>
+          <p:cNvSpPr>
+            <a:spLocks noGrp="1" noRot="1" noChangeAspect="1"/>
+          </p:cNvSpPr>
+          <p:nvPr>
+            <p:ph type="sldImg" idx="2"/>
+          </p:nvPr>
+        </p:nvSpPr>
+        <p:spPr/>
+      </p:sp>
+      <p:sp>
+        <p:nvSpPr>
+          <p:cNvPr id="3" name="Notes Placeholder 2"/>
+          <p:cNvSpPr>
+            <a:spLocks noGrp="1"/>
+          </p:cNvSpPr>
+          <p:nvPr>
+            <p:ph type="body" sz="quarter" idx="3"/>
+          </p:nvPr>
+        </p:nvSpPr>
+        <p:spPr/>
+        <p:txBody>
+          <a:bodyPr/>
+          <a:lstStyle/>
+          <a:p>
+            <a:r>
+              <a:t>Ask for sport-specific examples of each factor before reading the slide: labor = athletes/coaches/staff, capital = stadiums/training equipment, land = pitch/training grounds. This is the strongest natural tie-in to Sport Management in this section - don't skip it.</a:t>
+            </a:r>
+          </a:p>
+        </p:txBody>
+      </p:sp>
+      <p:sp>
+        <p:nvSpPr>
+          <p:cNvPr id="4" name="Slide Number Placeholder 3"/>
+          <p:cNvSpPr>
+            <a:spLocks noGrp="1"/>
+          </p:cNvSpPr>
+          <p:nvPr>
+            <p:ph type="sldNum" sz="quarter" idx="5"/>
+          </p:nvPr>
+        </p:nvSpPr>
+        <p:spPr/>
+      </p:sp>
+    </p:spTree>
+  </p:cSld>
+  <p:clrMapOvr>
+    <a:masterClrMapping/>
+  </p:clrMapOvr>
+</p:notes>
+</file>
+
+<file path=ppt/notesSlides/notesSlide13.xml><?xml version="1.0" encoding="utf-8"?>
+<p:notes xmlns:a="http://schemas.openxmlformats.org/drawingml/2006/main" xmlns:r="http://schemas.openxmlformats.org/officeDocument/2006/relationships" xmlns:p="http://schemas.openxmlformats.org/presentationml/2006/main">
+  <p:cSld>
+    <p:spTree>
+      <p:nvGrpSpPr>
+        <p:cNvPr id="1" name=""/>
+        <p:cNvGrpSpPr/>
+        <p:nvPr/>
+      </p:nvGrpSpPr>
+      <p:grpSpPr>
+        <a:xfrm>
+          <a:off x="0" y="0"/>
+          <a:ext cx="0" cy="0"/>
+          <a:chOff x="0" y="0"/>
+          <a:chExt cx="0" cy="0"/>
+        </a:xfrm>
+      </p:grpSpPr>
+      <p:sp>
+        <p:nvSpPr>
+          <p:cNvPr id="2" name="Slide Image Placeholder 1"/>
+          <p:cNvSpPr>
+            <a:spLocks noGrp="1" noRot="1" noChangeAspect="1"/>
+          </p:cNvSpPr>
+          <p:nvPr>
+            <p:ph type="sldImg" idx="2"/>
+          </p:nvPr>
+        </p:nvSpPr>
+        <p:spPr/>
+      </p:sp>
+      <p:sp>
+        <p:nvSpPr>
+          <p:cNvPr id="3" name="Notes Placeholder 2"/>
+          <p:cNvSpPr>
+            <a:spLocks noGrp="1"/>
+          </p:cNvSpPr>
+          <p:nvPr>
+            <p:ph type="body" sz="quarter" idx="3"/>
+          </p:nvPr>
+        </p:nvSpPr>
+        <p:spPr/>
+        <p:txBody>
+          <a:bodyPr/>
+          <a:lstStyle/>
+          <a:p>
+            <a:r>
+              <a:t>Before explaining, ask students to predict: 'how do the two loops connect?' Then confirm with slide 14's explanation.</a:t>
+            </a:r>
+          </a:p>
+        </p:txBody>
+      </p:sp>
+      <p:sp>
+        <p:nvSpPr>
+          <p:cNvPr id="4" name="Slide Number Placeholder 3"/>
+          <p:cNvSpPr>
+            <a:spLocks noGrp="1"/>
+          </p:cNvSpPr>
+          <p:nvPr>
+            <p:ph type="sldNum" sz="quarter" idx="5"/>
+          </p:nvPr>
+        </p:nvSpPr>
+        <p:spPr/>
+      </p:sp>
+    </p:spTree>
+  </p:cSld>
+  <p:clrMapOvr>
+    <a:masterClrMapping/>
+  </p:clrMapOvr>
+</p:notes>
+</file>
+
+<file path=ppt/notesSlides/notesSlide14.xml><?xml version="1.0" encoding="utf-8"?>
+<p:notes xmlns:a="http://schemas.openxmlformats.org/drawingml/2006/main" xmlns:r="http://schemas.openxmlformats.org/officeDocument/2006/relationships" xmlns:p="http://schemas.openxmlformats.org/presentationml/2006/main">
+  <p:cSld>
+    <p:spTree>
+      <p:nvGrpSpPr>
+        <p:cNvPr id="1" name=""/>
+        <p:cNvGrpSpPr/>
+        <p:nvPr/>
+      </p:nvGrpSpPr>
+      <p:grpSpPr>
+        <a:xfrm>
+          <a:off x="0" y="0"/>
+          <a:ext cx="0" cy="0"/>
+          <a:chOff x="0" y="0"/>
+          <a:chExt cx="0" cy="0"/>
+        </a:xfrm>
+      </p:grpSpPr>
+      <p:sp>
+        <p:nvSpPr>
+          <p:cNvPr id="2" name="Slide Image Placeholder 1"/>
+          <p:cNvSpPr>
+            <a:spLocks noGrp="1" noRot="1" noChangeAspect="1"/>
+          </p:cNvSpPr>
+          <p:nvPr>
+            <p:ph type="sldImg" idx="2"/>
+          </p:nvPr>
+        </p:nvSpPr>
+        <p:spPr/>
+      </p:sp>
+      <p:sp>
+        <p:nvSpPr>
+          <p:cNvPr id="3" name="Notes Placeholder 2"/>
+          <p:cNvSpPr>
+            <a:spLocks noGrp="1"/>
+          </p:cNvSpPr>
+          <p:nvPr>
+            <p:ph type="body" sz="quarter" idx="3"/>
+          </p:nvPr>
+        </p:nvSpPr>
+        <p:spPr/>
+        <p:txBody>
+          <a:bodyPr/>
+          <a:lstStyle/>
+          <a:p>
+            <a:r>
+              <a:t>Key point: money and goods flow in OPPOSITE directions around the loop, forming a closed, sustainable cycle. Explicitly flag the model's limitations (no savings, no government, no foreign trade) - this sets up the 'Advanced' extension on the next slide.</a:t>
+            </a:r>
+          </a:p>
+        </p:txBody>
+      </p:sp>
+      <p:sp>
+        <p:nvSpPr>
+          <p:cNvPr id="4" name="Slide Number Placeholder 3"/>
+          <p:cNvSpPr>
+            <a:spLocks noGrp="1"/>
+          </p:cNvSpPr>
+          <p:nvPr>
+            <p:ph type="sldNum" sz="quarter" idx="5"/>
+          </p:nvPr>
+        </p:nvSpPr>
+        <p:spPr/>
+      </p:sp>
+    </p:spTree>
+  </p:cSld>
+  <p:clrMapOvr>
+    <a:masterClrMapping/>
+  </p:clrMapOvr>
+</p:notes>
+</file>
+
+<file path=ppt/notesSlides/notesSlide15.xml><?xml version="1.0" encoding="utf-8"?>
+<p:notes xmlns:a="http://schemas.openxmlformats.org/drawingml/2006/main" xmlns:r="http://schemas.openxmlformats.org/officeDocument/2006/relationships" xmlns:p="http://schemas.openxmlformats.org/presentationml/2006/main">
+  <p:cSld>
+    <p:spTree>
+      <p:nvGrpSpPr>
+        <p:cNvPr id="1" name=""/>
+        <p:cNvGrpSpPr/>
+        <p:nvPr/>
+      </p:nvGrpSpPr>
+      <p:grpSpPr>
+        <a:xfrm>
+          <a:off x="0" y="0"/>
+          <a:ext cx="0" cy="0"/>
+          <a:chOff x="0" y="0"/>
+          <a:chExt cx="0" cy="0"/>
+        </a:xfrm>
+      </p:grpSpPr>
+      <p:sp>
+        <p:nvSpPr>
+          <p:cNvPr id="2" name="Slide Image Placeholder 1"/>
+          <p:cNvSpPr>
+            <a:spLocks noGrp="1" noRot="1" noChangeAspect="1"/>
+          </p:cNvSpPr>
+          <p:nvPr>
+            <p:ph type="sldImg" idx="2"/>
+          </p:nvPr>
+        </p:nvSpPr>
+        <p:spPr/>
+      </p:sp>
+      <p:sp>
+        <p:nvSpPr>
+          <p:cNvPr id="3" name="Notes Placeholder 2"/>
+          <p:cNvSpPr>
+            <a:spLocks noGrp="1"/>
+          </p:cNvSpPr>
+          <p:nvPr>
+            <p:ph type="body" sz="quarter" idx="3"/>
+          </p:nvPr>
+        </p:nvSpPr>
+        <p:spPr/>
+        <p:txBody>
+          <a:bodyPr/>
+          <a:lstStyle/>
+          <a:p>
+            <a:r>
+              <a:t>New, denser diagram - give students 10-15 seconds to visually scan before narrating. Ask: 'what's new here compared to before?' (a Government box, plus taxes/subsidies/transfers).</a:t>
+            </a:r>
+          </a:p>
+        </p:txBody>
+      </p:sp>
+      <p:sp>
+        <p:nvSpPr>
+          <p:cNvPr id="4" name="Slide Number Placeholder 3"/>
+          <p:cNvSpPr>
+            <a:spLocks noGrp="1"/>
+          </p:cNvSpPr>
+          <p:nvPr>
+            <p:ph type="sldNum" sz="quarter" idx="5"/>
+          </p:nvPr>
+        </p:nvSpPr>
+        <p:spPr/>
+      </p:sp>
+    </p:spTree>
+  </p:cSld>
+  <p:clrMapOvr>
+    <a:masterClrMapping/>
+  </p:clrMapOvr>
+</p:notes>
+</file>
+
+<file path=ppt/notesSlides/notesSlide16.xml><?xml version="1.0" encoding="utf-8"?>
+<p:notes xmlns:a="http://schemas.openxmlformats.org/drawingml/2006/main" xmlns:r="http://schemas.openxmlformats.org/officeDocument/2006/relationships" xmlns:p="http://schemas.openxmlformats.org/presentationml/2006/main">
+  <p:cSld>
+    <p:spTree>
+      <p:nvGrpSpPr>
+        <p:cNvPr id="1" name=""/>
+        <p:cNvGrpSpPr/>
+        <p:nvPr/>
+      </p:nvGrpSpPr>
+      <p:grpSpPr>
+        <a:xfrm>
+          <a:off x="0" y="0"/>
+          <a:ext cx="0" cy="0"/>
+          <a:chOff x="0" y="0"/>
+          <a:chExt cx="0" cy="0"/>
+        </a:xfrm>
+      </p:grpSpPr>
+      <p:sp>
+        <p:nvSpPr>
+          <p:cNvPr id="2" name="Slide Image Placeholder 1"/>
+          <p:cNvSpPr>
+            <a:spLocks noGrp="1" noRot="1" noChangeAspect="1"/>
+          </p:cNvSpPr>
+          <p:nvPr>
+            <p:ph type="sldImg" idx="2"/>
+          </p:nvPr>
+        </p:nvSpPr>
+        <p:spPr/>
+      </p:sp>
+      <p:sp>
+        <p:nvSpPr>
+          <p:cNvPr id="3" name="Notes Placeholder 2"/>
+          <p:cNvSpPr>
+            <a:spLocks noGrp="1"/>
+          </p:cNvSpPr>
+          <p:nvPr>
+            <p:ph type="body" sz="quarter" idx="3"/>
+          </p:nvPr>
+        </p:nvSpPr>
+        <p:spPr/>
+        <p:txBody>
+          <a:bodyPr/>
+          <a:lstStyle/>
+          <a:p>
+            <a:r>
+              <a:t>Only two links matter here: income tax (households &lt;-&gt; factors market) and producer tax (firms &lt;-&gt; goods market). Don't over-explain fiscal policy now - say explicitly 'we'll come back to taxes and subsidies in depth in Lecture 7.'</a:t>
+            </a:r>
+          </a:p>
+        </p:txBody>
+      </p:sp>
+      <p:sp>
+        <p:nvSpPr>
+          <p:cNvPr id="4" name="Slide Number Placeholder 3"/>
+          <p:cNvSpPr>
+            <a:spLocks noGrp="1"/>
+          </p:cNvSpPr>
+          <p:nvPr>
+            <p:ph type="sldNum" sz="quarter" idx="5"/>
+          </p:nvPr>
+        </p:nvSpPr>
+        <p:spPr/>
+      </p:sp>
+    </p:spTree>
+  </p:cSld>
+  <p:clrMapOvr>
+    <a:masterClrMapping/>
+  </p:clrMapOvr>
+</p:notes>
+</file>
+
+<file path=ppt/notesSlides/notesSlide17.xml><?xml version="1.0" encoding="utf-8"?>
+<p:notes xmlns:a="http://schemas.openxmlformats.org/drawingml/2006/main" xmlns:r="http://schemas.openxmlformats.org/officeDocument/2006/relationships" xmlns:p="http://schemas.openxmlformats.org/presentationml/2006/main">
+  <p:cSld>
+    <p:spTree>
+      <p:nvGrpSpPr>
+        <p:cNvPr id="1" name=""/>
+        <p:cNvGrpSpPr/>
+        <p:nvPr/>
+      </p:nvGrpSpPr>
+      <p:grpSpPr>
+        <a:xfrm>
+          <a:off x="0" y="0"/>
+          <a:ext cx="0" cy="0"/>
+          <a:chOff x="0" y="0"/>
+          <a:chExt cx="0" cy="0"/>
+        </a:xfrm>
+      </p:grpSpPr>
+      <p:sp>
+        <p:nvSpPr>
+          <p:cNvPr id="2" name="Slide Image Placeholder 1"/>
+          <p:cNvSpPr>
+            <a:spLocks noGrp="1" noRot="1" noChangeAspect="1"/>
+          </p:cNvSpPr>
+          <p:nvPr>
+            <p:ph type="sldImg" idx="2"/>
+          </p:nvPr>
+        </p:nvSpPr>
+        <p:spPr/>
+      </p:sp>
+      <p:sp>
+        <p:nvSpPr>
+          <p:cNvPr id="3" name="Notes Placeholder 2"/>
+          <p:cNvSpPr>
+            <a:spLocks noGrp="1"/>
+          </p:cNvSpPr>
+          <p:nvPr>
+            <p:ph type="body" sz="quarter" idx="3"/>
+          </p:nvPr>
+        </p:nvSpPr>
+        <p:spPr/>
+        <p:txBody>
+          <a:bodyPr/>
+          <a:lstStyle/>
+          <a:p>
+            <a:r>
+              <a:t>Payoff slide - make sure students see the demand/supply role-reversal between the two markets, the most common confusion point. Comprehension check: 'In the factors/labor market, who demands and who supplies?' (Firms demand, households supply - opposite of the goods market roles.)</a:t>
+            </a:r>
+          </a:p>
+        </p:txBody>
+      </p:sp>
+      <p:sp>
+        <p:nvSpPr>
+          <p:cNvPr id="4" name="Slide Number Placeholder 3"/>
+          <p:cNvSpPr>
+            <a:spLocks noGrp="1"/>
+          </p:cNvSpPr>
+          <p:nvPr>
+            <p:ph type="sldNum" sz="quarter" idx="5"/>
+          </p:nvPr>
+        </p:nvSpPr>
+        <p:spPr/>
+      </p:sp>
+    </p:spTree>
+  </p:cSld>
+  <p:clrMapOvr>
+    <a:masterClrMapping/>
+  </p:clrMapOvr>
+</p:notes>
+</file>
+
+<file path=ppt/notesSlides/notesSlide18.xml><?xml version="1.0" encoding="utf-8"?>
+<p:notes xmlns:a="http://schemas.openxmlformats.org/drawingml/2006/main" xmlns:r="http://schemas.openxmlformats.org/officeDocument/2006/relationships" xmlns:p="http://schemas.openxmlformats.org/presentationml/2006/main">
+  <p:cSld>
+    <p:spTree>
+      <p:nvGrpSpPr>
+        <p:cNvPr id="1" name=""/>
+        <p:cNvGrpSpPr/>
+        <p:nvPr/>
+      </p:nvGrpSpPr>
+      <p:grpSpPr>
+        <a:xfrm>
+          <a:off x="0" y="0"/>
+          <a:ext cx="0" cy="0"/>
+          <a:chOff x="0" y="0"/>
+          <a:chExt cx="0" cy="0"/>
+        </a:xfrm>
+      </p:grpSpPr>
+      <p:sp>
+        <p:nvSpPr>
+          <p:cNvPr id="2" name="Slide Image Placeholder 1"/>
+          <p:cNvSpPr>
+            <a:spLocks noGrp="1" noRot="1" noChangeAspect="1"/>
+          </p:cNvSpPr>
+          <p:nvPr>
+            <p:ph type="sldImg" idx="2"/>
+          </p:nvPr>
+        </p:nvSpPr>
+        <p:spPr/>
+      </p:sp>
+      <p:sp>
+        <p:nvSpPr>
+          <p:cNvPr id="3" name="Notes Placeholder 2"/>
+          <p:cNvSpPr>
+            <a:spLocks noGrp="1"/>
+          </p:cNvSpPr>
+          <p:nvPr>
+            <p:ph type="body" sz="quarter" idx="3"/>
+          </p:nvPr>
+        </p:nvSpPr>
+        <p:spPr/>
+        <p:txBody>
+          <a:bodyPr/>
+          <a:lstStyle/>
+          <a:p>
+            <a:r>
+              <a:t>Explicit transition: 'We just saw HOW actors connect (circular flow). Now: HOW MUCH can they produce given limited resources (PPF)?' Emphasize scarcity as THE core economic problem before reading the bullet points.</a:t>
+            </a:r>
+          </a:p>
+        </p:txBody>
+      </p:sp>
+      <p:sp>
+        <p:nvSpPr>
+          <p:cNvPr id="4" name="Slide Number Placeholder 3"/>
+          <p:cNvSpPr>
+            <a:spLocks noGrp="1"/>
+          </p:cNvSpPr>
+          <p:nvPr>
+            <p:ph type="sldNum" sz="quarter" idx="5"/>
+          </p:nvPr>
+        </p:nvSpPr>
+        <p:spPr/>
+      </p:sp>
+    </p:spTree>
+  </p:cSld>
+  <p:clrMapOvr>
+    <a:masterClrMapping/>
+  </p:clrMapOvr>
+</p:notes>
+</file>
+
+<file path=ppt/notesSlides/notesSlide19.xml><?xml version="1.0" encoding="utf-8"?>
+<p:notes xmlns:a="http://schemas.openxmlformats.org/drawingml/2006/main" xmlns:r="http://schemas.openxmlformats.org/officeDocument/2006/relationships" xmlns:p="http://schemas.openxmlformats.org/presentationml/2006/main">
+  <p:cSld>
+    <p:spTree>
+      <p:nvGrpSpPr>
+        <p:cNvPr id="1" name=""/>
+        <p:cNvGrpSpPr/>
+        <p:nvPr/>
+      </p:nvGrpSpPr>
+      <p:grpSpPr>
+        <a:xfrm>
+          <a:off x="0" y="0"/>
+          <a:ext cx="0" cy="0"/>
+          <a:chOff x="0" y="0"/>
+          <a:chExt cx="0" cy="0"/>
+        </a:xfrm>
+      </p:grpSpPr>
+      <p:sp>
+        <p:nvSpPr>
+          <p:cNvPr id="2" name="Slide Image Placeholder 1"/>
+          <p:cNvSpPr>
+            <a:spLocks noGrp="1" noRot="1" noChangeAspect="1"/>
+          </p:cNvSpPr>
+          <p:nvPr>
+            <p:ph type="sldImg" idx="2"/>
+          </p:nvPr>
+        </p:nvSpPr>
+        <p:spPr/>
+      </p:sp>
+      <p:sp>
+        <p:nvSpPr>
+          <p:cNvPr id="3" name="Notes Placeholder 2"/>
+          <p:cNvSpPr>
+            <a:spLocks noGrp="1"/>
+          </p:cNvSpPr>
+          <p:nvPr>
+            <p:ph type="body" sz="quarter" idx="3"/>
+          </p:nvPr>
+        </p:nvSpPr>
+        <p:spPr/>
+        <p:txBody>
+          <a:bodyPr/>
+          <a:lstStyle/>
+          <a:p>
+            <a:r>
+              <a:t>Move quickly through the six assumptions - don't dwell on each one. Flag the ones that resurface later: only two goods, resources can shift freely between them, and a fixed short time period (the David/Sherry example uses exactly one month).</a:t>
+            </a:r>
+          </a:p>
+        </p:txBody>
+      </p:sp>
+      <p:sp>
+        <p:nvSpPr>
+          <p:cNvPr id="4" name="Slide Number Placeholder 3"/>
+          <p:cNvSpPr>
+            <a:spLocks noGrp="1"/>
+          </p:cNvSpPr>
+          <p:nvPr>
+            <p:ph type="sldNum" sz="quarter" idx="5"/>
+          </p:nvPr>
+        </p:nvSpPr>
+        <p:spPr/>
+      </p:sp>
+    </p:spTree>
+  </p:cSld>
+  <p:clrMapOvr>
+    <a:masterClrMapping/>
+  </p:clrMapOvr>
+</p:notes>
+</file>
+
+<file path=ppt/notesSlides/notesSlide2.xml><?xml version="1.0" encoding="utf-8"?>
+<p:notes xmlns:a="http://schemas.openxmlformats.org/drawingml/2006/main" xmlns:r="http://schemas.openxmlformats.org/officeDocument/2006/relationships" xmlns:p="http://schemas.openxmlformats.org/presentationml/2006/main">
+  <p:cSld>
+    <p:spTree>
+      <p:nvGrpSpPr>
+        <p:cNvPr id="1" name=""/>
+        <p:cNvGrpSpPr/>
+        <p:nvPr/>
+      </p:nvGrpSpPr>
+      <p:grpSpPr>
+        <a:xfrm>
+          <a:off x="0" y="0"/>
+          <a:ext cx="0" cy="0"/>
+          <a:chOff x="0" y="0"/>
+          <a:chExt cx="0" cy="0"/>
+        </a:xfrm>
+      </p:grpSpPr>
+      <p:sp>
+        <p:nvSpPr>
+          <p:cNvPr id="2" name="Slide Image Placeholder 1"/>
+          <p:cNvSpPr>
+            <a:spLocks noGrp="1" noRot="1" noChangeAspect="1"/>
+          </p:cNvSpPr>
+          <p:nvPr>
+            <p:ph type="sldImg" idx="2"/>
+          </p:nvPr>
+        </p:nvSpPr>
+        <p:spPr/>
+      </p:sp>
+      <p:sp>
+        <p:nvSpPr>
+          <p:cNvPr id="3" name="Notes Placeholder 2"/>
+          <p:cNvSpPr>
+            <a:spLocks noGrp="1"/>
+          </p:cNvSpPr>
+          <p:nvPr>
+            <p:ph type="body" sz="quarter" idx="3"/>
+          </p:nvPr>
+        </p:nvSpPr>
+        <p:spPr/>
+        <p:txBody>
+          <a:bodyPr/>
+          <a:lstStyle/>
+          <a:p>
+            <a:r>
+              <a:t>Bridge from L1's methodology slides. Ask: 'why does it matter that economics is a SOCIAL science and not a natural science?' (people react, expectations shift, no controlled lab). Keep to 2 min - this is a launchpad into slide 3.</a:t>
+            </a:r>
+          </a:p>
+        </p:txBody>
+      </p:sp>
+      <p:sp>
+        <p:nvSpPr>
+          <p:cNvPr id="4" name="Slide Number Placeholder 3"/>
+          <p:cNvSpPr>
+            <a:spLocks noGrp="1"/>
+          </p:cNvSpPr>
+          <p:nvPr>
+            <p:ph type="sldNum" sz="quarter" idx="5"/>
+          </p:nvPr>
+        </p:nvSpPr>
+        <p:spPr/>
+      </p:sp>
+    </p:spTree>
+  </p:cSld>
+  <p:clrMapOvr>
+    <a:masterClrMapping/>
+  </p:clrMapOvr>
+</p:notes>
+</file>
+
+<file path=ppt/notesSlides/notesSlide20.xml><?xml version="1.0" encoding="utf-8"?>
+<p:notes xmlns:a="http://schemas.openxmlformats.org/drawingml/2006/main" xmlns:r="http://schemas.openxmlformats.org/officeDocument/2006/relationships" xmlns:p="http://schemas.openxmlformats.org/presentationml/2006/main">
+  <p:cSld>
+    <p:spTree>
+      <p:nvGrpSpPr>
+        <p:cNvPr id="1" name=""/>
+        <p:cNvGrpSpPr/>
+        <p:nvPr/>
+      </p:nvGrpSpPr>
+      <p:grpSpPr>
+        <a:xfrm>
+          <a:off x="0" y="0"/>
+          <a:ext cx="0" cy="0"/>
+          <a:chOff x="0" y="0"/>
+          <a:chExt cx="0" cy="0"/>
+        </a:xfrm>
+      </p:grpSpPr>
+      <p:sp>
+        <p:nvSpPr>
+          <p:cNvPr id="2" name="Slide Image Placeholder 1"/>
+          <p:cNvSpPr>
+            <a:spLocks noGrp="1" noRot="1" noChangeAspect="1"/>
+          </p:cNvSpPr>
+          <p:nvPr>
+            <p:ph type="sldImg" idx="2"/>
+          </p:nvPr>
+        </p:nvSpPr>
+        <p:spPr/>
+      </p:sp>
+      <p:sp>
+        <p:nvSpPr>
+          <p:cNvPr id="3" name="Notes Placeholder 2"/>
+          <p:cNvSpPr>
+            <a:spLocks noGrp="1"/>
+          </p:cNvSpPr>
+          <p:nvPr>
+            <p:ph type="body" sz="quarter" idx="3"/>
+          </p:nvPr>
+        </p:nvSpPr>
+        <p:spPr/>
+        <p:txBody>
+          <a:bodyPr/>
+          <a:lstStyle/>
+          <a:p>
+            <a:r>
+              <a:t>First exposure to the classic 'guns and butter' framing. Plot the point together and ask: 'what would it mean to move this point up? Down and to the right?'</a:t>
+            </a:r>
+          </a:p>
+        </p:txBody>
+      </p:sp>
+      <p:sp>
+        <p:nvSpPr>
+          <p:cNvPr id="4" name="Slide Number Placeholder 3"/>
+          <p:cNvSpPr>
+            <a:spLocks noGrp="1"/>
+          </p:cNvSpPr>
+          <p:nvPr>
+            <p:ph type="sldNum" sz="quarter" idx="5"/>
+          </p:nvPr>
+        </p:nvSpPr>
+        <p:spPr/>
+      </p:sp>
+    </p:spTree>
+  </p:cSld>
+  <p:clrMapOvr>
+    <a:masterClrMapping/>
+  </p:clrMapOvr>
+</p:notes>
+</file>
+
+<file path=ppt/notesSlides/notesSlide21.xml><?xml version="1.0" encoding="utf-8"?>
+<p:notes xmlns:a="http://schemas.openxmlformats.org/drawingml/2006/main" xmlns:r="http://schemas.openxmlformats.org/officeDocument/2006/relationships" xmlns:p="http://schemas.openxmlformats.org/presentationml/2006/main">
+  <p:cSld>
+    <p:spTree>
+      <p:nvGrpSpPr>
+        <p:cNvPr id="1" name=""/>
+        <p:cNvGrpSpPr/>
+        <p:nvPr/>
+      </p:nvGrpSpPr>
+      <p:grpSpPr>
+        <a:xfrm>
+          <a:off x="0" y="0"/>
+          <a:ext cx="0" cy="0"/>
+          <a:chOff x="0" y="0"/>
+          <a:chExt cx="0" cy="0"/>
+        </a:xfrm>
+      </p:grpSpPr>
+      <p:sp>
+        <p:nvSpPr>
+          <p:cNvPr id="2" name="Slide Image Placeholder 1"/>
+          <p:cNvSpPr>
+            <a:spLocks noGrp="1" noRot="1" noChangeAspect="1"/>
+          </p:cNvSpPr>
+          <p:nvPr>
+            <p:ph type="sldImg" idx="2"/>
+          </p:nvPr>
+        </p:nvSpPr>
+        <p:spPr/>
+      </p:sp>
+      <p:sp>
+        <p:nvSpPr>
+          <p:cNvPr id="3" name="Notes Placeholder 2"/>
+          <p:cNvSpPr>
+            <a:spLocks noGrp="1"/>
+          </p:cNvSpPr>
+          <p:nvPr>
+            <p:ph type="body" sz="quarter" idx="3"/>
+          </p:nvPr>
+        </p:nvSpPr>
+        <p:spPr/>
+        <p:txBody>
+          <a:bodyPr/>
+          <a:lstStyle/>
+          <a:p>
+            <a:r>
+              <a:t>Emphasize the two conditions together: 'possible' AND 'fully employed'. The curve itself - not the area under it - is the object of interest; that distinction pays off on slide 22.</a:t>
+            </a:r>
+          </a:p>
+        </p:txBody>
+      </p:sp>
+      <p:sp>
+        <p:nvSpPr>
+          <p:cNvPr id="4" name="Slide Number Placeholder 3"/>
+          <p:cNvSpPr>
+            <a:spLocks noGrp="1"/>
+          </p:cNvSpPr>
+          <p:nvPr>
+            <p:ph type="sldNum" sz="quarter" idx="5"/>
+          </p:nvPr>
+        </p:nvSpPr>
+        <p:spPr/>
+      </p:sp>
+    </p:spTree>
+  </p:cSld>
+  <p:clrMapOvr>
+    <a:masterClrMapping/>
+  </p:clrMapOvr>
+</p:notes>
+</file>
+
+<file path=ppt/notesSlides/notesSlide22.xml><?xml version="1.0" encoding="utf-8"?>
+<p:notes xmlns:a="http://schemas.openxmlformats.org/drawingml/2006/main" xmlns:r="http://schemas.openxmlformats.org/officeDocument/2006/relationships" xmlns:p="http://schemas.openxmlformats.org/presentationml/2006/main">
+  <p:cSld>
+    <p:spTree>
+      <p:nvGrpSpPr>
+        <p:cNvPr id="1" name=""/>
+        <p:cNvGrpSpPr/>
+        <p:nvPr/>
+      </p:nvGrpSpPr>
+      <p:grpSpPr>
+        <a:xfrm>
+          <a:off x="0" y="0"/>
+          <a:ext cx="0" cy="0"/>
+          <a:chOff x="0" y="0"/>
+          <a:chExt cx="0" cy="0"/>
+        </a:xfrm>
+      </p:grpSpPr>
+      <p:sp>
+        <p:nvSpPr>
+          <p:cNvPr id="2" name="Slide Image Placeholder 1"/>
+          <p:cNvSpPr>
+            <a:spLocks noGrp="1" noRot="1" noChangeAspect="1"/>
+          </p:cNvSpPr>
+          <p:nvPr>
+            <p:ph type="sldImg" idx="2"/>
+          </p:nvPr>
+        </p:nvSpPr>
+        <p:spPr/>
+      </p:sp>
+      <p:sp>
+        <p:nvSpPr>
+          <p:cNvPr id="3" name="Notes Placeholder 2"/>
+          <p:cNvSpPr>
+            <a:spLocks noGrp="1"/>
+          </p:cNvSpPr>
+          <p:nvPr>
+            <p:ph type="body" sz="quarter" idx="3"/>
+          </p:nvPr>
+        </p:nvSpPr>
+        <p:spPr/>
+        <p:txBody>
+          <a:bodyPr/>
+          <a:lstStyle/>
+          <a:p>
+            <a:r>
+              <a:t>Use the three labeled stars (all guns, all butter, a mix) to show the range of the frontier. Ask: 'why is this curve bowed outward instead of a straight line?' - this primes the concavity discussion on slides 34-35 without answering it yet.</a:t>
+            </a:r>
+          </a:p>
+        </p:txBody>
+      </p:sp>
+      <p:sp>
+        <p:nvSpPr>
+          <p:cNvPr id="4" name="Slide Number Placeholder 3"/>
+          <p:cNvSpPr>
+            <a:spLocks noGrp="1"/>
+          </p:cNvSpPr>
+          <p:nvPr>
+            <p:ph type="sldNum" sz="quarter" idx="5"/>
+          </p:nvPr>
+        </p:nvSpPr>
+        <p:spPr/>
+      </p:sp>
+    </p:spTree>
+  </p:cSld>
+  <p:clrMapOvr>
+    <a:masterClrMapping/>
+  </p:clrMapOvr>
+</p:notes>
+</file>
+
+<file path=ppt/notesSlides/notesSlide23.xml><?xml version="1.0" encoding="utf-8"?>
+<p:notes xmlns:a="http://schemas.openxmlformats.org/drawingml/2006/main" xmlns:r="http://schemas.openxmlformats.org/officeDocument/2006/relationships" xmlns:p="http://schemas.openxmlformats.org/presentationml/2006/main">
+  <p:cSld>
+    <p:spTree>
+      <p:nvGrpSpPr>
+        <p:cNvPr id="1" name=""/>
+        <p:cNvGrpSpPr/>
+        <p:nvPr/>
+      </p:nvGrpSpPr>
+      <p:grpSpPr>
+        <a:xfrm>
+          <a:off x="0" y="0"/>
+          <a:ext cx="0" cy="0"/>
+          <a:chOff x="0" y="0"/>
+          <a:chExt cx="0" cy="0"/>
+        </a:xfrm>
+      </p:grpSpPr>
+      <p:sp>
+        <p:nvSpPr>
+          <p:cNvPr id="2" name="Slide Image Placeholder 1"/>
+          <p:cNvSpPr>
+            <a:spLocks noGrp="1" noRot="1" noChangeAspect="1"/>
+          </p:cNvSpPr>
+          <p:nvPr>
+            <p:ph type="sldImg" idx="2"/>
+          </p:nvPr>
+        </p:nvSpPr>
+        <p:spPr/>
+      </p:sp>
+      <p:sp>
+        <p:nvSpPr>
+          <p:cNvPr id="3" name="Notes Placeholder 2"/>
+          <p:cNvSpPr>
+            <a:spLocks noGrp="1"/>
+          </p:cNvSpPr>
+          <p:nvPr>
+            <p:ph type="body" sz="quarter" idx="3"/>
+          </p:nvPr>
+        </p:nvSpPr>
+        <p:spPr/>
+        <p:txBody>
+          <a:bodyPr/>
+          <a:lstStyle/>
+          <a:p>
+            <a:r>
+              <a:t>Click-through build across slides 23-26: point A moves around relative to fixed point B. Here, both A and B sit ON the frontier - ask 'is A better than B?' and let students discover there's no objective answer (it depends on preferences for guns vs butter) before advancing.</a:t>
+            </a:r>
+          </a:p>
+        </p:txBody>
+      </p:sp>
+      <p:sp>
+        <p:nvSpPr>
+          <p:cNvPr id="4" name="Slide Number Placeholder 3"/>
+          <p:cNvSpPr>
+            <a:spLocks noGrp="1"/>
+          </p:cNvSpPr>
+          <p:nvPr>
+            <p:ph type="sldNum" sz="quarter" idx="5"/>
+          </p:nvPr>
+        </p:nvSpPr>
+        <p:spPr/>
+      </p:sp>
+    </p:spTree>
+  </p:cSld>
+  <p:clrMapOvr>
+    <a:masterClrMapping/>
+  </p:clrMapOvr>
+</p:notes>
+</file>
+
+<file path=ppt/notesSlides/notesSlide24.xml><?xml version="1.0" encoding="utf-8"?>
+<p:notes xmlns:a="http://schemas.openxmlformats.org/drawingml/2006/main" xmlns:r="http://schemas.openxmlformats.org/officeDocument/2006/relationships" xmlns:p="http://schemas.openxmlformats.org/presentationml/2006/main">
+  <p:cSld>
+    <p:spTree>
+      <p:nvGrpSpPr>
+        <p:cNvPr id="1" name=""/>
+        <p:cNvGrpSpPr/>
+        <p:nvPr/>
+      </p:nvGrpSpPr>
+      <p:grpSpPr>
+        <a:xfrm>
+          <a:off x="0" y="0"/>
+          <a:ext cx="0" cy="0"/>
+          <a:chOff x="0" y="0"/>
+          <a:chExt cx="0" cy="0"/>
+        </a:xfrm>
+      </p:grpSpPr>
+      <p:sp>
+        <p:nvSpPr>
+          <p:cNvPr id="2" name="Slide Image Placeholder 1"/>
+          <p:cNvSpPr>
+            <a:spLocks noGrp="1" noRot="1" noChangeAspect="1"/>
+          </p:cNvSpPr>
+          <p:nvPr>
+            <p:ph type="sldImg" idx="2"/>
+          </p:nvPr>
+        </p:nvSpPr>
+        <p:spPr/>
+      </p:sp>
+      <p:sp>
+        <p:nvSpPr>
+          <p:cNvPr id="3" name="Notes Placeholder 2"/>
+          <p:cNvSpPr>
+            <a:spLocks noGrp="1"/>
+          </p:cNvSpPr>
+          <p:nvPr>
+            <p:ph type="body" sz="quarter" idx="3"/>
+          </p:nvPr>
+        </p:nvSpPr>
+        <p:spPr/>
+        <p:txBody>
+          <a:bodyPr/>
+          <a:lstStyle/>
+          <a:p>
+            <a:r>
+              <a:t>Continuation of the build - watch where A moves and ask the same 'better/worse/not comparable?' question each time before revealing the next slide's position.</a:t>
+            </a:r>
+          </a:p>
+        </p:txBody>
+      </p:sp>
+      <p:sp>
+        <p:nvSpPr>
+          <p:cNvPr id="4" name="Slide Number Placeholder 3"/>
+          <p:cNvSpPr>
+            <a:spLocks noGrp="1"/>
+          </p:cNvSpPr>
+          <p:nvPr>
+            <p:ph type="sldNum" sz="quarter" idx="5"/>
+          </p:nvPr>
+        </p:nvSpPr>
+        <p:spPr/>
+      </p:sp>
+    </p:spTree>
+  </p:cSld>
+  <p:clrMapOvr>
+    <a:masterClrMapping/>
+  </p:clrMapOvr>
+</p:notes>
+</file>
+
+<file path=ppt/notesSlides/notesSlide25.xml><?xml version="1.0" encoding="utf-8"?>
+<p:notes xmlns:a="http://schemas.openxmlformats.org/drawingml/2006/main" xmlns:r="http://schemas.openxmlformats.org/officeDocument/2006/relationships" xmlns:p="http://schemas.openxmlformats.org/presentationml/2006/main">
+  <p:cSld>
+    <p:spTree>
+      <p:nvGrpSpPr>
+        <p:cNvPr id="1" name=""/>
+        <p:cNvGrpSpPr/>
+        <p:nvPr/>
+      </p:nvGrpSpPr>
+      <p:grpSpPr>
+        <a:xfrm>
+          <a:off x="0" y="0"/>
+          <a:ext cx="0" cy="0"/>
+          <a:chOff x="0" y="0"/>
+          <a:chExt cx="0" cy="0"/>
+        </a:xfrm>
+      </p:grpSpPr>
+      <p:sp>
+        <p:nvSpPr>
+          <p:cNvPr id="2" name="Slide Image Placeholder 1"/>
+          <p:cNvSpPr>
+            <a:spLocks noGrp="1" noRot="1" noChangeAspect="1"/>
+          </p:cNvSpPr>
+          <p:nvPr>
+            <p:ph type="sldImg" idx="2"/>
+          </p:nvPr>
+        </p:nvSpPr>
+        <p:spPr/>
+      </p:sp>
+      <p:sp>
+        <p:nvSpPr>
+          <p:cNvPr id="3" name="Notes Placeholder 2"/>
+          <p:cNvSpPr>
+            <a:spLocks noGrp="1"/>
+          </p:cNvSpPr>
+          <p:nvPr>
+            <p:ph type="body" sz="quarter" idx="3"/>
+          </p:nvPr>
+        </p:nvSpPr>
+        <p:spPr/>
+        <p:txBody>
+          <a:bodyPr/>
+          <a:lstStyle/>
+          <a:p>
+            <a:r>
+              <a:t>Continuation of the build.</a:t>
+            </a:r>
+          </a:p>
+        </p:txBody>
+      </p:sp>
+      <p:sp>
+        <p:nvSpPr>
+          <p:cNvPr id="4" name="Slide Number Placeholder 3"/>
+          <p:cNvSpPr>
+            <a:spLocks noGrp="1"/>
+          </p:cNvSpPr>
+          <p:nvPr>
+            <p:ph type="sldNum" sz="quarter" idx="5"/>
+          </p:nvPr>
+        </p:nvSpPr>
+        <p:spPr/>
+      </p:sp>
+    </p:spTree>
+  </p:cSld>
+  <p:clrMapOvr>
+    <a:masterClrMapping/>
+  </p:clrMapOvr>
+</p:notes>
+</file>
+
+<file path=ppt/notesSlides/notesSlide26.xml><?xml version="1.0" encoding="utf-8"?>
+<p:notes xmlns:a="http://schemas.openxmlformats.org/drawingml/2006/main" xmlns:r="http://schemas.openxmlformats.org/officeDocument/2006/relationships" xmlns:p="http://schemas.openxmlformats.org/presentationml/2006/main">
+  <p:cSld>
+    <p:spTree>
+      <p:nvGrpSpPr>
+        <p:cNvPr id="1" name=""/>
+        <p:cNvGrpSpPr/>
+        <p:nvPr/>
+      </p:nvGrpSpPr>
+      <p:grpSpPr>
+        <a:xfrm>
+          <a:off x="0" y="0"/>
+          <a:ext cx="0" cy="0"/>
+          <a:chOff x="0" y="0"/>
+          <a:chExt cx="0" cy="0"/>
+        </a:xfrm>
+      </p:grpSpPr>
+      <p:sp>
+        <p:nvSpPr>
+          <p:cNvPr id="2" name="Slide Image Placeholder 1"/>
+          <p:cNvSpPr>
+            <a:spLocks noGrp="1" noRot="1" noChangeAspect="1"/>
+          </p:cNvSpPr>
+          <p:nvPr>
+            <p:ph type="sldImg" idx="2"/>
+          </p:nvPr>
+        </p:nvSpPr>
+        <p:spPr/>
+      </p:sp>
+      <p:sp>
+        <p:nvSpPr>
+          <p:cNvPr id="3" name="Notes Placeholder 2"/>
+          <p:cNvSpPr>
+            <a:spLocks noGrp="1"/>
+          </p:cNvSpPr>
+          <p:nvPr>
+            <p:ph type="body" sz="quarter" idx="3"/>
+          </p:nvPr>
+        </p:nvSpPr>
+        <p:spPr/>
+        <p:txBody>
+          <a:bodyPr/>
+          <a:lstStyle/>
+          <a:p>
+            <a:r>
+              <a:t>A now sits OUTSIDE the frontier - ask 'can we have A now?' before revealing the answer: it's unattainable with current resources/technology. This is the payoff of the whole 23-26 sequence.</a:t>
+            </a:r>
+          </a:p>
+        </p:txBody>
+      </p:sp>
+      <p:sp>
+        <p:nvSpPr>
+          <p:cNvPr id="4" name="Slide Number Placeholder 3"/>
+          <p:cNvSpPr>
+            <a:spLocks noGrp="1"/>
+          </p:cNvSpPr>
+          <p:nvPr>
+            <p:ph type="sldNum" sz="quarter" idx="5"/>
+          </p:nvPr>
+        </p:nvSpPr>
+        <p:spPr/>
+      </p:sp>
+    </p:spTree>
+  </p:cSld>
+  <p:clrMapOvr>
+    <a:masterClrMapping/>
+  </p:clrMapOvr>
+</p:notes>
+</file>
+
+<file path=ppt/notesSlides/notesSlide27.xml><?xml version="1.0" encoding="utf-8"?>
+<p:notes xmlns:a="http://schemas.openxmlformats.org/drawingml/2006/main" xmlns:r="http://schemas.openxmlformats.org/officeDocument/2006/relationships" xmlns:p="http://schemas.openxmlformats.org/presentationml/2006/main">
+  <p:cSld>
+    <p:spTree>
+      <p:nvGrpSpPr>
+        <p:cNvPr id="1" name=""/>
+        <p:cNvGrpSpPr/>
+        <p:nvPr/>
+      </p:nvGrpSpPr>
+      <p:grpSpPr>
+        <a:xfrm>
+          <a:off x="0" y="0"/>
+          <a:ext cx="0" cy="0"/>
+          <a:chOff x="0" y="0"/>
+          <a:chExt cx="0" cy="0"/>
+        </a:xfrm>
+      </p:grpSpPr>
+      <p:sp>
+        <p:nvSpPr>
+          <p:cNvPr id="2" name="Slide Image Placeholder 1"/>
+          <p:cNvSpPr>
+            <a:spLocks noGrp="1" noRot="1" noChangeAspect="1"/>
+          </p:cNvSpPr>
+          <p:nvPr>
+            <p:ph type="sldImg" idx="2"/>
+          </p:nvPr>
+        </p:nvSpPr>
+        <p:spPr/>
+      </p:sp>
+      <p:sp>
+        <p:nvSpPr>
+          <p:cNvPr id="3" name="Notes Placeholder 2"/>
+          <p:cNvSpPr>
+            <a:spLocks noGrp="1"/>
+          </p:cNvSpPr>
+          <p:nvPr>
+            <p:ph type="body" sz="quarter" idx="3"/>
+          </p:nvPr>
+        </p:nvSpPr>
+        <p:spPr/>
+        <p:txBody>
+          <a:bodyPr/>
+          <a:lstStyle/>
+          <a:p>
+            <a:r>
+              <a:t>Formal takeaway sentence for the build: any point ON the frontier is efficient. Tie explicitly back to slide 21's 'fully employed' condition.</a:t>
+            </a:r>
+          </a:p>
+        </p:txBody>
+      </p:sp>
+      <p:sp>
+        <p:nvSpPr>
+          <p:cNvPr id="4" name="Slide Number Placeholder 3"/>
+          <p:cNvSpPr>
+            <a:spLocks noGrp="1"/>
+          </p:cNvSpPr>
+          <p:nvPr>
+            <p:ph type="sldNum" sz="quarter" idx="5"/>
+          </p:nvPr>
+        </p:nvSpPr>
+        <p:spPr/>
+      </p:sp>
+    </p:spTree>
+  </p:cSld>
+  <p:clrMapOvr>
+    <a:masterClrMapping/>
+  </p:clrMapOvr>
+</p:notes>
+</file>
+
+<file path=ppt/notesSlides/notesSlide28.xml><?xml version="1.0" encoding="utf-8"?>
+<p:notes xmlns:a="http://schemas.openxmlformats.org/drawingml/2006/main" xmlns:r="http://schemas.openxmlformats.org/officeDocument/2006/relationships" xmlns:p="http://schemas.openxmlformats.org/presentationml/2006/main">
+  <p:cSld>
+    <p:spTree>
+      <p:nvGrpSpPr>
+        <p:cNvPr id="1" name=""/>
+        <p:cNvGrpSpPr/>
+        <p:nvPr/>
+      </p:nvGrpSpPr>
+      <p:grpSpPr>
+        <a:xfrm>
+          <a:off x="0" y="0"/>
+          <a:ext cx="0" cy="0"/>
+          <a:chOff x="0" y="0"/>
+          <a:chExt cx="0" cy="0"/>
+        </a:xfrm>
+      </p:grpSpPr>
+      <p:sp>
+        <p:nvSpPr>
+          <p:cNvPr id="2" name="Slide Image Placeholder 1"/>
+          <p:cNvSpPr>
+            <a:spLocks noGrp="1" noRot="1" noChangeAspect="1"/>
+          </p:cNvSpPr>
+          <p:nvPr>
+            <p:ph type="sldImg" idx="2"/>
+          </p:nvPr>
+        </p:nvSpPr>
+        <p:spPr/>
+      </p:sp>
+      <p:sp>
+        <p:nvSpPr>
+          <p:cNvPr id="3" name="Notes Placeholder 2"/>
+          <p:cNvSpPr>
+            <a:spLocks noGrp="1"/>
+          </p:cNvSpPr>
+          <p:nvPr>
+            <p:ph type="body" sz="quarter" idx="3"/>
+          </p:nvPr>
+        </p:nvSpPr>
+        <p:spPr/>
+        <p:txBody>
+          <a:bodyPr/>
+          <a:lstStyle/>
+          <a:p>
+            <a:r>
+              <a:t>Clean reference diagram with four labeled points (A=inefficient/interior, B &amp; C=efficient/on curve, D=unattainable/exterior). This is the single clearest slide for the three-way classification - if slides 23-26 left anyone confused, anchor the recap here.</a:t>
+            </a:r>
+          </a:p>
+        </p:txBody>
+      </p:sp>
+      <p:sp>
+        <p:nvSpPr>
+          <p:cNvPr id="4" name="Slide Number Placeholder 3"/>
+          <p:cNvSpPr>
+            <a:spLocks noGrp="1"/>
+          </p:cNvSpPr>
+          <p:nvPr>
+            <p:ph type="sldNum" sz="quarter" idx="5"/>
+          </p:nvPr>
+        </p:nvSpPr>
+        <p:spPr/>
+      </p:sp>
+    </p:spTree>
+  </p:cSld>
+  <p:clrMapOvr>
+    <a:masterClrMapping/>
+  </p:clrMapOvr>
+</p:notes>
+</file>
+
+<file path=ppt/notesSlides/notesSlide29.xml><?xml version="1.0" encoding="utf-8"?>
+<p:notes xmlns:a="http://schemas.openxmlformats.org/drawingml/2006/main" xmlns:r="http://schemas.openxmlformats.org/officeDocument/2006/relationships" xmlns:p="http://schemas.openxmlformats.org/presentationml/2006/main">
+  <p:cSld>
+    <p:spTree>
+      <p:nvGrpSpPr>
+        <p:cNvPr id="1" name=""/>
+        <p:cNvGrpSpPr/>
+        <p:nvPr/>
+      </p:nvGrpSpPr>
+      <p:grpSpPr>
+        <a:xfrm>
+          <a:off x="0" y="0"/>
+          <a:ext cx="0" cy="0"/>
+          <a:chOff x="0" y="0"/>
+          <a:chExt cx="0" cy="0"/>
+        </a:xfrm>
+      </p:grpSpPr>
+      <p:sp>
+        <p:nvSpPr>
+          <p:cNvPr id="2" name="Slide Image Placeholder 1"/>
+          <p:cNvSpPr>
+            <a:spLocks noGrp="1" noRot="1" noChangeAspect="1"/>
+          </p:cNvSpPr>
+          <p:nvPr>
+            <p:ph type="sldImg" idx="2"/>
+          </p:nvPr>
+        </p:nvSpPr>
+        <p:spPr/>
+      </p:sp>
+      <p:sp>
+        <p:nvSpPr>
+          <p:cNvPr id="3" name="Notes Placeholder 2"/>
+          <p:cNvSpPr>
+            <a:spLocks noGrp="1"/>
+          </p:cNvSpPr>
+          <p:nvPr>
+            <p:ph type="body" sz="quarter" idx="3"/>
+          </p:nvPr>
+        </p:nvSpPr>
+        <p:spPr/>
+        <p:txBody>
+          <a:bodyPr/>
+          <a:lstStyle/>
+          <a:p>
+            <a:r>
+              <a:t>Different context (capital vs agricultural goods, illustrated with a farm) shows the model generalizes beyond guns/butter. Good moment to ask: 'what would this look like for a sports club - say, choosing between spending budget on player wages vs stadium infrastructure?' Plants a seed for later sport-economics lectures (L7-L8).</a:t>
+            </a:r>
+          </a:p>
+        </p:txBody>
+      </p:sp>
+      <p:sp>
+        <p:nvSpPr>
+          <p:cNvPr id="4" name="Slide Number Placeholder 3"/>
+          <p:cNvSpPr>
+            <a:spLocks noGrp="1"/>
+          </p:cNvSpPr>
+          <p:nvPr>
+            <p:ph type="sldNum" sz="quarter" idx="5"/>
+          </p:nvPr>
+        </p:nvSpPr>
+        <p:spPr/>
+      </p:sp>
+    </p:spTree>
+  </p:cSld>
+  <p:clrMapOvr>
+    <a:masterClrMapping/>
+  </p:clrMapOvr>
+</p:notes>
+</file>
+
+<file path=ppt/notesSlides/notesSlide3.xml><?xml version="1.0" encoding="utf-8"?>
+<p:notes xmlns:a="http://schemas.openxmlformats.org/drawingml/2006/main" xmlns:r="http://schemas.openxmlformats.org/officeDocument/2006/relationships" xmlns:p="http://schemas.openxmlformats.org/presentationml/2006/main">
+  <p:cSld>
+    <p:spTree>
+      <p:nvGrpSpPr>
+        <p:cNvPr id="1" name=""/>
+        <p:cNvGrpSpPr/>
+        <p:nvPr/>
+      </p:nvGrpSpPr>
+      <p:grpSpPr>
+        <a:xfrm>
+          <a:off x="0" y="0"/>
+          <a:ext cx="0" cy="0"/>
+          <a:chOff x="0" y="0"/>
+          <a:chExt cx="0" cy="0"/>
+        </a:xfrm>
+      </p:grpSpPr>
+      <p:sp>
+        <p:nvSpPr>
+          <p:cNvPr id="2" name="Slide Image Placeholder 1"/>
+          <p:cNvSpPr>
+            <a:spLocks noGrp="1" noRot="1" noChangeAspect="1"/>
+          </p:cNvSpPr>
+          <p:nvPr>
+            <p:ph type="sldImg" idx="2"/>
+          </p:nvPr>
+        </p:nvSpPr>
+        <p:spPr/>
+      </p:sp>
+      <p:sp>
+        <p:nvSpPr>
+          <p:cNvPr id="3" name="Notes Placeholder 2"/>
+          <p:cNvSpPr>
+            <a:spLocks noGrp="1"/>
+          </p:cNvSpPr>
+          <p:nvPr>
+            <p:ph type="body" sz="quarter" idx="3"/>
+          </p:nvPr>
+        </p:nvSpPr>
+        <p:spPr/>
+        <p:txBody>
+          <a:bodyPr/>
+          <a:lstStyle/>
+          <a:p>
+            <a:r>
+              <a:t>Walk the steps once with the apple (familiar, physical), then immediately re-map each step onto Molde FK's home advantage. Pause after 'Hypothesis' and ask students to propose their own 'Experiment' (e.g., compare home vs away win % controlling for opponent strength). ~5 min including discussion.</a:t>
+            </a:r>
+          </a:p>
+        </p:txBody>
+      </p:sp>
+      <p:sp>
+        <p:nvSpPr>
+          <p:cNvPr id="4" name="Slide Number Placeholder 3"/>
+          <p:cNvSpPr>
+            <a:spLocks noGrp="1"/>
+          </p:cNvSpPr>
+          <p:nvPr>
+            <p:ph type="sldNum" sz="quarter" idx="5"/>
+          </p:nvPr>
+        </p:nvSpPr>
+        <p:spPr/>
+      </p:sp>
+    </p:spTree>
+  </p:cSld>
+  <p:clrMapOvr>
+    <a:masterClrMapping/>
+  </p:clrMapOvr>
+</p:notes>
+</file>
+
+<file path=ppt/notesSlides/notesSlide30.xml><?xml version="1.0" encoding="utf-8"?>
+<p:notes xmlns:a="http://schemas.openxmlformats.org/drawingml/2006/main" xmlns:r="http://schemas.openxmlformats.org/officeDocument/2006/relationships" xmlns:p="http://schemas.openxmlformats.org/presentationml/2006/main">
+  <p:cSld>
+    <p:spTree>
+      <p:nvGrpSpPr>
+        <p:cNvPr id="1" name=""/>
+        <p:cNvGrpSpPr/>
+        <p:nvPr/>
+      </p:nvGrpSpPr>
+      <p:grpSpPr>
+        <a:xfrm>
+          <a:off x="0" y="0"/>
+          <a:ext cx="0" cy="0"/>
+          <a:chOff x="0" y="0"/>
+          <a:chExt cx="0" cy="0"/>
+        </a:xfrm>
+      </p:grpSpPr>
+      <p:sp>
+        <p:nvSpPr>
+          <p:cNvPr id="2" name="Slide Image Placeholder 1"/>
+          <p:cNvSpPr>
+            <a:spLocks noGrp="1" noRot="1" noChangeAspect="1"/>
+          </p:cNvSpPr>
+          <p:nvPr>
+            <p:ph type="sldImg" idx="2"/>
+          </p:nvPr>
+        </p:nvSpPr>
+        <p:spPr/>
+      </p:sp>
+      <p:sp>
+        <p:nvSpPr>
+          <p:cNvPr id="3" name="Notes Placeholder 2"/>
+          <p:cNvSpPr>
+            <a:spLocks noGrp="1"/>
+          </p:cNvSpPr>
+          <p:nvPr>
+            <p:ph type="body" sz="quarter" idx="3"/>
+          </p:nvPr>
+        </p:nvSpPr>
+        <p:spPr/>
+        <p:txBody>
+          <a:bodyPr/>
+          <a:lstStyle/>
+          <a:p>
+            <a:r>
+              <a:t>Caution when presenting: only the MARGINAL definition is actually used later (it's the slope David/Sherry compute, e.g. 0.5 or 2 units of wood per unit of food). Total and Average opportunity cost are defined here but not reused numerically anywhere else in this deck - say so explicitly so students focus on 'marginal' and aren't left expecting a worked average-cost example.</a:t>
+            </a:r>
+          </a:p>
+        </p:txBody>
+      </p:sp>
+      <p:sp>
+        <p:nvSpPr>
+          <p:cNvPr id="4" name="Slide Number Placeholder 3"/>
+          <p:cNvSpPr>
+            <a:spLocks noGrp="1"/>
+          </p:cNvSpPr>
+          <p:nvPr>
+            <p:ph type="sldNum" sz="quarter" idx="5"/>
+          </p:nvPr>
+        </p:nvSpPr>
+        <p:spPr/>
+      </p:sp>
+    </p:spTree>
+  </p:cSld>
+  <p:clrMapOvr>
+    <a:masterClrMapping/>
+  </p:clrMapOvr>
+</p:notes>
+</file>
+
+<file path=ppt/notesSlides/notesSlide31.xml><?xml version="1.0" encoding="utf-8"?>
+<p:notes xmlns:a="http://schemas.openxmlformats.org/drawingml/2006/main" xmlns:r="http://schemas.openxmlformats.org/officeDocument/2006/relationships" xmlns:p="http://schemas.openxmlformats.org/presentationml/2006/main">
+  <p:cSld>
+    <p:spTree>
+      <p:nvGrpSpPr>
+        <p:cNvPr id="1" name=""/>
+        <p:cNvGrpSpPr/>
+        <p:nvPr/>
+      </p:nvGrpSpPr>
+      <p:grpSpPr>
+        <a:xfrm>
+          <a:off x="0" y="0"/>
+          <a:ext cx="0" cy="0"/>
+          <a:chOff x="0" y="0"/>
+          <a:chExt cx="0" cy="0"/>
+        </a:xfrm>
+      </p:grpSpPr>
+      <p:sp>
+        <p:nvSpPr>
+          <p:cNvPr id="2" name="Slide Image Placeholder 1"/>
+          <p:cNvSpPr>
+            <a:spLocks noGrp="1" noRot="1" noChangeAspect="1"/>
+          </p:cNvSpPr>
+          <p:nvPr>
+            <p:ph type="sldImg" idx="2"/>
+          </p:nvPr>
+        </p:nvSpPr>
+        <p:spPr/>
+      </p:sp>
+      <p:sp>
+        <p:nvSpPr>
+          <p:cNvPr id="3" name="Notes Placeholder 2"/>
+          <p:cNvSpPr>
+            <a:spLocks noGrp="1"/>
+          </p:cNvSpPr>
+          <p:nvPr>
+            <p:ph type="body" sz="quarter" idx="3"/>
+          </p:nvPr>
+        </p:nvSpPr>
+        <p:spPr/>
+        <p:txBody>
+          <a:bodyPr/>
+          <a:lstStyle/>
+          <a:p>
+            <a:r>
+              <a:t>Light, relatable everyday example (a $7 smoothie vs other uses of that $7, now or later) before returning to the abstract PPF. Keep this under a minute.</a:t>
+            </a:r>
+          </a:p>
+        </p:txBody>
+      </p:sp>
+      <p:sp>
+        <p:nvSpPr>
+          <p:cNvPr id="4" name="Slide Number Placeholder 3"/>
+          <p:cNvSpPr>
+            <a:spLocks noGrp="1"/>
+          </p:cNvSpPr>
+          <p:nvPr>
+            <p:ph type="sldNum" sz="quarter" idx="5"/>
+          </p:nvPr>
+        </p:nvSpPr>
+        <p:spPr/>
+      </p:sp>
+    </p:spTree>
+  </p:cSld>
+  <p:clrMapOvr>
+    <a:masterClrMapping/>
+  </p:clrMapOvr>
+</p:notes>
+</file>
+
+<file path=ppt/notesSlides/notesSlide32.xml><?xml version="1.0" encoding="utf-8"?>
+<p:notes xmlns:a="http://schemas.openxmlformats.org/drawingml/2006/main" xmlns:r="http://schemas.openxmlformats.org/officeDocument/2006/relationships" xmlns:p="http://schemas.openxmlformats.org/presentationml/2006/main">
+  <p:cSld>
+    <p:spTree>
+      <p:nvGrpSpPr>
+        <p:cNvPr id="1" name=""/>
+        <p:cNvGrpSpPr/>
+        <p:nvPr/>
+      </p:nvGrpSpPr>
+      <p:grpSpPr>
+        <a:xfrm>
+          <a:off x="0" y="0"/>
+          <a:ext cx="0" cy="0"/>
+          <a:chOff x="0" y="0"/>
+          <a:chExt cx="0" cy="0"/>
+        </a:xfrm>
+      </p:grpSpPr>
+      <p:sp>
+        <p:nvSpPr>
+          <p:cNvPr id="2" name="Slide Image Placeholder 1"/>
+          <p:cNvSpPr>
+            <a:spLocks noGrp="1" noRot="1" noChangeAspect="1"/>
+          </p:cNvSpPr>
+          <p:nvPr>
+            <p:ph type="sldImg" idx="2"/>
+          </p:nvPr>
+        </p:nvSpPr>
+        <p:spPr/>
+      </p:sp>
+      <p:sp>
+        <p:nvSpPr>
+          <p:cNvPr id="3" name="Notes Placeholder 2"/>
+          <p:cNvSpPr>
+            <a:spLocks noGrp="1"/>
+          </p:cNvSpPr>
+          <p:nvPr>
+            <p:ph type="body" sz="quarter" idx="3"/>
+          </p:nvPr>
+        </p:nvSpPr>
+        <p:spPr/>
+        <p:txBody>
+          <a:bodyPr/>
+          <a:lstStyle/>
+          <a:p>
+            <a:r>
+              <a:t>Comic relief, but also sneaks in opportunity cost of TIME (billable hours), not just goods - useful groundwork since David and Sherry will soon be allocating DAYS, not just physical units.</a:t>
+            </a:r>
+          </a:p>
+        </p:txBody>
+      </p:sp>
+      <p:sp>
+        <p:nvSpPr>
+          <p:cNvPr id="4" name="Slide Number Placeholder 3"/>
+          <p:cNvSpPr>
+            <a:spLocks noGrp="1"/>
+          </p:cNvSpPr>
+          <p:nvPr>
+            <p:ph type="sldNum" sz="quarter" idx="5"/>
+          </p:nvPr>
+        </p:nvSpPr>
+        <p:spPr/>
+      </p:sp>
+    </p:spTree>
+  </p:cSld>
+  <p:clrMapOvr>
+    <a:masterClrMapping/>
+  </p:clrMapOvr>
+</p:notes>
+</file>
+
+<file path=ppt/notesSlides/notesSlide33.xml><?xml version="1.0" encoding="utf-8"?>
+<p:notes xmlns:a="http://schemas.openxmlformats.org/drawingml/2006/main" xmlns:r="http://schemas.openxmlformats.org/officeDocument/2006/relationships" xmlns:p="http://schemas.openxmlformats.org/presentationml/2006/main">
+  <p:cSld>
+    <p:spTree>
+      <p:nvGrpSpPr>
+        <p:cNvPr id="1" name=""/>
+        <p:cNvGrpSpPr/>
+        <p:nvPr/>
+      </p:nvGrpSpPr>
+      <p:grpSpPr>
+        <a:xfrm>
+          <a:off x="0" y="0"/>
+          <a:ext cx="0" cy="0"/>
+          <a:chOff x="0" y="0"/>
+          <a:chExt cx="0" cy="0"/>
+        </a:xfrm>
+      </p:grpSpPr>
+      <p:sp>
+        <p:nvSpPr>
+          <p:cNvPr id="2" name="Slide Image Placeholder 1"/>
+          <p:cNvSpPr>
+            <a:spLocks noGrp="1" noRot="1" noChangeAspect="1"/>
+          </p:cNvSpPr>
+          <p:nvPr>
+            <p:ph type="sldImg" idx="2"/>
+          </p:nvPr>
+        </p:nvSpPr>
+        <p:spPr/>
+      </p:sp>
+      <p:sp>
+        <p:nvSpPr>
+          <p:cNvPr id="3" name="Notes Placeholder 2"/>
+          <p:cNvSpPr>
+            <a:spLocks noGrp="1"/>
+          </p:cNvSpPr>
+          <p:nvPr>
+            <p:ph type="body" sz="quarter" idx="3"/>
+          </p:nvPr>
+        </p:nvSpPr>
+        <p:spPr/>
+        <p:txBody>
+          <a:bodyPr/>
+          <a:lstStyle/>
+          <a:p>
+            <a:r>
+              <a:t>Ties opportunity cost back to the three fundamental questions from Lecture 1 (What/How/For Whom to produce). Call out the connection to L1 explicitly - it's a natural bridge slide, easy to blow past without students noticing the link.</a:t>
+            </a:r>
+          </a:p>
+        </p:txBody>
+      </p:sp>
+      <p:sp>
+        <p:nvSpPr>
+          <p:cNvPr id="4" name="Slide Number Placeholder 3"/>
+          <p:cNvSpPr>
+            <a:spLocks noGrp="1"/>
+          </p:cNvSpPr>
+          <p:nvPr>
+            <p:ph type="sldNum" sz="quarter" idx="5"/>
+          </p:nvPr>
+        </p:nvSpPr>
+        <p:spPr/>
+      </p:sp>
+    </p:spTree>
+  </p:cSld>
+  <p:clrMapOvr>
+    <a:masterClrMapping/>
+  </p:clrMapOvr>
+</p:notes>
+</file>
+
+<file path=ppt/notesSlides/notesSlide34.xml><?xml version="1.0" encoding="utf-8"?>
+<p:notes xmlns:a="http://schemas.openxmlformats.org/drawingml/2006/main" xmlns:r="http://schemas.openxmlformats.org/officeDocument/2006/relationships" xmlns:p="http://schemas.openxmlformats.org/presentationml/2006/main">
+  <p:cSld>
+    <p:spTree>
+      <p:nvGrpSpPr>
+        <p:cNvPr id="1" name=""/>
+        <p:cNvGrpSpPr/>
+        <p:nvPr/>
+      </p:nvGrpSpPr>
+      <p:grpSpPr>
+        <a:xfrm>
+          <a:off x="0" y="0"/>
+          <a:ext cx="0" cy="0"/>
+          <a:chOff x="0" y="0"/>
+          <a:chExt cx="0" cy="0"/>
+        </a:xfrm>
+      </p:grpSpPr>
+      <p:sp>
+        <p:nvSpPr>
+          <p:cNvPr id="2" name="Slide Image Placeholder 1"/>
+          <p:cNvSpPr>
+            <a:spLocks noGrp="1" noRot="1" noChangeAspect="1"/>
+          </p:cNvSpPr>
+          <p:nvPr>
+            <p:ph type="sldImg" idx="2"/>
+          </p:nvPr>
+        </p:nvSpPr>
+        <p:spPr/>
+      </p:sp>
+      <p:sp>
+        <p:nvSpPr>
+          <p:cNvPr id="3" name="Notes Placeholder 2"/>
+          <p:cNvSpPr>
+            <a:spLocks noGrp="1"/>
+          </p:cNvSpPr>
+          <p:nvPr>
+            <p:ph type="body" sz="quarter" idx="3"/>
+          </p:nvPr>
+        </p:nvSpPr>
+        <p:spPr/>
+        <p:txBody>
+          <a:bodyPr/>
+          <a:lstStyle/>
+          <a:p>
+            <a:r>
+              <a:t>Core theory slide. Make sure 'concave shape = increasing opportunity cost' lands before the numeric proof on slide 35. Ask: 'why would producing more and more fish cost MORE coconuts each time?' (the best-suited resources for fish get used first; less-suited ones are pulled in later).</a:t>
+            </a:r>
+          </a:p>
+        </p:txBody>
+      </p:sp>
+      <p:sp>
+        <p:nvSpPr>
+          <p:cNvPr id="4" name="Slide Number Placeholder 3"/>
+          <p:cNvSpPr>
+            <a:spLocks noGrp="1"/>
+          </p:cNvSpPr>
+          <p:nvPr>
+            <p:ph type="sldNum" sz="quarter" idx="5"/>
+          </p:nvPr>
+        </p:nvSpPr>
+        <p:spPr/>
+      </p:sp>
+    </p:spTree>
+  </p:cSld>
+  <p:clrMapOvr>
+    <a:masterClrMapping/>
+  </p:clrMapOvr>
+</p:notes>
+</file>
+
+<file path=ppt/notesSlides/notesSlide35.xml><?xml version="1.0" encoding="utf-8"?>
+<p:notes xmlns:a="http://schemas.openxmlformats.org/drawingml/2006/main" xmlns:r="http://schemas.openxmlformats.org/officeDocument/2006/relationships" xmlns:p="http://schemas.openxmlformats.org/presentationml/2006/main">
+  <p:cSld>
+    <p:spTree>
+      <p:nvGrpSpPr>
+        <p:cNvPr id="1" name=""/>
+        <p:cNvGrpSpPr/>
+        <p:nvPr/>
+      </p:nvGrpSpPr>
+      <p:grpSpPr>
+        <a:xfrm>
+          <a:off x="0" y="0"/>
+          <a:ext cx="0" cy="0"/>
+          <a:chOff x="0" y="0"/>
+          <a:chExt cx="0" cy="0"/>
+        </a:xfrm>
+      </p:grpSpPr>
+      <p:sp>
+        <p:nvSpPr>
+          <p:cNvPr id="2" name="Slide Image Placeholder 1"/>
+          <p:cNvSpPr>
+            <a:spLocks noGrp="1" noRot="1" noChangeAspect="1"/>
+          </p:cNvSpPr>
+          <p:nvPr>
+            <p:ph type="sldImg" idx="2"/>
+          </p:nvPr>
+        </p:nvSpPr>
+        <p:spPr/>
+      </p:sp>
+      <p:sp>
+        <p:nvSpPr>
+          <p:cNvPr id="3" name="Notes Placeholder 2"/>
+          <p:cNvSpPr>
+            <a:spLocks noGrp="1"/>
+          </p:cNvSpPr>
+          <p:nvPr>
+            <p:ph type="body" sz="quarter" idx="3"/>
+          </p:nvPr>
+        </p:nvSpPr>
+        <p:spPr/>
+        <p:txBody>
+          <a:bodyPr/>
+          <a:lstStyle/>
+          <a:p>
+            <a:r>
+              <a:t>Walk the annotated arrows literally: the first 20 fish cost only 5 coconuts, but the next 20 fish cost 25 more coconuts. This is the concrete numeric anchor for slide 34's abstract claim - don't rush past it.</a:t>
+            </a:r>
+          </a:p>
+        </p:txBody>
+      </p:sp>
+      <p:sp>
+        <p:nvSpPr>
+          <p:cNvPr id="4" name="Slide Number Placeholder 3"/>
+          <p:cNvSpPr>
+            <a:spLocks noGrp="1"/>
+          </p:cNvSpPr>
+          <p:nvPr>
+            <p:ph type="sldNum" sz="quarter" idx="5"/>
+          </p:nvPr>
+        </p:nvSpPr>
+        <p:spPr/>
+      </p:sp>
+    </p:spTree>
+  </p:cSld>
+  <p:clrMapOvr>
+    <a:masterClrMapping/>
+  </p:clrMapOvr>
+</p:notes>
+</file>
+
+<file path=ppt/notesSlides/notesSlide36.xml><?xml version="1.0" encoding="utf-8"?>
+<p:notes xmlns:a="http://schemas.openxmlformats.org/drawingml/2006/main" xmlns:r="http://schemas.openxmlformats.org/officeDocument/2006/relationships" xmlns:p="http://schemas.openxmlformats.org/presentationml/2006/main">
+  <p:cSld>
+    <p:spTree>
+      <p:nvGrpSpPr>
+        <p:cNvPr id="1" name=""/>
+        <p:cNvGrpSpPr/>
+        <p:nvPr/>
+      </p:nvGrpSpPr>
+      <p:grpSpPr>
+        <a:xfrm>
+          <a:off x="0" y="0"/>
+          <a:ext cx="0" cy="0"/>
+          <a:chOff x="0" y="0"/>
+          <a:chExt cx="0" cy="0"/>
+        </a:xfrm>
+      </p:grpSpPr>
+      <p:sp>
+        <p:nvSpPr>
+          <p:cNvPr id="2" name="Slide Image Placeholder 1"/>
+          <p:cNvSpPr>
+            <a:spLocks noGrp="1" noRot="1" noChangeAspect="1"/>
+          </p:cNvSpPr>
+          <p:nvPr>
+            <p:ph type="sldImg" idx="2"/>
+          </p:nvPr>
+        </p:nvSpPr>
+        <p:spPr/>
+      </p:sp>
+      <p:sp>
+        <p:nvSpPr>
+          <p:cNvPr id="3" name="Notes Placeholder 2"/>
+          <p:cNvSpPr>
+            <a:spLocks noGrp="1"/>
+          </p:cNvSpPr>
+          <p:nvPr>
+            <p:ph type="body" sz="quarter" idx="3"/>
+          </p:nvPr>
+        </p:nvSpPr>
+        <p:spPr/>
+        <p:txBody>
+          <a:bodyPr/>
+          <a:lstStyle/>
+          <a:p>
+            <a:r>
+              <a:t>Have students compute an opportunity cost themselves before you move to slide 37: e.g., going from point A to B, 4 guns are given up for 1 pound of butter; going from E to F, only 20% of resources shift but butter gains 5 pounds. Sets up the visual version next.</a:t>
+            </a:r>
+          </a:p>
+        </p:txBody>
+      </p:sp>
+      <p:sp>
+        <p:nvSpPr>
+          <p:cNvPr id="4" name="Slide Number Placeholder 3"/>
+          <p:cNvSpPr>
+            <a:spLocks noGrp="1"/>
+          </p:cNvSpPr>
+          <p:nvPr>
+            <p:ph type="sldNum" sz="quarter" idx="5"/>
+          </p:nvPr>
+        </p:nvSpPr>
+        <p:spPr/>
+      </p:sp>
+    </p:spTree>
+  </p:cSld>
+  <p:clrMapOvr>
+    <a:masterClrMapping/>
+  </p:clrMapOvr>
+</p:notes>
+</file>
+
+<file path=ppt/notesSlides/notesSlide37.xml><?xml version="1.0" encoding="utf-8"?>
+<p:notes xmlns:a="http://schemas.openxmlformats.org/drawingml/2006/main" xmlns:r="http://schemas.openxmlformats.org/officeDocument/2006/relationships" xmlns:p="http://schemas.openxmlformats.org/presentationml/2006/main">
+  <p:cSld>
+    <p:spTree>
+      <p:nvGrpSpPr>
+        <p:cNvPr id="1" name=""/>
+        <p:cNvGrpSpPr/>
+        <p:nvPr/>
+      </p:nvGrpSpPr>
+      <p:grpSpPr>
+        <a:xfrm>
+          <a:off x="0" y="0"/>
+          <a:ext cx="0" cy="0"/>
+          <a:chOff x="0" y="0"/>
+          <a:chExt cx="0" cy="0"/>
+        </a:xfrm>
+      </p:grpSpPr>
+      <p:sp>
+        <p:nvSpPr>
+          <p:cNvPr id="2" name="Slide Image Placeholder 1"/>
+          <p:cNvSpPr>
+            <a:spLocks noGrp="1" noRot="1" noChangeAspect="1"/>
+          </p:cNvSpPr>
+          <p:nvPr>
+            <p:ph type="sldImg" idx="2"/>
+          </p:nvPr>
+        </p:nvSpPr>
+        <p:spPr/>
+      </p:sp>
+      <p:sp>
+        <p:nvSpPr>
+          <p:cNvPr id="3" name="Notes Placeholder 2"/>
+          <p:cNvSpPr>
+            <a:spLocks noGrp="1"/>
+          </p:cNvSpPr>
+          <p:nvPr>
+            <p:ph type="body" sz="quarter" idx="3"/>
+          </p:nvPr>
+        </p:nvSpPr>
+        <p:spPr/>
+        <p:txBody>
+          <a:bodyPr/>
+          <a:lstStyle/>
+          <a:p>
+            <a:r>
+              <a:t>Same data as slide 36, now graphed. Use the bracket annotations (1 lb / 2 lb / 5 lb of butter against 4 guns / 3 guns / 1 gun) to show that equal-sized butter gains cost different amounts of guns depending on where you are on the curve - walk through one or two bracket pairs live rather than reading every number.</a:t>
+            </a:r>
+          </a:p>
+        </p:txBody>
+      </p:sp>
+      <p:sp>
+        <p:nvSpPr>
+          <p:cNvPr id="4" name="Slide Number Placeholder 3"/>
+          <p:cNvSpPr>
+            <a:spLocks noGrp="1"/>
+          </p:cNvSpPr>
+          <p:nvPr>
+            <p:ph type="sldNum" sz="quarter" idx="5"/>
+          </p:nvPr>
+        </p:nvSpPr>
+        <p:spPr/>
+      </p:sp>
+    </p:spTree>
+  </p:cSld>
+  <p:clrMapOvr>
+    <a:masterClrMapping/>
+  </p:clrMapOvr>
+</p:notes>
+</file>
+
+<file path=ppt/notesSlides/notesSlide38.xml><?xml version="1.0" encoding="utf-8"?>
+<p:notes xmlns:a="http://schemas.openxmlformats.org/drawingml/2006/main" xmlns:r="http://schemas.openxmlformats.org/officeDocument/2006/relationships" xmlns:p="http://schemas.openxmlformats.org/presentationml/2006/main">
+  <p:cSld>
+    <p:spTree>
+      <p:nvGrpSpPr>
+        <p:cNvPr id="1" name=""/>
+        <p:cNvGrpSpPr/>
+        <p:nvPr/>
+      </p:nvGrpSpPr>
+      <p:grpSpPr>
+        <a:xfrm>
+          <a:off x="0" y="0"/>
+          <a:ext cx="0" cy="0"/>
+          <a:chOff x="0" y="0"/>
+          <a:chExt cx="0" cy="0"/>
+        </a:xfrm>
+      </p:grpSpPr>
+      <p:sp>
+        <p:nvSpPr>
+          <p:cNvPr id="2" name="Slide Image Placeholder 1"/>
+          <p:cNvSpPr>
+            <a:spLocks noGrp="1" noRot="1" noChangeAspect="1"/>
+          </p:cNvSpPr>
+          <p:nvPr>
+            <p:ph type="sldImg" idx="2"/>
+          </p:nvPr>
+        </p:nvSpPr>
+        <p:spPr/>
+      </p:sp>
+      <p:sp>
+        <p:nvSpPr>
+          <p:cNvPr id="3" name="Notes Placeholder 2"/>
+          <p:cNvSpPr>
+            <a:spLocks noGrp="1"/>
+          </p:cNvSpPr>
+          <p:nvPr>
+            <p:ph type="body" sz="quarter" idx="3"/>
+          </p:nvPr>
+        </p:nvSpPr>
+        <p:spPr/>
+        <p:txBody>
+          <a:bodyPr/>
+          <a:lstStyle/>
+          <a:p>
+            <a:r>
+              <a:t>This is the big worked example anchoring the rest of the lecture (through slide 57). Write the 2x2 productivity table on the board now (David: 8 food or 4 wood/day; Sherry: 10 food or 10 wood/day; 30-day month) - you will reuse it constantly. Tell students explicitly: 'we'll use this one example for absolute advantage, comparative advantage, the monthly PPF, and trade - keep track of it.'</a:t>
+            </a:r>
+          </a:p>
+        </p:txBody>
+      </p:sp>
+      <p:sp>
+        <p:nvSpPr>
+          <p:cNvPr id="4" name="Slide Number Placeholder 3"/>
+          <p:cNvSpPr>
+            <a:spLocks noGrp="1"/>
+          </p:cNvSpPr>
+          <p:nvPr>
+            <p:ph type="sldNum" sz="quarter" idx="5"/>
+          </p:nvPr>
+        </p:nvSpPr>
+        <p:spPr/>
+      </p:sp>
+    </p:spTree>
+  </p:cSld>
+  <p:clrMapOvr>
+    <a:masterClrMapping/>
+  </p:clrMapOvr>
+</p:notes>
+</file>
+
+<file path=ppt/notesSlides/notesSlide39.xml><?xml version="1.0" encoding="utf-8"?>
+<p:notes xmlns:a="http://schemas.openxmlformats.org/drawingml/2006/main" xmlns:r="http://schemas.openxmlformats.org/officeDocument/2006/relationships" xmlns:p="http://schemas.openxmlformats.org/presentationml/2006/main">
+  <p:cSld>
+    <p:spTree>
+      <p:nvGrpSpPr>
+        <p:cNvPr id="1" name=""/>
+        <p:cNvGrpSpPr/>
+        <p:nvPr/>
+      </p:nvGrpSpPr>
+      <p:grpSpPr>
+        <a:xfrm>
+          <a:off x="0" y="0"/>
+          <a:ext cx="0" cy="0"/>
+          <a:chOff x="0" y="0"/>
+          <a:chExt cx="0" cy="0"/>
+        </a:xfrm>
+      </p:grpSpPr>
+      <p:sp>
+        <p:nvSpPr>
+          <p:cNvPr id="2" name="Slide Image Placeholder 1"/>
+          <p:cNvSpPr>
+            <a:spLocks noGrp="1" noRot="1" noChangeAspect="1"/>
+          </p:cNvSpPr>
+          <p:nvPr>
+            <p:ph type="sldImg" idx="2"/>
+          </p:nvPr>
+        </p:nvSpPr>
+        <p:spPr/>
+      </p:sp>
+      <p:sp>
+        <p:nvSpPr>
+          <p:cNvPr id="3" name="Notes Placeholder 2"/>
+          <p:cNvSpPr>
+            <a:spLocks noGrp="1"/>
+          </p:cNvSpPr>
+          <p:nvPr>
+            <p:ph type="body" sz="quarter" idx="3"/>
+          </p:nvPr>
+        </p:nvSpPr>
+        <p:spPr/>
+        <p:txBody>
+          <a:bodyPr/>
+          <a:lstStyle/>
+          <a:p>
+            <a:r>
+              <a:t>Quick technical clarifier - output can be fractional (e.g. 2.35 units). Don't dwell, 30 seconds.</a:t>
+            </a:r>
+          </a:p>
+        </p:txBody>
+      </p:sp>
+      <p:sp>
+        <p:nvSpPr>
+          <p:cNvPr id="4" name="Slide Number Placeholder 3"/>
+          <p:cNvSpPr>
+            <a:spLocks noGrp="1"/>
+          </p:cNvSpPr>
+          <p:nvPr>
+            <p:ph type="sldNum" sz="quarter" idx="5"/>
+          </p:nvPr>
+        </p:nvSpPr>
+        <p:spPr/>
+      </p:sp>
+    </p:spTree>
+  </p:cSld>
+  <p:clrMapOvr>
+    <a:masterClrMapping/>
+  </p:clrMapOvr>
+</p:notes>
+</file>
+
+<file path=ppt/notesSlides/notesSlide4.xml><?xml version="1.0" encoding="utf-8"?>
+<p:notes xmlns:a="http://schemas.openxmlformats.org/drawingml/2006/main" xmlns:r="http://schemas.openxmlformats.org/officeDocument/2006/relationships" xmlns:p="http://schemas.openxmlformats.org/presentationml/2006/main">
+  <p:cSld>
+    <p:spTree>
+      <p:nvGrpSpPr>
+        <p:cNvPr id="1" name=""/>
+        <p:cNvGrpSpPr/>
+        <p:nvPr/>
+      </p:nvGrpSpPr>
+      <p:grpSpPr>
+        <a:xfrm>
+          <a:off x="0" y="0"/>
+          <a:ext cx="0" cy="0"/>
+          <a:chOff x="0" y="0"/>
+          <a:chExt cx="0" cy="0"/>
+        </a:xfrm>
+      </p:grpSpPr>
+      <p:sp>
+        <p:nvSpPr>
+          <p:cNvPr id="2" name="Slide Image Placeholder 1"/>
+          <p:cNvSpPr>
+            <a:spLocks noGrp="1" noRot="1" noChangeAspect="1"/>
+          </p:cNvSpPr>
+          <p:nvPr>
+            <p:ph type="sldImg" idx="2"/>
+          </p:nvPr>
+        </p:nvSpPr>
+        <p:spPr/>
+      </p:sp>
+      <p:sp>
+        <p:nvSpPr>
+          <p:cNvPr id="3" name="Notes Placeholder 2"/>
+          <p:cNvSpPr>
+            <a:spLocks noGrp="1"/>
+          </p:cNvSpPr>
+          <p:nvPr>
+            <p:ph type="body" sz="quarter" idx="3"/>
+          </p:nvPr>
+        </p:nvSpPr>
+        <p:spPr/>
+        <p:txBody>
+          <a:bodyPr/>
+          <a:lstStyle/>
+          <a:p>
+            <a:r>
+              <a:rPr dirty="0"/>
+              <a:t>Add a concrete example: ticket prices fixed for a season vs renegotiated between seasons; player wages fixed mid-contract vs flexible at renewal. </a:t>
+            </a:r>
+          </a:p>
+        </p:txBody>
+      </p:sp>
+      <p:sp>
+        <p:nvSpPr>
+          <p:cNvPr id="4" name="Slide Number Placeholder 3"/>
+          <p:cNvSpPr>
+            <a:spLocks noGrp="1"/>
+          </p:cNvSpPr>
+          <p:nvPr>
+            <p:ph type="sldNum" sz="quarter" idx="5"/>
+          </p:nvPr>
+        </p:nvSpPr>
+        <p:spPr/>
+      </p:sp>
+    </p:spTree>
+  </p:cSld>
+  <p:clrMapOvr>
+    <a:masterClrMapping/>
+  </p:clrMapOvr>
+</p:notes>
+</file>
+
+<file path=ppt/notesSlides/notesSlide40.xml><?xml version="1.0" encoding="utf-8"?>
+<p:notes xmlns:a="http://schemas.openxmlformats.org/drawingml/2006/main" xmlns:r="http://schemas.openxmlformats.org/officeDocument/2006/relationships" xmlns:p="http://schemas.openxmlformats.org/presentationml/2006/main">
+  <p:cSld>
+    <p:spTree>
+      <p:nvGrpSpPr>
+        <p:cNvPr id="1" name=""/>
+        <p:cNvGrpSpPr/>
+        <p:nvPr/>
+      </p:nvGrpSpPr>
+      <p:grpSpPr>
+        <a:xfrm>
+          <a:off x="0" y="0"/>
+          <a:ext cx="0" cy="0"/>
+          <a:chOff x="0" y="0"/>
+          <a:chExt cx="0" cy="0"/>
+        </a:xfrm>
+      </p:grpSpPr>
+      <p:sp>
+        <p:nvSpPr>
+          <p:cNvPr id="2" name="Slide Image Placeholder 1"/>
+          <p:cNvSpPr>
+            <a:spLocks noGrp="1" noRot="1" noChangeAspect="1"/>
+          </p:cNvSpPr>
+          <p:nvPr>
+            <p:ph type="sldImg" idx="2"/>
+          </p:nvPr>
+        </p:nvSpPr>
+        <p:spPr/>
+      </p:sp>
+      <p:sp>
+        <p:nvSpPr>
+          <p:cNvPr id="3" name="Notes Placeholder 2"/>
+          <p:cNvSpPr>
+            <a:spLocks noGrp="1"/>
+          </p:cNvSpPr>
+          <p:nvPr>
+            <p:ph type="body" sz="quarter" idx="3"/>
+          </p:nvPr>
+        </p:nvSpPr>
+        <p:spPr/>
+        <p:txBody>
+          <a:bodyPr/>
+          <a:lstStyle/>
+          <a:p>
+            <a:r>
+              <a:t>Ask the class to answer both questions themselves, using slide 38's table, before revealing the answers on slides 41-42.</a:t>
+            </a:r>
+          </a:p>
+        </p:txBody>
+      </p:sp>
+      <p:sp>
+        <p:nvSpPr>
+          <p:cNvPr id="4" name="Slide Number Placeholder 3"/>
+          <p:cNvSpPr>
+            <a:spLocks noGrp="1"/>
+          </p:cNvSpPr>
+          <p:nvPr>
+            <p:ph type="sldNum" sz="quarter" idx="5"/>
+          </p:nvPr>
+        </p:nvSpPr>
+        <p:spPr/>
+      </p:sp>
+    </p:spTree>
+  </p:cSld>
+  <p:clrMapOvr>
+    <a:masterClrMapping/>
+  </p:clrMapOvr>
+</p:notes>
+</file>
+
+<file path=ppt/notesSlides/notesSlide41.xml><?xml version="1.0" encoding="utf-8"?>
+<p:notes xmlns:a="http://schemas.openxmlformats.org/drawingml/2006/main" xmlns:r="http://schemas.openxmlformats.org/officeDocument/2006/relationships" xmlns:p="http://schemas.openxmlformats.org/presentationml/2006/main">
+  <p:cSld>
+    <p:spTree>
+      <p:nvGrpSpPr>
+        <p:cNvPr id="1" name=""/>
+        <p:cNvGrpSpPr/>
+        <p:nvPr/>
+      </p:nvGrpSpPr>
+      <p:grpSpPr>
+        <a:xfrm>
+          <a:off x="0" y="0"/>
+          <a:ext cx="0" cy="0"/>
+          <a:chOff x="0" y="0"/>
+          <a:chExt cx="0" cy="0"/>
+        </a:xfrm>
+      </p:grpSpPr>
+      <p:sp>
+        <p:nvSpPr>
+          <p:cNvPr id="2" name="Slide Image Placeholder 1"/>
+          <p:cNvSpPr>
+            <a:spLocks noGrp="1" noRot="1" noChangeAspect="1"/>
+          </p:cNvSpPr>
+          <p:nvPr>
+            <p:ph type="sldImg" idx="2"/>
+          </p:nvPr>
+        </p:nvSpPr>
+        <p:spPr/>
+      </p:sp>
+      <p:sp>
+        <p:nvSpPr>
+          <p:cNvPr id="3" name="Notes Placeholder 2"/>
+          <p:cNvSpPr>
+            <a:spLocks noGrp="1"/>
+          </p:cNvSpPr>
+          <p:nvPr>
+            <p:ph type="body" sz="quarter" idx="3"/>
+          </p:nvPr>
+        </p:nvSpPr>
+        <p:spPr/>
+        <p:txBody>
+          <a:bodyPr/>
+          <a:lstStyle/>
+          <a:p>
+            <a:r>
+              <a:t>Reveal: Sherry produces more food (10 &gt; 8), so she has the absolute advantage in food.</a:t>
+            </a:r>
+          </a:p>
+        </p:txBody>
+      </p:sp>
+      <p:sp>
+        <p:nvSpPr>
+          <p:cNvPr id="4" name="Slide Number Placeholder 3"/>
+          <p:cNvSpPr>
+            <a:spLocks noGrp="1"/>
+          </p:cNvSpPr>
+          <p:nvPr>
+            <p:ph type="sldNum" sz="quarter" idx="5"/>
+          </p:nvPr>
+        </p:nvSpPr>
+        <p:spPr/>
+      </p:sp>
+    </p:spTree>
+  </p:cSld>
+  <p:clrMapOvr>
+    <a:masterClrMapping/>
+  </p:clrMapOvr>
+</p:notes>
+</file>
+
+<file path=ppt/notesSlides/notesSlide42.xml><?xml version="1.0" encoding="utf-8"?>
+<p:notes xmlns:a="http://schemas.openxmlformats.org/drawingml/2006/main" xmlns:r="http://schemas.openxmlformats.org/officeDocument/2006/relationships" xmlns:p="http://schemas.openxmlformats.org/presentationml/2006/main">
+  <p:cSld>
+    <p:spTree>
+      <p:nvGrpSpPr>
+        <p:cNvPr id="1" name=""/>
+        <p:cNvGrpSpPr/>
+        <p:nvPr/>
+      </p:nvGrpSpPr>
+      <p:grpSpPr>
+        <a:xfrm>
+          <a:off x="0" y="0"/>
+          <a:ext cx="0" cy="0"/>
+          <a:chOff x="0" y="0"/>
+          <a:chExt cx="0" cy="0"/>
+        </a:xfrm>
+      </p:grpSpPr>
+      <p:sp>
+        <p:nvSpPr>
+          <p:cNvPr id="2" name="Slide Image Placeholder 1"/>
+          <p:cNvSpPr>
+            <a:spLocks noGrp="1" noRot="1" noChangeAspect="1"/>
+          </p:cNvSpPr>
+          <p:nvPr>
+            <p:ph type="sldImg" idx="2"/>
+          </p:nvPr>
+        </p:nvSpPr>
+        <p:spPr/>
+      </p:sp>
+      <p:sp>
+        <p:nvSpPr>
+          <p:cNvPr id="3" name="Notes Placeholder 2"/>
+          <p:cNvSpPr>
+            <a:spLocks noGrp="1"/>
+          </p:cNvSpPr>
+          <p:nvPr>
+            <p:ph type="body" sz="quarter" idx="3"/>
+          </p:nvPr>
+        </p:nvSpPr>
+        <p:spPr/>
+        <p:txBody>
+          <a:bodyPr/>
+          <a:lstStyle/>
+          <a:p>
+            <a:r>
+              <a:t>Reveal: Sherry also produces more wood (10 &gt; 4), so she has the absolute advantage in wood too. Flag this explicitly: 'Sherry is better at both goods - does that mean trading with David is pointless?' Hold the answer for comparative advantage.</a:t>
+            </a:r>
+          </a:p>
+        </p:txBody>
+      </p:sp>
+      <p:sp>
+        <p:nvSpPr>
+          <p:cNvPr id="4" name="Slide Number Placeholder 3"/>
+          <p:cNvSpPr>
+            <a:spLocks noGrp="1"/>
+          </p:cNvSpPr>
+          <p:nvPr>
+            <p:ph type="sldNum" sz="quarter" idx="5"/>
+          </p:nvPr>
+        </p:nvSpPr>
+        <p:spPr/>
+      </p:sp>
+    </p:spTree>
+  </p:cSld>
+  <p:clrMapOvr>
+    <a:masterClrMapping/>
+  </p:clrMapOvr>
+</p:notes>
+</file>
+
+<file path=ppt/notesSlides/notesSlide43.xml><?xml version="1.0" encoding="utf-8"?>
+<p:notes xmlns:a="http://schemas.openxmlformats.org/drawingml/2006/main" xmlns:r="http://schemas.openxmlformats.org/officeDocument/2006/relationships" xmlns:p="http://schemas.openxmlformats.org/presentationml/2006/main">
+  <p:cSld>
+    <p:spTree>
+      <p:nvGrpSpPr>
+        <p:cNvPr id="1" name=""/>
+        <p:cNvGrpSpPr/>
+        <p:nvPr/>
+      </p:nvGrpSpPr>
+      <p:grpSpPr>
+        <a:xfrm>
+          <a:off x="0" y="0"/>
+          <a:ext cx="0" cy="0"/>
+          <a:chOff x="0" y="0"/>
+          <a:chExt cx="0" cy="0"/>
+        </a:xfrm>
+      </p:grpSpPr>
+      <p:sp>
+        <p:nvSpPr>
+          <p:cNvPr id="2" name="Slide Image Placeholder 1"/>
+          <p:cNvSpPr>
+            <a:spLocks noGrp="1" noRot="1" noChangeAspect="1"/>
+          </p:cNvSpPr>
+          <p:nvPr>
+            <p:ph type="sldImg" idx="2"/>
+          </p:nvPr>
+        </p:nvSpPr>
+        <p:spPr/>
+      </p:sp>
+      <p:sp>
+        <p:nvSpPr>
+          <p:cNvPr id="3" name="Notes Placeholder 2"/>
+          <p:cNvSpPr>
+            <a:spLocks noGrp="1"/>
+          </p:cNvSpPr>
+          <p:nvPr>
+            <p:ph type="body" sz="quarter" idx="3"/>
+          </p:nvPr>
+        </p:nvSpPr>
+        <p:spPr/>
+        <p:txBody>
+          <a:bodyPr/>
+          <a:lstStyle/>
+          <a:p>
+            <a:r>
+              <a:t>Same pattern as slide 40 - pose both questions and let students guess before revealing 44-46. This is the direct answer to the question raised on slide 42.</a:t>
+            </a:r>
+          </a:p>
+        </p:txBody>
+      </p:sp>
+      <p:sp>
+        <p:nvSpPr>
+          <p:cNvPr id="4" name="Slide Number Placeholder 3"/>
+          <p:cNvSpPr>
+            <a:spLocks noGrp="1"/>
+          </p:cNvSpPr>
+          <p:nvPr>
+            <p:ph type="sldNum" sz="quarter" idx="5"/>
+          </p:nvPr>
+        </p:nvSpPr>
+        <p:spPr/>
+      </p:sp>
+    </p:spTree>
+  </p:cSld>
+  <p:clrMapOvr>
+    <a:masterClrMapping/>
+  </p:clrMapOvr>
+</p:notes>
+</file>
+
+<file path=ppt/notesSlides/notesSlide44.xml><?xml version="1.0" encoding="utf-8"?>
+<p:notes xmlns:a="http://schemas.openxmlformats.org/drawingml/2006/main" xmlns:r="http://schemas.openxmlformats.org/officeDocument/2006/relationships" xmlns:p="http://schemas.openxmlformats.org/presentationml/2006/main">
+  <p:cSld>
+    <p:spTree>
+      <p:nvGrpSpPr>
+        <p:cNvPr id="1" name=""/>
+        <p:cNvGrpSpPr/>
+        <p:nvPr/>
+      </p:nvGrpSpPr>
+      <p:grpSpPr>
+        <a:xfrm>
+          <a:off x="0" y="0"/>
+          <a:ext cx="0" cy="0"/>
+          <a:chOff x="0" y="0"/>
+          <a:chExt cx="0" cy="0"/>
+        </a:xfrm>
+      </p:grpSpPr>
+      <p:sp>
+        <p:nvSpPr>
+          <p:cNvPr id="2" name="Slide Image Placeholder 1"/>
+          <p:cNvSpPr>
+            <a:spLocks noGrp="1" noRot="1" noChangeAspect="1"/>
+          </p:cNvSpPr>
+          <p:nvPr>
+            <p:ph type="sldImg" idx="2"/>
+          </p:nvPr>
+        </p:nvSpPr>
+        <p:spPr/>
+      </p:sp>
+      <p:sp>
+        <p:nvSpPr>
+          <p:cNvPr id="3" name="Notes Placeholder 2"/>
+          <p:cNvSpPr>
+            <a:spLocks noGrp="1"/>
+          </p:cNvSpPr>
+          <p:nvPr>
+            <p:ph type="body" sz="quarter" idx="3"/>
+          </p:nvPr>
+        </p:nvSpPr>
+        <p:spPr/>
+        <p:txBody>
+          <a:bodyPr/>
+          <a:lstStyle/>
+          <a:p>
+            <a:r>
+              <a:t>Explain the ratio literally: David's wood-to-food output ratio (4/8 = 0.5) is exactly his opportunity cost of food in terms of wood. Write it as 'to get 1 more unit of food, David gives up 0.5 units of wood.'</a:t>
+            </a:r>
+          </a:p>
+        </p:txBody>
+      </p:sp>
+      <p:sp>
+        <p:nvSpPr>
+          <p:cNvPr id="4" name="Slide Number Placeholder 3"/>
+          <p:cNvSpPr>
+            <a:spLocks noGrp="1"/>
+          </p:cNvSpPr>
+          <p:nvPr>
+            <p:ph type="sldNum" sz="quarter" idx="5"/>
+          </p:nvPr>
+        </p:nvSpPr>
+        <p:spPr/>
+      </p:sp>
+    </p:spTree>
+  </p:cSld>
+  <p:clrMapOvr>
+    <a:masterClrMapping/>
+  </p:clrMapOvr>
+</p:notes>
+</file>
+
+<file path=ppt/notesSlides/notesSlide45.xml><?xml version="1.0" encoding="utf-8"?>
+<p:notes xmlns:a="http://schemas.openxmlformats.org/drawingml/2006/main" xmlns:r="http://schemas.openxmlformats.org/officeDocument/2006/relationships" xmlns:p="http://schemas.openxmlformats.org/presentationml/2006/main">
+  <p:cSld>
+    <p:spTree>
+      <p:nvGrpSpPr>
+        <p:cNvPr id="1" name=""/>
+        <p:cNvGrpSpPr/>
+        <p:nvPr/>
+      </p:nvGrpSpPr>
+      <p:grpSpPr>
+        <a:xfrm>
+          <a:off x="0" y="0"/>
+          <a:ext cx="0" cy="0"/>
+          <a:chOff x="0" y="0"/>
+          <a:chExt cx="0" cy="0"/>
+        </a:xfrm>
+      </p:grpSpPr>
+      <p:sp>
+        <p:nvSpPr>
+          <p:cNvPr id="2" name="Slide Image Placeholder 1"/>
+          <p:cNvSpPr>
+            <a:spLocks noGrp="1" noRot="1" noChangeAspect="1"/>
+          </p:cNvSpPr>
+          <p:nvPr>
+            <p:ph type="sldImg" idx="2"/>
+          </p:nvPr>
+        </p:nvSpPr>
+        <p:spPr/>
+      </p:sp>
+      <p:sp>
+        <p:nvSpPr>
+          <p:cNvPr id="3" name="Notes Placeholder 2"/>
+          <p:cNvSpPr>
+            <a:spLocks noGrp="1"/>
+          </p:cNvSpPr>
+          <p:nvPr>
+            <p:ph type="body" sz="quarter" idx="3"/>
+          </p:nvPr>
+        </p:nvSpPr>
+        <p:spPr/>
+        <p:txBody>
+          <a:bodyPr/>
+          <a:lstStyle/>
+          <a:p>
+            <a:r>
+              <a:t>Same calculation for Sherry: her ratio is 10/10 = 1 for both goods, since she's equally productive at each.</a:t>
+            </a:r>
+          </a:p>
+        </p:txBody>
+      </p:sp>
+      <p:sp>
+        <p:nvSpPr>
+          <p:cNvPr id="4" name="Slide Number Placeholder 3"/>
+          <p:cNvSpPr>
+            <a:spLocks noGrp="1"/>
+          </p:cNvSpPr>
+          <p:nvPr>
+            <p:ph type="sldNum" sz="quarter" idx="5"/>
+          </p:nvPr>
+        </p:nvSpPr>
+        <p:spPr/>
+      </p:sp>
+    </p:spTree>
+  </p:cSld>
+  <p:clrMapOvr>
+    <a:masterClrMapping/>
+  </p:clrMapOvr>
+</p:notes>
+</file>
+
+<file path=ppt/notesSlides/notesSlide46.xml><?xml version="1.0" encoding="utf-8"?>
+<p:notes xmlns:a="http://schemas.openxmlformats.org/drawingml/2006/main" xmlns:r="http://schemas.openxmlformats.org/officeDocument/2006/relationships" xmlns:p="http://schemas.openxmlformats.org/presentationml/2006/main">
+  <p:cSld>
+    <p:spTree>
+      <p:nvGrpSpPr>
+        <p:cNvPr id="1" name=""/>
+        <p:cNvGrpSpPr/>
+        <p:nvPr/>
+      </p:nvGrpSpPr>
+      <p:grpSpPr>
+        <a:xfrm>
+          <a:off x="0" y="0"/>
+          <a:ext cx="0" cy="0"/>
+          <a:chOff x="0" y="0"/>
+          <a:chExt cx="0" cy="0"/>
+        </a:xfrm>
+      </p:grpSpPr>
+      <p:sp>
+        <p:nvSpPr>
+          <p:cNvPr id="2" name="Slide Image Placeholder 1"/>
+          <p:cNvSpPr>
+            <a:spLocks noGrp="1" noRot="1" noChangeAspect="1"/>
+          </p:cNvSpPr>
+          <p:nvPr>
+            <p:ph type="sldImg" idx="2"/>
+          </p:nvPr>
+        </p:nvSpPr>
+        <p:spPr/>
+      </p:sp>
+      <p:sp>
+        <p:nvSpPr>
+          <p:cNvPr id="3" name="Notes Placeholder 2"/>
+          <p:cNvSpPr>
+            <a:spLocks noGrp="1"/>
+          </p:cNvSpPr>
+          <p:nvPr>
+            <p:ph type="body" sz="quarter" idx="3"/>
+          </p:nvPr>
+        </p:nvSpPr>
+        <p:spPr/>
+        <p:txBody>
+          <a:bodyPr/>
+          <a:lstStyle/>
+          <a:p>
+            <a:r>
+              <a:t>Punchline: compare David's food cost (0.5) to Sherry's (1) - David is cheaper at food, so he has the comparative advantage there. Compare wood costs (2 vs 1) - Sherry is cheaper at wood. Reinforce: comparative advantage is about the LOWEST opportunity cost, not who produces more in absolute terms (contrast directly with slides 41-42).</a:t>
+            </a:r>
+          </a:p>
+        </p:txBody>
+      </p:sp>
+      <p:sp>
+        <p:nvSpPr>
+          <p:cNvPr id="4" name="Slide Number Placeholder 3"/>
+          <p:cNvSpPr>
+            <a:spLocks noGrp="1"/>
+          </p:cNvSpPr>
+          <p:nvPr>
+            <p:ph type="sldNum" sz="quarter" idx="5"/>
+          </p:nvPr>
+        </p:nvSpPr>
+        <p:spPr/>
+      </p:sp>
+    </p:spTree>
+  </p:cSld>
+  <p:clrMapOvr>
+    <a:masterClrMapping/>
+  </p:clrMapOvr>
+</p:notes>
+</file>
+
+<file path=ppt/notesSlides/notesSlide47.xml><?xml version="1.0" encoding="utf-8"?>
+<p:notes xmlns:a="http://schemas.openxmlformats.org/drawingml/2006/main" xmlns:r="http://schemas.openxmlformats.org/officeDocument/2006/relationships" xmlns:p="http://schemas.openxmlformats.org/presentationml/2006/main">
+  <p:cSld>
+    <p:spTree>
+      <p:nvGrpSpPr>
+        <p:cNvPr id="1" name=""/>
+        <p:cNvGrpSpPr/>
+        <p:nvPr/>
+      </p:nvGrpSpPr>
+      <p:grpSpPr>
+        <a:xfrm>
+          <a:off x="0" y="0"/>
+          <a:ext cx="0" cy="0"/>
+          <a:chOff x="0" y="0"/>
+          <a:chExt cx="0" cy="0"/>
+        </a:xfrm>
+      </p:grpSpPr>
+      <p:sp>
+        <p:nvSpPr>
+          <p:cNvPr id="2" name="Slide Image Placeholder 1"/>
+          <p:cNvSpPr>
+            <a:spLocks noGrp="1" noRot="1" noChangeAspect="1"/>
+          </p:cNvSpPr>
+          <p:nvPr>
+            <p:ph type="sldImg" idx="2"/>
+          </p:nvPr>
+        </p:nvSpPr>
+        <p:spPr/>
+      </p:sp>
+      <p:sp>
+        <p:nvSpPr>
+          <p:cNvPr id="3" name="Notes Placeholder 2"/>
+          <p:cNvSpPr>
+            <a:spLocks noGrp="1"/>
+          </p:cNvSpPr>
+          <p:nvPr>
+            <p:ph type="body" sz="quarter" idx="3"/>
+          </p:nvPr>
+        </p:nvSpPr>
+        <p:spPr/>
+        <p:txBody>
+          <a:bodyPr/>
+          <a:lstStyle/>
+          <a:p>
+            <a:r>
+              <a:t>Have students compute the two totals themselves (30 x 8 + 30 x 10 for food; 30 x 4 + 30 x 10 for wood) before revealing slide 48 - these are the two extreme corners of the combined monthly PPF.</a:t>
+            </a:r>
+          </a:p>
+        </p:txBody>
+      </p:sp>
+      <p:sp>
+        <p:nvSpPr>
+          <p:cNvPr id="4" name="Slide Number Placeholder 3"/>
+          <p:cNvSpPr>
+            <a:spLocks noGrp="1"/>
+          </p:cNvSpPr>
+          <p:nvPr>
+            <p:ph type="sldNum" sz="quarter" idx="5"/>
+          </p:nvPr>
+        </p:nvSpPr>
+        <p:spPr/>
+      </p:sp>
+    </p:spTree>
+  </p:cSld>
+  <p:clrMapOvr>
+    <a:masterClrMapping/>
+  </p:clrMapOvr>
+</p:notes>
+</file>
+
+<file path=ppt/notesSlides/notesSlide48.xml><?xml version="1.0" encoding="utf-8"?>
+<p:notes xmlns:a="http://schemas.openxmlformats.org/drawingml/2006/main" xmlns:r="http://schemas.openxmlformats.org/officeDocument/2006/relationships" xmlns:p="http://schemas.openxmlformats.org/presentationml/2006/main">
+  <p:cSld>
+    <p:spTree>
+      <p:nvGrpSpPr>
+        <p:cNvPr id="1" name=""/>
+        <p:cNvGrpSpPr/>
+        <p:nvPr/>
+      </p:nvGrpSpPr>
+      <p:grpSpPr>
+        <a:xfrm>
+          <a:off x="0" y="0"/>
+          <a:ext cx="0" cy="0"/>
+          <a:chOff x="0" y="0"/>
+          <a:chExt cx="0" cy="0"/>
+        </a:xfrm>
+      </p:grpSpPr>
+      <p:sp>
+        <p:nvSpPr>
+          <p:cNvPr id="2" name="Slide Image Placeholder 1"/>
+          <p:cNvSpPr>
+            <a:spLocks noGrp="1" noRot="1" noChangeAspect="1"/>
+          </p:cNvSpPr>
+          <p:nvPr>
+            <p:ph type="sldImg" idx="2"/>
+          </p:nvPr>
+        </p:nvSpPr>
+        <p:spPr/>
+      </p:sp>
+      <p:sp>
+        <p:nvSpPr>
+          <p:cNvPr id="3" name="Notes Placeholder 2"/>
+          <p:cNvSpPr>
+            <a:spLocks noGrp="1"/>
+          </p:cNvSpPr>
+          <p:nvPr>
+            <p:ph type="body" sz="quarter" idx="3"/>
+          </p:nvPr>
+        </p:nvSpPr>
+        <p:spPr/>
+        <p:txBody>
+          <a:bodyPr/>
+          <a:lstStyle/>
+          <a:p>
+            <a:r>
+              <a:t>Confirm the numbers: max food = 540, max wood = 420. These become the axis endpoints of the joint (monthly, two-person) production possibilities frontier.</a:t>
+            </a:r>
+          </a:p>
+        </p:txBody>
+      </p:sp>
+      <p:sp>
+        <p:nvSpPr>
+          <p:cNvPr id="4" name="Slide Number Placeholder 3"/>
+          <p:cNvSpPr>
+            <a:spLocks noGrp="1"/>
+          </p:cNvSpPr>
+          <p:nvPr>
+            <p:ph type="sldNum" sz="quarter" idx="5"/>
+          </p:nvPr>
+        </p:nvSpPr>
+        <p:spPr/>
+      </p:sp>
+    </p:spTree>
+  </p:cSld>
+  <p:clrMapOvr>
+    <a:masterClrMapping/>
+  </p:clrMapOvr>
+</p:notes>
+</file>
+
+<file path=ppt/notesSlides/notesSlide49.xml><?xml version="1.0" encoding="utf-8"?>
+<p:notes xmlns:a="http://schemas.openxmlformats.org/drawingml/2006/main" xmlns:r="http://schemas.openxmlformats.org/officeDocument/2006/relationships" xmlns:p="http://schemas.openxmlformats.org/presentationml/2006/main">
+  <p:cSld>
+    <p:spTree>
+      <p:nvGrpSpPr>
+        <p:cNvPr id="1" name=""/>
+        <p:cNvGrpSpPr/>
+        <p:nvPr/>
+      </p:nvGrpSpPr>
+      <p:grpSpPr>
+        <a:xfrm>
+          <a:off x="0" y="0"/>
+          <a:ext cx="0" cy="0"/>
+          <a:chOff x="0" y="0"/>
+          <a:chExt cx="0" cy="0"/>
+        </a:xfrm>
+      </p:grpSpPr>
+      <p:sp>
+        <p:nvSpPr>
+          <p:cNvPr id="2" name="Slide Image Placeholder 1"/>
+          <p:cNvSpPr>
+            <a:spLocks noGrp="1" noRot="1" noChangeAspect="1"/>
+          </p:cNvSpPr>
+          <p:nvPr>
+            <p:ph type="sldImg" idx="2"/>
+          </p:nvPr>
+        </p:nvSpPr>
+        <p:spPr/>
+      </p:sp>
+      <p:sp>
+        <p:nvSpPr>
+          <p:cNvPr id="3" name="Notes Placeholder 2"/>
+          <p:cNvSpPr>
+            <a:spLocks noGrp="1"/>
+          </p:cNvSpPr>
+          <p:nvPr>
+            <p:ph type="body" sz="quarter" idx="3"/>
+          </p:nvPr>
+        </p:nvSpPr>
+        <p:spPr/>
+        <p:txBody>
+          <a:bodyPr/>
+          <a:lstStyle/>
+          <a:p>
+            <a:r>
+              <a:t>Central applied question of the lecture: if both are fully specialized in wood (420 units) but some food is needed, who should switch? Build the opportunity-cost table live if possible. Answer: David's opportunity cost of food (0.5 wood) is lower than Sherry's (1 wood), so David switches first. Spend real time here - this operationalizes comparative advantage as an allocation decision, not just an abstract ratio.</a:t>
+            </a:r>
+          </a:p>
+        </p:txBody>
+      </p:sp>
+      <p:sp>
+        <p:nvSpPr>
+          <p:cNvPr id="4" name="Slide Number Placeholder 3"/>
+          <p:cNvSpPr>
+            <a:spLocks noGrp="1"/>
+          </p:cNvSpPr>
+          <p:nvPr>
+            <p:ph type="sldNum" sz="quarter" idx="5"/>
+          </p:nvPr>
+        </p:nvSpPr>
+        <p:spPr/>
+      </p:sp>
+    </p:spTree>
+  </p:cSld>
+  <p:clrMapOvr>
+    <a:masterClrMapping/>
+  </p:clrMapOvr>
+</p:notes>
+</file>
+
+<file path=ppt/notesSlides/notesSlide5.xml><?xml version="1.0" encoding="utf-8"?>
+<p:notes xmlns:a="http://schemas.openxmlformats.org/drawingml/2006/main" xmlns:r="http://schemas.openxmlformats.org/officeDocument/2006/relationships" xmlns:p="http://schemas.openxmlformats.org/presentationml/2006/main">
+  <p:cSld>
+    <p:spTree>
+      <p:nvGrpSpPr>
+        <p:cNvPr id="1" name=""/>
+        <p:cNvGrpSpPr/>
+        <p:nvPr/>
+      </p:nvGrpSpPr>
+      <p:grpSpPr>
+        <a:xfrm>
+          <a:off x="0" y="0"/>
+          <a:ext cx="0" cy="0"/>
+          <a:chOff x="0" y="0"/>
+          <a:chExt cx="0" cy="0"/>
+        </a:xfrm>
+      </p:grpSpPr>
+      <p:sp>
+        <p:nvSpPr>
+          <p:cNvPr id="2" name="Slide Image Placeholder 1"/>
+          <p:cNvSpPr>
+            <a:spLocks noGrp="1" noRot="1" noChangeAspect="1"/>
+          </p:cNvSpPr>
+          <p:nvPr>
+            <p:ph type="sldImg" idx="2"/>
+          </p:nvPr>
+        </p:nvSpPr>
+        <p:spPr/>
+      </p:sp>
+      <p:sp>
+        <p:nvSpPr>
+          <p:cNvPr id="3" name="Notes Placeholder 2"/>
+          <p:cNvSpPr>
+            <a:spLocks noGrp="1"/>
+          </p:cNvSpPr>
+          <p:nvPr>
+            <p:ph type="body" sz="quarter" idx="3"/>
+          </p:nvPr>
+        </p:nvSpPr>
+        <p:spPr/>
+        <p:txBody>
+          <a:bodyPr/>
+          <a:lstStyle/>
+          <a:p>
+            <a:r>
+              <a:rPr dirty="0"/>
+              <a:t>Slide credited to ECON202, Maclachlan - a borrowed slide, keep as-is. Use as comic relief and to land the point: assumptions aren't 'wrong', they're tools chosen for the question at hand. Transition line: 'Now let's build two models economists actually use.'</a:t>
+            </a:r>
+          </a:p>
+        </p:txBody>
+      </p:sp>
+      <p:sp>
+        <p:nvSpPr>
+          <p:cNvPr id="4" name="Slide Number Placeholder 3"/>
+          <p:cNvSpPr>
+            <a:spLocks noGrp="1"/>
+          </p:cNvSpPr>
+          <p:nvPr>
+            <p:ph type="sldNum" sz="quarter" idx="5"/>
+          </p:nvPr>
+        </p:nvSpPr>
+        <p:spPr/>
+      </p:sp>
+    </p:spTree>
+  </p:cSld>
+  <p:clrMapOvr>
+    <a:masterClrMapping/>
+  </p:clrMapOvr>
+</p:notes>
+</file>
+
+<file path=ppt/notesSlides/notesSlide50.xml><?xml version="1.0" encoding="utf-8"?>
+<p:notes xmlns:a="http://schemas.openxmlformats.org/drawingml/2006/main" xmlns:r="http://schemas.openxmlformats.org/officeDocument/2006/relationships" xmlns:p="http://schemas.openxmlformats.org/presentationml/2006/main">
+  <p:cSld>
+    <p:spTree>
+      <p:nvGrpSpPr>
+        <p:cNvPr id="1" name=""/>
+        <p:cNvGrpSpPr/>
+        <p:nvPr/>
+      </p:nvGrpSpPr>
+      <p:grpSpPr>
+        <a:xfrm>
+          <a:off x="0" y="0"/>
+          <a:ext cx="0" cy="0"/>
+          <a:chOff x="0" y="0"/>
+          <a:chExt cx="0" cy="0"/>
+        </a:xfrm>
+      </p:grpSpPr>
+      <p:sp>
+        <p:nvSpPr>
+          <p:cNvPr id="2" name="Slide Image Placeholder 1"/>
+          <p:cNvSpPr>
+            <a:spLocks noGrp="1" noRot="1" noChangeAspect="1"/>
+          </p:cNvSpPr>
+          <p:nvPr>
+            <p:ph type="sldImg" idx="2"/>
+          </p:nvPr>
+        </p:nvSpPr>
+        <p:spPr/>
+      </p:sp>
+      <p:sp>
+        <p:nvSpPr>
+          <p:cNvPr id="3" name="Notes Placeholder 2"/>
+          <p:cNvSpPr>
+            <a:spLocks noGrp="1"/>
+          </p:cNvSpPr>
+          <p:nvPr>
+            <p:ph type="body" sz="quarter" idx="3"/>
+          </p:nvPr>
+        </p:nvSpPr>
+        <p:spPr/>
+        <p:txBody>
+          <a:bodyPr/>
+          <a:lstStyle/>
+          <a:p>
+            <a:r>
+              <a:t>Walk the logic slowly: once food needs exceed what David alone can supply working full time (240 units, i.e. 30 days x 8), Sherry must also switch, even though it costs her more per unit of food (1 wood vs David's 0.5). Note David's opportunity cost stays constant at 0.5 regardless of how many days he allocates - flag this as a simplification (linear, constant-cost PPF for each individual) versus the increasing-cost PPF shown earlier on slides 34-35.</a:t>
+            </a:r>
+          </a:p>
+        </p:txBody>
+      </p:sp>
+      <p:sp>
+        <p:nvSpPr>
+          <p:cNvPr id="4" name="Slide Number Placeholder 3"/>
+          <p:cNvSpPr>
+            <a:spLocks noGrp="1"/>
+          </p:cNvSpPr>
+          <p:nvPr>
+            <p:ph type="sldNum" sz="quarter" idx="5"/>
+          </p:nvPr>
+        </p:nvSpPr>
+        <p:spPr/>
+      </p:sp>
+    </p:spTree>
+  </p:cSld>
+  <p:clrMapOvr>
+    <a:masterClrMapping/>
+  </p:clrMapOvr>
+</p:notes>
+</file>
+
+<file path=ppt/notesSlides/notesSlide51.xml><?xml version="1.0" encoding="utf-8"?>
+<p:notes xmlns:a="http://schemas.openxmlformats.org/drawingml/2006/main" xmlns:r="http://schemas.openxmlformats.org/officeDocument/2006/relationships" xmlns:p="http://schemas.openxmlformats.org/presentationml/2006/main">
+  <p:cSld>
+    <p:spTree>
+      <p:nvGrpSpPr>
+        <p:cNvPr id="1" name=""/>
+        <p:cNvGrpSpPr/>
+        <p:nvPr/>
+      </p:nvGrpSpPr>
+      <p:grpSpPr>
+        <a:xfrm>
+          <a:off x="0" y="0"/>
+          <a:ext cx="0" cy="0"/>
+          <a:chOff x="0" y="0"/>
+          <a:chExt cx="0" cy="0"/>
+        </a:xfrm>
+      </p:grpSpPr>
+      <p:sp>
+        <p:nvSpPr>
+          <p:cNvPr id="2" name="Slide Image Placeholder 1"/>
+          <p:cNvSpPr>
+            <a:spLocks noGrp="1" noRot="1" noChangeAspect="1"/>
+          </p:cNvSpPr>
+          <p:nvPr>
+            <p:ph type="sldImg" idx="2"/>
+          </p:nvPr>
+        </p:nvSpPr>
+        <p:spPr/>
+      </p:sp>
+      <p:sp>
+        <p:nvSpPr>
+          <p:cNvPr id="3" name="Notes Placeholder 2"/>
+          <p:cNvSpPr>
+            <a:spLocks noGrp="1"/>
+          </p:cNvSpPr>
+          <p:nvPr>
+            <p:ph type="body" sz="quarter" idx="3"/>
+          </p:nvPr>
+        </p:nvSpPr>
+        <p:spPr/>
+        <p:txBody>
+          <a:bodyPr/>
+          <a:lstStyle/>
+          <a:p>
+            <a:r>
+              <a:t>Live-solve with the class rather than reading the answer: David needs 200/8 = 25 days on food, leaving 5 days for wood (5 x 4 = 20 units); Sherry spends all 30 days on wood (300 units); total wood = 320. Cold-call students through each step.</a:t>
+            </a:r>
+          </a:p>
+        </p:txBody>
+      </p:sp>
+      <p:sp>
+        <p:nvSpPr>
+          <p:cNvPr id="4" name="Slide Number Placeholder 3"/>
+          <p:cNvSpPr>
+            <a:spLocks noGrp="1"/>
+          </p:cNvSpPr>
+          <p:nvPr>
+            <p:ph type="sldNum" sz="quarter" idx="5"/>
+          </p:nvPr>
+        </p:nvSpPr>
+        <p:spPr/>
+      </p:sp>
+    </p:spTree>
+  </p:cSld>
+  <p:clrMapOvr>
+    <a:masterClrMapping/>
+  </p:clrMapOvr>
+</p:notes>
+</file>
+
+<file path=ppt/notesSlides/notesSlide52.xml><?xml version="1.0" encoding="utf-8"?>
+<p:notes xmlns:a="http://schemas.openxmlformats.org/drawingml/2006/main" xmlns:r="http://schemas.openxmlformats.org/officeDocument/2006/relationships" xmlns:p="http://schemas.openxmlformats.org/presentationml/2006/main">
+  <p:cSld>
+    <p:spTree>
+      <p:nvGrpSpPr>
+        <p:cNvPr id="1" name=""/>
+        <p:cNvGrpSpPr/>
+        <p:nvPr/>
+      </p:nvGrpSpPr>
+      <p:grpSpPr>
+        <a:xfrm>
+          <a:off x="0" y="0"/>
+          <a:ext cx="0" cy="0"/>
+          <a:chOff x="0" y="0"/>
+          <a:chExt cx="0" cy="0"/>
+        </a:xfrm>
+      </p:grpSpPr>
+      <p:sp>
+        <p:nvSpPr>
+          <p:cNvPr id="2" name="Slide Image Placeholder 1"/>
+          <p:cNvSpPr>
+            <a:spLocks noGrp="1" noRot="1" noChangeAspect="1"/>
+          </p:cNvSpPr>
+          <p:nvPr>
+            <p:ph type="sldImg" idx="2"/>
+          </p:nvPr>
+        </p:nvSpPr>
+        <p:spPr/>
+      </p:sp>
+      <p:sp>
+        <p:nvSpPr>
+          <p:cNvPr id="3" name="Notes Placeholder 2"/>
+          <p:cNvSpPr>
+            <a:spLocks noGrp="1"/>
+          </p:cNvSpPr>
+          <p:nvPr>
+            <p:ph type="body" sz="quarter" idx="3"/>
+          </p:nvPr>
+        </p:nvSpPr>
+        <p:spPr/>
+        <p:txBody>
+          <a:bodyPr/>
+          <a:lstStyle/>
+          <a:p>
+            <a:r>
+              <a:t>Standard 'perfectly competitive trade' assumptions - brief, 30 seconds. Flag they're simplifications (real-world trade has transport costs, tariffs, market power) that will NOT be relaxed in this lecture.</a:t>
+            </a:r>
+          </a:p>
+        </p:txBody>
+      </p:sp>
+      <p:sp>
+        <p:nvSpPr>
+          <p:cNvPr id="4" name="Slide Number Placeholder 3"/>
+          <p:cNvSpPr>
+            <a:spLocks noGrp="1"/>
+          </p:cNvSpPr>
+          <p:nvPr>
+            <p:ph type="sldNum" sz="quarter" idx="5"/>
+          </p:nvPr>
+        </p:nvSpPr>
+        <p:spPr/>
+      </p:sp>
+    </p:spTree>
+  </p:cSld>
+  <p:clrMapOvr>
+    <a:masterClrMapping/>
+  </p:clrMapOvr>
+</p:notes>
+</file>
+
+<file path=ppt/notesSlides/notesSlide53.xml><?xml version="1.0" encoding="utf-8"?>
+<p:notes xmlns:a="http://schemas.openxmlformats.org/drawingml/2006/main" xmlns:r="http://schemas.openxmlformats.org/officeDocument/2006/relationships" xmlns:p="http://schemas.openxmlformats.org/presentationml/2006/main">
+  <p:cSld>
+    <p:spTree>
+      <p:nvGrpSpPr>
+        <p:cNvPr id="1" name=""/>
+        <p:cNvGrpSpPr/>
+        <p:nvPr/>
+      </p:nvGrpSpPr>
+      <p:grpSpPr>
+        <a:xfrm>
+          <a:off x="0" y="0"/>
+          <a:ext cx="0" cy="0"/>
+          <a:chOff x="0" y="0"/>
+          <a:chExt cx="0" cy="0"/>
+        </a:xfrm>
+      </p:grpSpPr>
+      <p:sp>
+        <p:nvSpPr>
+          <p:cNvPr id="2" name="Slide Image Placeholder 1"/>
+          <p:cNvSpPr>
+            <a:spLocks noGrp="1" noRot="1" noChangeAspect="1"/>
+          </p:cNvSpPr>
+          <p:nvPr>
+            <p:ph type="sldImg" idx="2"/>
+          </p:nvPr>
+        </p:nvSpPr>
+        <p:spPr/>
+      </p:sp>
+      <p:sp>
+        <p:nvSpPr>
+          <p:cNvPr id="3" name="Notes Placeholder 2"/>
+          <p:cNvSpPr>
+            <a:spLocks noGrp="1"/>
+          </p:cNvSpPr>
+          <p:nvPr>
+            <p:ph type="body" sz="quarter" idx="3"/>
+          </p:nvPr>
+        </p:nvSpPr>
+        <p:spPr/>
+        <p:txBody>
+          <a:bodyPr/>
+          <a:lstStyle/>
+          <a:p>
+            <a:r>
+              <a:t>Set-up for the first numerical trade problem: trade rate is 1 food for 2 wood, target is still 200 units of food plus as much wood as possible.</a:t>
+            </a:r>
+          </a:p>
+        </p:txBody>
+      </p:sp>
+      <p:sp>
+        <p:nvSpPr>
+          <p:cNvPr id="4" name="Slide Number Placeholder 3"/>
+          <p:cNvSpPr>
+            <a:spLocks noGrp="1"/>
+          </p:cNvSpPr>
+          <p:nvPr>
+            <p:ph type="sldNum" sz="quarter" idx="5"/>
+          </p:nvPr>
+        </p:nvSpPr>
+        <p:spPr/>
+      </p:sp>
+    </p:spTree>
+  </p:cSld>
+  <p:clrMapOvr>
+    <a:masterClrMapping/>
+  </p:clrMapOvr>
+</p:notes>
+</file>
+
+<file path=ppt/notesSlides/notesSlide54.xml><?xml version="1.0" encoding="utf-8"?>
+<p:notes xmlns:a="http://schemas.openxmlformats.org/drawingml/2006/main" xmlns:r="http://schemas.openxmlformats.org/officeDocument/2006/relationships" xmlns:p="http://schemas.openxmlformats.org/presentationml/2006/main">
+  <p:cSld>
+    <p:spTree>
+      <p:nvGrpSpPr>
+        <p:cNvPr id="1" name=""/>
+        <p:cNvGrpSpPr/>
+        <p:nvPr/>
+      </p:nvGrpSpPr>
+      <p:grpSpPr>
+        <a:xfrm>
+          <a:off x="0" y="0"/>
+          <a:ext cx="0" cy="0"/>
+          <a:chOff x="0" y="0"/>
+          <a:chExt cx="0" cy="0"/>
+        </a:xfrm>
+      </p:grpSpPr>
+      <p:sp>
+        <p:nvSpPr>
+          <p:cNvPr id="2" name="Slide Image Placeholder 1"/>
+          <p:cNvSpPr>
+            <a:spLocks noGrp="1" noRot="1" noChangeAspect="1"/>
+          </p:cNvSpPr>
+          <p:nvPr>
+            <p:ph type="sldImg" idx="2"/>
+          </p:nvPr>
+        </p:nvSpPr>
+        <p:spPr/>
+      </p:sp>
+      <p:sp>
+        <p:nvSpPr>
+          <p:cNvPr id="3" name="Notes Placeholder 2"/>
+          <p:cNvSpPr>
+            <a:spLocks noGrp="1"/>
+          </p:cNvSpPr>
+          <p:nvPr>
+            <p:ph type="body" sz="quarter" idx="3"/>
+          </p:nvPr>
+        </p:nvSpPr>
+        <p:spPr/>
+        <p:txBody>
+          <a:bodyPr/>
+          <a:lstStyle/>
+          <a:p>
+            <a:r>
+              <a:t>Compare the trade rate (1 food = 2 wood) against both producers' opportunity costs of food (David: 0.5, Sherry: 1). Since 2 wood per food is a better deal than either domestic cost, BOTH fully specialize in food (540 units total) and trade the surplus (340 units) for 680 units of wood. Emphasize: when the trade rate beats everyone's opportunity cost, full specialization is optimal.</a:t>
+            </a:r>
+          </a:p>
+        </p:txBody>
+      </p:sp>
+      <p:sp>
+        <p:nvSpPr>
+          <p:cNvPr id="4" name="Slide Number Placeholder 3"/>
+          <p:cNvSpPr>
+            <a:spLocks noGrp="1"/>
+          </p:cNvSpPr>
+          <p:nvPr>
+            <p:ph type="sldNum" sz="quarter" idx="5"/>
+          </p:nvPr>
+        </p:nvSpPr>
+        <p:spPr/>
+      </p:sp>
+    </p:spTree>
+  </p:cSld>
+  <p:clrMapOvr>
+    <a:masterClrMapping/>
+  </p:clrMapOvr>
+</p:notes>
+</file>
+
+<file path=ppt/notesSlides/notesSlide55.xml><?xml version="1.0" encoding="utf-8"?>
+<p:notes xmlns:a="http://schemas.openxmlformats.org/drawingml/2006/main" xmlns:r="http://schemas.openxmlformats.org/officeDocument/2006/relationships" xmlns:p="http://schemas.openxmlformats.org/presentationml/2006/main">
+  <p:cSld>
+    <p:spTree>
+      <p:nvGrpSpPr>
+        <p:cNvPr id="1" name=""/>
+        <p:cNvGrpSpPr/>
+        <p:nvPr/>
+      </p:nvGrpSpPr>
+      <p:grpSpPr>
+        <a:xfrm>
+          <a:off x="0" y="0"/>
+          <a:ext cx="0" cy="0"/>
+          <a:chOff x="0" y="0"/>
+          <a:chExt cx="0" cy="0"/>
+        </a:xfrm>
+      </p:grpSpPr>
+      <p:sp>
+        <p:nvSpPr>
+          <p:cNvPr id="2" name="Slide Image Placeholder 1"/>
+          <p:cNvSpPr>
+            <a:spLocks noGrp="1" noRot="1" noChangeAspect="1"/>
+          </p:cNvSpPr>
+          <p:nvPr>
+            <p:ph type="sldImg" idx="2"/>
+          </p:nvPr>
+        </p:nvSpPr>
+        <p:spPr/>
+      </p:sp>
+      <p:sp>
+        <p:nvSpPr>
+          <p:cNvPr id="3" name="Notes Placeholder 2"/>
+          <p:cNvSpPr>
+            <a:spLocks noGrp="1"/>
+          </p:cNvSpPr>
+          <p:nvPr>
+            <p:ph type="body" sz="quarter" idx="3"/>
+          </p:nvPr>
+        </p:nvSpPr>
+        <p:spPr/>
+        <p:txBody>
+          <a:bodyPr/>
+          <a:lstStyle/>
+          <a:p>
+            <a:r>
+              <a:t>Second trade scenario: now the rate is only 0.75 wood per unit of food - deliberately chosen to sit between David's cost (0.5) and Sherry's (1).</a:t>
+            </a:r>
+          </a:p>
+        </p:txBody>
+      </p:sp>
+      <p:sp>
+        <p:nvSpPr>
+          <p:cNvPr id="4" name="Slide Number Placeholder 3"/>
+          <p:cNvSpPr>
+            <a:spLocks noGrp="1"/>
+          </p:cNvSpPr>
+          <p:nvPr>
+            <p:ph type="sldNum" sz="quarter" idx="5"/>
+          </p:nvPr>
+        </p:nvSpPr>
+        <p:spPr/>
+      </p:sp>
+    </p:spTree>
+  </p:cSld>
+  <p:clrMapOvr>
+    <a:masterClrMapping/>
+  </p:clrMapOvr>
+</p:notes>
+</file>
+
+<file path=ppt/notesSlides/notesSlide56.xml><?xml version="1.0" encoding="utf-8"?>
+<p:notes xmlns:a="http://schemas.openxmlformats.org/drawingml/2006/main" xmlns:r="http://schemas.openxmlformats.org/officeDocument/2006/relationships" xmlns:p="http://schemas.openxmlformats.org/presentationml/2006/main">
+  <p:cSld>
+    <p:spTree>
+      <p:nvGrpSpPr>
+        <p:cNvPr id="1" name=""/>
+        <p:cNvGrpSpPr/>
+        <p:nvPr/>
+      </p:nvGrpSpPr>
+      <p:grpSpPr>
+        <a:xfrm>
+          <a:off x="0" y="0"/>
+          <a:ext cx="0" cy="0"/>
+          <a:chOff x="0" y="0"/>
+          <a:chExt cx="0" cy="0"/>
+        </a:xfrm>
+      </p:grpSpPr>
+      <p:sp>
+        <p:nvSpPr>
+          <p:cNvPr id="2" name="Slide Image Placeholder 1"/>
+          <p:cNvSpPr>
+            <a:spLocks noGrp="1" noRot="1" noChangeAspect="1"/>
+          </p:cNvSpPr>
+          <p:nvPr>
+            <p:ph type="sldImg" idx="2"/>
+          </p:nvPr>
+        </p:nvSpPr>
+        <p:spPr/>
+      </p:sp>
+      <p:sp>
+        <p:nvSpPr>
+          <p:cNvPr id="3" name="Notes Placeholder 2"/>
+          <p:cNvSpPr>
+            <a:spLocks noGrp="1"/>
+          </p:cNvSpPr>
+          <p:nvPr>
+            <p:ph type="body" sz="quarter" idx="3"/>
+          </p:nvPr>
+        </p:nvSpPr>
+        <p:spPr/>
+        <p:txBody>
+          <a:bodyPr/>
+          <a:lstStyle/>
+          <a:p>
+            <a:r>
+              <a:t>Contrast directly with slide 54: because 0.75 is better than David's cost but worse than Sherry's, only David finds trade worthwhile - Sherry keeps producing both goods domestically. This is the key comparative-statics point: the trade rate relative to EACH party's opportunity cost, not a single 'is trade good' answer, determines who specializes. Walk through the consumption-point arithmetic: 330 = 300 + (240-200) x 0.75.</a:t>
+            </a:r>
+          </a:p>
+        </p:txBody>
+      </p:sp>
+      <p:sp>
+        <p:nvSpPr>
+          <p:cNvPr id="4" name="Slide Number Placeholder 3"/>
+          <p:cNvSpPr>
+            <a:spLocks noGrp="1"/>
+          </p:cNvSpPr>
+          <p:nvPr>
+            <p:ph type="sldNum" sz="quarter" idx="5"/>
+          </p:nvPr>
+        </p:nvSpPr>
+        <p:spPr/>
+      </p:sp>
+    </p:spTree>
+  </p:cSld>
+  <p:clrMapOvr>
+    <a:masterClrMapping/>
+  </p:clrMapOvr>
+</p:notes>
+</file>
+
+<file path=ppt/notesSlides/notesSlide57.xml><?xml version="1.0" encoding="utf-8"?>
+<p:notes xmlns:a="http://schemas.openxmlformats.org/drawingml/2006/main" xmlns:r="http://schemas.openxmlformats.org/officeDocument/2006/relationships" xmlns:p="http://schemas.openxmlformats.org/presentationml/2006/main">
+  <p:cSld>
+    <p:spTree>
+      <p:nvGrpSpPr>
+        <p:cNvPr id="1" name=""/>
+        <p:cNvGrpSpPr/>
+        <p:nvPr/>
+      </p:nvGrpSpPr>
+      <p:grpSpPr>
+        <a:xfrm>
+          <a:off x="0" y="0"/>
+          <a:ext cx="0" cy="0"/>
+          <a:chOff x="0" y="0"/>
+          <a:chExt cx="0" cy="0"/>
+        </a:xfrm>
+      </p:grpSpPr>
+      <p:sp>
+        <p:nvSpPr>
+          <p:cNvPr id="2" name="Slide Image Placeholder 1"/>
+          <p:cNvSpPr>
+            <a:spLocks noGrp="1" noRot="1" noChangeAspect="1"/>
+          </p:cNvSpPr>
+          <p:nvPr>
+            <p:ph type="sldImg" idx="2"/>
+          </p:nvPr>
+        </p:nvSpPr>
+        <p:spPr/>
+      </p:sp>
+      <p:sp>
+        <p:nvSpPr>
+          <p:cNvPr id="3" name="Notes Placeholder 2"/>
+          <p:cNvSpPr>
+            <a:spLocks noGrp="1"/>
+          </p:cNvSpPr>
+          <p:nvPr>
+            <p:ph type="body" sz="quarter" idx="3"/>
+          </p:nvPr>
+        </p:nvSpPr>
+        <p:spPr/>
+        <p:txBody>
+          <a:bodyPr/>
+          <a:lstStyle/>
+          <a:p>
+            <a:r>
+              <a:t>Explicitly assign as homework (DIY), same method as slides 53-56 with a rate of 0.2. Worth clarifying for students whether this is a warm-up for the standalone 'Exercise on Production Possibilities' worksheet in the course materials, or a separate, smaller task - make the distinction and expectations clear.</a:t>
+            </a:r>
+          </a:p>
+        </p:txBody>
+      </p:sp>
+      <p:sp>
+        <p:nvSpPr>
+          <p:cNvPr id="4" name="Slide Number Placeholder 3"/>
+          <p:cNvSpPr>
+            <a:spLocks noGrp="1"/>
+          </p:cNvSpPr>
+          <p:nvPr>
+            <p:ph type="sldNum" sz="quarter" idx="5"/>
+          </p:nvPr>
+        </p:nvSpPr>
+        <p:spPr/>
+      </p:sp>
+    </p:spTree>
+  </p:cSld>
+  <p:clrMapOvr>
+    <a:masterClrMapping/>
+  </p:clrMapOvr>
+</p:notes>
+</file>
+
+<file path=ppt/notesSlides/notesSlide58.xml><?xml version="1.0" encoding="utf-8"?>
+<p:notes xmlns:a="http://schemas.openxmlformats.org/drawingml/2006/main" xmlns:r="http://schemas.openxmlformats.org/officeDocument/2006/relationships" xmlns:p="http://schemas.openxmlformats.org/presentationml/2006/main">
+  <p:cSld>
+    <p:spTree>
+      <p:nvGrpSpPr>
+        <p:cNvPr id="1" name=""/>
+        <p:cNvGrpSpPr/>
+        <p:nvPr/>
+      </p:nvGrpSpPr>
+      <p:grpSpPr>
+        <a:xfrm>
+          <a:off x="0" y="0"/>
+          <a:ext cx="0" cy="0"/>
+          <a:chOff x="0" y="0"/>
+          <a:chExt cx="0" cy="0"/>
+        </a:xfrm>
+      </p:grpSpPr>
+      <p:sp>
+        <p:nvSpPr>
+          <p:cNvPr id="2" name="Slide Image Placeholder 1"/>
+          <p:cNvSpPr>
+            <a:spLocks noGrp="1" noRot="1" noChangeAspect="1"/>
+          </p:cNvSpPr>
+          <p:nvPr>
+            <p:ph type="sldImg" idx="2"/>
+          </p:nvPr>
+        </p:nvSpPr>
+        <p:spPr/>
+      </p:sp>
+      <p:sp>
+        <p:nvSpPr>
+          <p:cNvPr id="3" name="Notes Placeholder 2"/>
+          <p:cNvSpPr>
+            <a:spLocks noGrp="1"/>
+          </p:cNvSpPr>
+          <p:nvPr>
+            <p:ph type="body" sz="quarter" idx="3"/>
+          </p:nvPr>
+        </p:nvSpPr>
+        <p:spPr/>
+        <p:txBody>
+          <a:bodyPr/>
+          <a:lstStyle/>
+          <a:p>
+            <a:r>
+              <a:t>This recap covers BOTH Lecture 1 (micro/macro split, positive vs normative) AND today's PPF material - useful as a two-lecture cumulative check. Consider 2 quick cold-call questions here before moving on.</a:t>
+            </a:r>
+          </a:p>
+        </p:txBody>
+      </p:sp>
+      <p:sp>
+        <p:nvSpPr>
+          <p:cNvPr id="4" name="Slide Number Placeholder 3"/>
+          <p:cNvSpPr>
+            <a:spLocks noGrp="1"/>
+          </p:cNvSpPr>
+          <p:nvPr>
+            <p:ph type="sldNum" sz="quarter" idx="5"/>
+          </p:nvPr>
+        </p:nvSpPr>
+        <p:spPr/>
+      </p:sp>
+    </p:spTree>
+  </p:cSld>
+  <p:clrMapOvr>
+    <a:masterClrMapping/>
+  </p:clrMapOvr>
+</p:notes>
+</file>
+
+<file path=ppt/notesSlides/notesSlide59.xml><?xml version="1.0" encoding="utf-8"?>
+<p:notes xmlns:a="http://schemas.openxmlformats.org/drawingml/2006/main" xmlns:r="http://schemas.openxmlformats.org/officeDocument/2006/relationships" xmlns:p="http://schemas.openxmlformats.org/presentationml/2006/main">
+  <p:cSld>
+    <p:spTree>
+      <p:nvGrpSpPr>
+        <p:cNvPr id="1" name=""/>
+        <p:cNvGrpSpPr/>
+        <p:nvPr/>
+      </p:nvGrpSpPr>
+      <p:grpSpPr>
+        <a:xfrm>
+          <a:off x="0" y="0"/>
+          <a:ext cx="0" cy="0"/>
+          <a:chOff x="0" y="0"/>
+          <a:chExt cx="0" cy="0"/>
+        </a:xfrm>
+      </p:grpSpPr>
+      <p:sp>
+        <p:nvSpPr>
+          <p:cNvPr id="2" name="Slide Image Placeholder 1"/>
+          <p:cNvSpPr>
+            <a:spLocks noGrp="1" noRot="1" noChangeAspect="1"/>
+          </p:cNvSpPr>
+          <p:nvPr>
+            <p:ph type="sldImg" idx="2"/>
+          </p:nvPr>
+        </p:nvSpPr>
+        <p:spPr/>
+      </p:sp>
+      <p:sp>
+        <p:nvSpPr>
+          <p:cNvPr id="3" name="Notes Placeholder 2"/>
+          <p:cNvSpPr>
+            <a:spLocks noGrp="1"/>
+          </p:cNvSpPr>
+          <p:nvPr>
+            <p:ph type="body" sz="quarter" idx="3"/>
+          </p:nvPr>
+        </p:nvSpPr>
+        <p:spPr/>
+        <p:txBody>
+          <a:bodyPr/>
+          <a:lstStyle/>
+          <a:p>
+            <a:r>
+              <a:t>Final line to leave on the board: 'the cost of something is what you give up to get it.' Point students to the Production Possibilities exercise sheet now for practice before Lecture 3 (Demand).</a:t>
+            </a:r>
+          </a:p>
+        </p:txBody>
+      </p:sp>
+      <p:sp>
+        <p:nvSpPr>
+          <p:cNvPr id="4" name="Slide Number Placeholder 3"/>
+          <p:cNvSpPr>
+            <a:spLocks noGrp="1"/>
+          </p:cNvSpPr>
+          <p:nvPr>
+            <p:ph type="sldNum" sz="quarter" idx="5"/>
+          </p:nvPr>
+        </p:nvSpPr>
+        <p:spPr/>
+      </p:sp>
+    </p:spTree>
+  </p:cSld>
+  <p:clrMapOvr>
+    <a:masterClrMapping/>
+  </p:clrMapOvr>
+</p:notes>
+</file>
+
+<file path=ppt/notesSlides/notesSlide6.xml><?xml version="1.0" encoding="utf-8"?>
+<p:notes xmlns:a="http://schemas.openxmlformats.org/drawingml/2006/main" xmlns:r="http://schemas.openxmlformats.org/officeDocument/2006/relationships" xmlns:p="http://schemas.openxmlformats.org/presentationml/2006/main">
+  <p:cSld>
+    <p:spTree>
+      <p:nvGrpSpPr>
+        <p:cNvPr id="1" name=""/>
+        <p:cNvGrpSpPr/>
+        <p:nvPr/>
+      </p:nvGrpSpPr>
+      <p:grpSpPr>
+        <a:xfrm>
+          <a:off x="0" y="0"/>
+          <a:ext cx="0" cy="0"/>
+          <a:chOff x="0" y="0"/>
+          <a:chExt cx="0" cy="0"/>
+        </a:xfrm>
+      </p:grpSpPr>
+      <p:sp>
+        <p:nvSpPr>
+          <p:cNvPr id="2" name="Slide Image Placeholder 1"/>
+          <p:cNvSpPr>
+            <a:spLocks noGrp="1" noRot="1" noChangeAspect="1"/>
+          </p:cNvSpPr>
+          <p:nvPr>
+            <p:ph type="sldImg" idx="2"/>
+          </p:nvPr>
+        </p:nvSpPr>
+        <p:spPr/>
+      </p:sp>
+      <p:sp>
+        <p:nvSpPr>
+          <p:cNvPr id="3" name="Notes Placeholder 2"/>
+          <p:cNvSpPr>
+            <a:spLocks noGrp="1"/>
+          </p:cNvSpPr>
+          <p:nvPr>
+            <p:ph type="body" sz="quarter" idx="3"/>
+          </p:nvPr>
+        </p:nvSpPr>
+        <p:spPr/>
+        <p:txBody>
+          <a:bodyPr/>
+          <a:lstStyle/>
+          <a:p>
+            <a:r>
+              <a:t>Preview only - Circular Flow (how market actors connect) and PPF (constraints and choice). Don't explain either yet, just name them.</a:t>
+            </a:r>
+          </a:p>
+        </p:txBody>
+      </p:sp>
+      <p:sp>
+        <p:nvSpPr>
+          <p:cNvPr id="4" name="Slide Number Placeholder 3"/>
+          <p:cNvSpPr>
+            <a:spLocks noGrp="1"/>
+          </p:cNvSpPr>
+          <p:nvPr>
+            <p:ph type="sldNum" sz="quarter" idx="5"/>
+          </p:nvPr>
+        </p:nvSpPr>
+        <p:spPr/>
+      </p:sp>
+    </p:spTree>
+  </p:cSld>
+  <p:clrMapOvr>
+    <a:masterClrMapping/>
+  </p:clrMapOvr>
+</p:notes>
+</file>
+
+<file path=ppt/notesSlides/notesSlide7.xml><?xml version="1.0" encoding="utf-8"?>
+<p:notes xmlns:a="http://schemas.openxmlformats.org/drawingml/2006/main" xmlns:r="http://schemas.openxmlformats.org/officeDocument/2006/relationships" xmlns:p="http://schemas.openxmlformats.org/presentationml/2006/main">
+  <p:cSld>
+    <p:spTree>
+      <p:nvGrpSpPr>
+        <p:cNvPr id="1" name=""/>
+        <p:cNvGrpSpPr/>
+        <p:nvPr/>
+      </p:nvGrpSpPr>
+      <p:grpSpPr>
+        <a:xfrm>
+          <a:off x="0" y="0"/>
+          <a:ext cx="0" cy="0"/>
+          <a:chOff x="0" y="0"/>
+          <a:chExt cx="0" cy="0"/>
+        </a:xfrm>
+      </p:grpSpPr>
+      <p:sp>
+        <p:nvSpPr>
+          <p:cNvPr id="2" name="Slide Image Placeholder 1"/>
+          <p:cNvSpPr>
+            <a:spLocks noGrp="1" noRot="1" noChangeAspect="1"/>
+          </p:cNvSpPr>
+          <p:nvPr>
+            <p:ph type="sldImg" idx="2"/>
+          </p:nvPr>
+        </p:nvSpPr>
+        <p:spPr/>
+      </p:sp>
+      <p:sp>
+        <p:nvSpPr>
+          <p:cNvPr id="3" name="Notes Placeholder 2"/>
+          <p:cNvSpPr>
+            <a:spLocks noGrp="1"/>
+          </p:cNvSpPr>
+          <p:nvPr>
+            <p:ph type="body" sz="quarter" idx="3"/>
+          </p:nvPr>
+        </p:nvSpPr>
+        <p:spPr/>
+        <p:txBody>
+          <a:bodyPr/>
+          <a:lstStyle/>
+          <a:p>
+            <a:r>
+              <a:t>Show the full diagram cold, without explaining the arrows yet. Tell students 'we'll build this piece by piece' to build anticipation before slide 8's definition.</a:t>
+            </a:r>
+          </a:p>
+        </p:txBody>
+      </p:sp>
+      <p:sp>
+        <p:nvSpPr>
+          <p:cNvPr id="4" name="Slide Number Placeholder 3"/>
+          <p:cNvSpPr>
+            <a:spLocks noGrp="1"/>
+          </p:cNvSpPr>
+          <p:nvPr>
+            <p:ph type="sldNum" sz="quarter" idx="5"/>
+          </p:nvPr>
+        </p:nvSpPr>
+        <p:spPr/>
+      </p:sp>
+    </p:spTree>
+  </p:cSld>
+  <p:clrMapOvr>
+    <a:masterClrMapping/>
+  </p:clrMapOvr>
+</p:notes>
+</file>
+
+<file path=ppt/notesSlides/notesSlide8.xml><?xml version="1.0" encoding="utf-8"?>
+<p:notes xmlns:a="http://schemas.openxmlformats.org/drawingml/2006/main" xmlns:r="http://schemas.openxmlformats.org/officeDocument/2006/relationships" xmlns:p="http://schemas.openxmlformats.org/presentationml/2006/main">
+  <p:cSld>
+    <p:spTree>
+      <p:nvGrpSpPr>
+        <p:cNvPr id="1" name=""/>
+        <p:cNvGrpSpPr/>
+        <p:nvPr/>
+      </p:nvGrpSpPr>
+      <p:grpSpPr>
+        <a:xfrm>
+          <a:off x="0" y="0"/>
+          <a:ext cx="0" cy="0"/>
+          <a:chOff x="0" y="0"/>
+          <a:chExt cx="0" cy="0"/>
+        </a:xfrm>
+      </p:grpSpPr>
+      <p:sp>
+        <p:nvSpPr>
+          <p:cNvPr id="2" name="Slide Image Placeholder 1"/>
+          <p:cNvSpPr>
+            <a:spLocks noGrp="1" noRot="1" noChangeAspect="1"/>
+          </p:cNvSpPr>
+          <p:nvPr>
+            <p:ph type="sldImg" idx="2"/>
+          </p:nvPr>
+        </p:nvSpPr>
+        <p:spPr/>
+      </p:sp>
+      <p:sp>
+        <p:nvSpPr>
+          <p:cNvPr id="3" name="Notes Placeholder 2"/>
+          <p:cNvSpPr>
+            <a:spLocks noGrp="1"/>
+          </p:cNvSpPr>
+          <p:nvPr>
+            <p:ph type="body" sz="quarter" idx="3"/>
+          </p:nvPr>
+        </p:nvSpPr>
+        <p:spPr/>
+        <p:txBody>
+          <a:bodyPr/>
+          <a:lstStyle/>
+          <a:p>
+            <a:r>
+              <a:t>Define the two markets explicitly: Market for Goods &amp; Services vs Market for Factors of Production. Point at slide 7's diagram to locate each before zooming into each half separately.</a:t>
+            </a:r>
+          </a:p>
+        </p:txBody>
+      </p:sp>
+      <p:sp>
+        <p:nvSpPr>
+          <p:cNvPr id="4" name="Slide Number Placeholder 3"/>
+          <p:cNvSpPr>
+            <a:spLocks noGrp="1"/>
+          </p:cNvSpPr>
+          <p:nvPr>
+            <p:ph type="sldNum" sz="quarter" idx="5"/>
+          </p:nvPr>
+        </p:nvSpPr>
+        <p:spPr/>
+      </p:sp>
+    </p:spTree>
+  </p:cSld>
+  <p:clrMapOvr>
+    <a:masterClrMapping/>
+  </p:clrMapOvr>
+</p:notes>
+</file>
+
+<file path=ppt/notesSlides/notesSlide9.xml><?xml version="1.0" encoding="utf-8"?>
+<p:notes xmlns:a="http://schemas.openxmlformats.org/drawingml/2006/main" xmlns:r="http://schemas.openxmlformats.org/officeDocument/2006/relationships" xmlns:p="http://schemas.openxmlformats.org/presentationml/2006/main">
+  <p:cSld>
+    <p:spTree>
+      <p:nvGrpSpPr>
+        <p:cNvPr id="1" name=""/>
+        <p:cNvGrpSpPr/>
+        <p:nvPr/>
+      </p:nvGrpSpPr>
+      <p:grpSpPr>
+        <a:xfrm>
+          <a:off x="0" y="0"/>
+          <a:ext cx="0" cy="0"/>
+          <a:chOff x="0" y="0"/>
+          <a:chExt cx="0" cy="0"/>
+        </a:xfrm>
+      </p:grpSpPr>
+      <p:sp>
+        <p:nvSpPr>
+          <p:cNvPr id="2" name="Slide Image Placeholder 1"/>
+          <p:cNvSpPr>
+            <a:spLocks noGrp="1" noRot="1" noChangeAspect="1"/>
+          </p:cNvSpPr>
+          <p:nvPr>
+            <p:ph type="sldImg" idx="2"/>
+          </p:nvPr>
+        </p:nvSpPr>
+        <p:spPr/>
+      </p:sp>
+      <p:sp>
+        <p:nvSpPr>
+          <p:cNvPr id="3" name="Notes Placeholder 2"/>
+          <p:cNvSpPr>
+            <a:spLocks noGrp="1"/>
+          </p:cNvSpPr>
+          <p:nvPr>
+            <p:ph type="body" sz="quarter" idx="3"/>
+          </p:nvPr>
+        </p:nvSpPr>
+        <p:spPr/>
+        <p:txBody>
+          <a:bodyPr/>
+          <a:lstStyle/>
+          <a:p>
+            <a:r>
+              <a:t>Zoom-in view of the right-hand loop. Trace it with a pointer: goods/services flow one way (red, firms -&gt; households), money flows the opposite way (green, households -&gt; firms).</a:t>
+            </a:r>
+          </a:p>
+        </p:txBody>
+      </p:sp>
+      <p:sp>
+        <p:nvSpPr>
+          <p:cNvPr id="4" name="Slide Number Placeholder 3"/>
+          <p:cNvSpPr>
+            <a:spLocks noGrp="1"/>
+          </p:cNvSpPr>
+          <p:nvPr>
+            <p:ph type="sldNum" sz="quarter" idx="5"/>
+          </p:nvPr>
+        </p:nvSpPr>
+        <p:spPr/>
+      </p:sp>
+    </p:spTree>
+  </p:cSld>
+  <p:clrMapOvr>
+    <a:masterClrMapping/>
+  </p:clrMapOvr>
+</p:notes>
 </file>
 
 <file path=ppt/slideLayouts/slideLayout1.xml><?xml version="1.0" encoding="utf-8"?>
@@ -10521,7 +14653,7 @@
           <p:nvPr/>
         </p:nvPicPr>
         <p:blipFill>
-          <a:blip r:embed="rId2"/>
+          <a:blip r:embed="rId3"/>
           <a:stretch>
             <a:fillRect/>
           </a:stretch>
@@ -10991,7 +15123,7 @@
           </p:nvPr>
         </p:nvPicPr>
         <p:blipFill>
-          <a:blip r:embed="rId2"/>
+          <a:blip r:embed="rId3"/>
           <a:stretch>
             <a:fillRect/>
           </a:stretch>
@@ -11101,14 +15233,14 @@
             <a:pPr lvl="1"/>
             <a:r>
               <a:rPr lang="it-IT" dirty="0"/>
-              <a:t>Labor = work done by households</a:t>
+              <a:t>Labor = work done by households, athletes, coaches, staff</a:t>
             </a:r>
           </a:p>
           <a:p>
             <a:pPr lvl="1"/>
             <a:r>
               <a:rPr lang="it-IT" dirty="0"/>
-              <a:t>Capital = machines used to make products; funds used to buy machines</a:t>
+              <a:t>Capital = machines used to make products, funds used to buy machines, stadiums/training equipment</a:t>
             </a:r>
           </a:p>
           <a:p>
@@ -11203,7 +15335,7 @@
           </p:nvPr>
         </p:nvPicPr>
         <p:blipFill>
-          <a:blip r:embed="rId2"/>
+          <a:blip r:embed="rId3"/>
           <a:stretch>
             <a:fillRect/>
           </a:stretch>
@@ -11405,7 +15537,7 @@
           </p:nvPr>
         </p:nvPicPr>
         <p:blipFill>
-          <a:blip r:embed="rId2"/>
+          <a:blip r:embed="rId3"/>
           <a:stretch>
             <a:fillRect/>
           </a:stretch>
@@ -12057,7 +16189,7 @@
           </p:nvPr>
         </p:nvPicPr>
         <p:blipFill>
-          <a:blip r:embed="rId2"/>
+          <a:blip r:embed="rId3"/>
           <a:stretch>
             <a:fillRect/>
           </a:stretch>
@@ -12087,7 +16219,7 @@
           <p:nvPr/>
         </p:nvPicPr>
         <p:blipFill>
-          <a:blip r:embed="rId3"/>
+          <a:blip r:embed="rId4"/>
           <a:stretch>
             <a:fillRect/>
           </a:stretch>
@@ -12248,14 +16380,14 @@
           <p:nvPr/>
         </p:nvPicPr>
         <p:blipFill>
-          <a:blip r:embed="rId2"/>
+          <a:blip r:embed="rId3"/>
           <a:stretch>
             <a:fillRect/>
           </a:stretch>
         </p:blipFill>
         <p:spPr>
           <a:xfrm>
-            <a:off x="628650" y="1096247"/>
+            <a:off x="628650" y="740647"/>
             <a:ext cx="4913710" cy="3522506"/>
           </a:xfrm>
           <a:prstGeom prst="rect">
@@ -12374,7 +16506,7 @@
           </p:nvPr>
         </p:nvPicPr>
         <p:blipFill>
-          <a:blip r:embed="rId2"/>
+          <a:blip r:embed="rId3"/>
           <a:stretch>
             <a:fillRect/>
           </a:stretch>
@@ -12602,7 +16734,7 @@
           </p:nvPr>
         </p:nvPicPr>
         <p:blipFill>
-          <a:blip r:embed="rId2"/>
+          <a:blip r:embed="rId3"/>
           <a:stretch>
             <a:fillRect/>
           </a:stretch>
@@ -12693,7 +16825,7 @@
           </p:nvPr>
         </p:nvPicPr>
         <p:blipFill>
-          <a:blip r:embed="rId2"/>
+          <a:blip r:embed="rId3"/>
           <a:stretch>
             <a:fillRect/>
           </a:stretch>
@@ -12784,7 +16916,7 @@
           </p:nvPr>
         </p:nvPicPr>
         <p:blipFill>
-          <a:blip r:embed="rId2"/>
+          <a:blip r:embed="rId3"/>
           <a:stretch>
             <a:fillRect/>
           </a:stretch>
@@ -12875,7 +17007,7 @@
           </p:nvPr>
         </p:nvPicPr>
         <p:blipFill>
-          <a:blip r:embed="rId2"/>
+          <a:blip r:embed="rId3"/>
           <a:stretch>
             <a:fillRect/>
           </a:stretch>
@@ -12966,7 +17098,7 @@
           </p:nvPr>
         </p:nvPicPr>
         <p:blipFill>
-          <a:blip r:embed="rId2"/>
+          <a:blip r:embed="rId3"/>
           <a:stretch>
             <a:fillRect/>
           </a:stretch>
@@ -13059,7 +17191,7 @@
           </p:nvPr>
         </p:nvPicPr>
         <p:blipFill>
-          <a:blip r:embed="rId2"/>
+          <a:blip r:embed="rId3"/>
           <a:stretch>
             <a:fillRect/>
           </a:stretch>
@@ -13150,7 +17282,7 @@
           </p:nvPr>
         </p:nvPicPr>
         <p:blipFill>
-          <a:blip r:embed="rId2"/>
+          <a:blip r:embed="rId3"/>
           <a:stretch>
             <a:fillRect/>
           </a:stretch>
@@ -13255,7 +17387,7 @@
           </p:nvPr>
         </p:nvPicPr>
         <p:blipFill>
-          <a:blip r:embed="rId2"/>
+          <a:blip r:embed="rId3"/>
           <a:stretch>
             <a:fillRect/>
           </a:stretch>
@@ -13649,7 +17781,7 @@
           </p:nvPr>
         </p:nvPicPr>
         <p:blipFill>
-          <a:blip r:embed="rId2"/>
+          <a:blip r:embed="rId3"/>
           <a:stretch>
             <a:fillRect/>
           </a:stretch>
@@ -13711,7 +17843,7 @@
           </p:nvPr>
         </p:nvPicPr>
         <p:blipFill>
-          <a:blip r:embed="rId2"/>
+          <a:blip r:embed="rId3"/>
           <a:stretch>
             <a:fillRect/>
           </a:stretch>
@@ -13771,7 +17903,7 @@
           <p:nvPr/>
         </p:nvPicPr>
         <p:blipFill>
-          <a:blip r:embed="rId2"/>
+          <a:blip r:embed="rId3"/>
           <a:stretch>
             <a:fillRect/>
           </a:stretch>
@@ -13996,7 +18128,7 @@
           </p:nvPr>
         </p:nvPicPr>
         <p:blipFill>
-          <a:blip r:embed="rId2"/>
+          <a:blip r:embed="rId3"/>
           <a:stretch>
             <a:fillRect/>
           </a:stretch>
@@ -14087,7 +18219,7 @@
           </p:nvPr>
         </p:nvPicPr>
         <p:blipFill>
-          <a:blip r:embed="rId2"/>
+          <a:blip r:embed="rId3"/>
           <a:stretch>
             <a:fillRect/>
           </a:stretch>
@@ -14178,7 +18310,7 @@
           </p:nvPr>
         </p:nvPicPr>
         <p:blipFill>
-          <a:blip r:embed="rId2"/>
+          <a:blip r:embed="rId3"/>
           <a:stretch>
             <a:fillRect/>
           </a:stretch>
@@ -14589,9 +18721,23 @@
             </a:r>
           </a:p>
           <a:p>
+            <a:pPr lvl="1"/>
             <a:r>
               <a:rPr lang="en-US" dirty="0"/>
-              <a:t>For studying long-run effects we may assume that prices are completely flexible. </a:t>
+              <a:t>Ticket prices fixed</a:t>
+            </a:r>
+          </a:p>
+          <a:p>
+            <a:r>
+              <a:rPr lang="en-US" dirty="0"/>
+              <a:t>For studying long-run effects we may assume that prices are completely flexible.</a:t>
+            </a:r>
+          </a:p>
+          <a:p>
+            <a:pPr lvl="1"/>
+            <a:r>
+              <a:rPr lang="en-US" dirty="0"/>
+              <a:t>Ticket prices renegotiated between seasons  </a:t>
             </a:r>
           </a:p>
           <a:p>
@@ -14644,7 +18790,7 @@
           <p:nvPr/>
         </p:nvPicPr>
         <p:blipFill>
-          <a:blip r:embed="rId2"/>
+          <a:blip r:embed="rId3"/>
           <a:stretch>
             <a:fillRect/>
           </a:stretch>
@@ -15031,7 +19177,7 @@
           <p:nvPr/>
         </p:nvPicPr>
         <p:blipFill>
-          <a:blip r:embed="rId2"/>
+          <a:blip r:embed="rId3"/>
           <a:stretch>
             <a:fillRect/>
           </a:stretch>
@@ -15263,7 +19409,7 @@
           <p:nvPr/>
         </p:nvPicPr>
         <p:blipFill>
-          <a:blip r:embed="rId2"/>
+          <a:blip r:embed="rId3"/>
           <a:stretch>
             <a:fillRect/>
           </a:stretch>
@@ -15893,7 +20039,7 @@
           <p:nvPr/>
         </p:nvPicPr>
         <p:blipFill>
-          <a:blip r:embed="rId2"/>
+          <a:blip r:embed="rId3"/>
           <a:stretch>
             <a:fillRect/>
           </a:stretch>
@@ -15997,25 +20143,7 @@
                       <a:rPr lang="it-IT" b="0" i="1" smtClean="0">
                         <a:latin typeface="Cambria Math" panose="02040503050406030204" pitchFamily="18" charset="0"/>
                       </a:rPr>
-                      <m:t>=</m:t>
-                    </m:r>
-                    <m:r>
-                      <a:rPr lang="it-IT" b="0" i="1" smtClean="0">
-                        <a:latin typeface="Cambria Math" panose="02040503050406030204" pitchFamily="18" charset="0"/>
-                      </a:rPr>
-                      <m:t>0</m:t>
-                    </m:r>
-                    <m:r>
-                      <a:rPr lang="it-IT" b="0" i="1" smtClean="0">
-                        <a:latin typeface="Cambria Math" panose="02040503050406030204" pitchFamily="18" charset="0"/>
-                      </a:rPr>
-                      <m:t>.</m:t>
-                    </m:r>
-                    <m:r>
-                      <a:rPr lang="it-IT" b="0" i="1" smtClean="0">
-                        <a:latin typeface="Cambria Math" panose="02040503050406030204" pitchFamily="18" charset="0"/>
-                      </a:rPr>
-                      <m:t>5</m:t>
+                      <m:t>=0.5</m:t>
                     </m:r>
                   </m:oMath>
                 </a14:m>
@@ -16104,13 +20232,7 @@
                       <a:rPr lang="it-IT" b="0" i="1" smtClean="0">
                         <a:latin typeface="Cambria Math" panose="02040503050406030204" pitchFamily="18" charset="0"/>
                       </a:rPr>
-                      <m:t>=</m:t>
-                    </m:r>
-                    <m:r>
-                      <a:rPr lang="it-IT" b="0" i="1" smtClean="0">
-                        <a:latin typeface="Cambria Math" panose="02040503050406030204" pitchFamily="18" charset="0"/>
-                      </a:rPr>
-                      <m:t>2</m:t>
+                      <m:t>=2</m:t>
                     </m:r>
                   </m:oMath>
                 </a14:m>
@@ -16143,7 +20265,7 @@
                 <a:avLst/>
               </a:prstGeom>
               <a:blipFill>
-                <a:blip r:embed="rId3"/>
+                <a:blip r:embed="rId4"/>
                 <a:stretch>
                   <a:fillRect t="-2564" b="-2564"/>
                 </a:stretch>
@@ -16426,7 +20548,7 @@
           <p:nvPr/>
         </p:nvPicPr>
         <p:blipFill>
-          <a:blip r:embed="rId3"/>
+          <a:blip r:embed="rId4"/>
           <a:stretch>
             <a:fillRect/>
           </a:stretch>
@@ -16619,7 +20741,13 @@
                       <a:rPr lang="it-IT" b="0" i="1" smtClean="0">
                         <a:latin typeface="Cambria Math" panose="02040503050406030204" pitchFamily="18" charset="0"/>
                       </a:rPr>
-                      <m:t>=1</m:t>
+                      <m:t>=</m:t>
+                    </m:r>
+                    <m:r>
+                      <a:rPr lang="it-IT" b="0" i="1" smtClean="0">
+                        <a:latin typeface="Cambria Math" panose="02040503050406030204" pitchFamily="18" charset="0"/>
+                      </a:rPr>
+                      <m:t>1</m:t>
                     </m:r>
                   </m:oMath>
                 </a14:m>
@@ -16660,7 +20788,7 @@
                 <a:avLst/>
               </a:prstGeom>
               <a:blipFill>
-                <a:blip r:embed="rId4"/>
+                <a:blip r:embed="rId5"/>
                 <a:stretch>
                   <a:fillRect t="-2143"/>
                 </a:stretch>
@@ -17256,7 +21384,7 @@
                 <a:avLst/>
               </a:prstGeom>
               <a:blipFill>
-                <a:blip r:embed="rId2"/>
+                <a:blip r:embed="rId3"/>
                 <a:stretch>
                   <a:fillRect t="-9836" b="-22951"/>
                 </a:stretch>
@@ -17585,7 +21713,7 @@
                 <a:avLst/>
               </a:prstGeom>
               <a:blipFill>
-                <a:blip r:embed="rId3"/>
+                <a:blip r:embed="rId4"/>
                 <a:stretch>
                   <a:fillRect t="-11475" b="-22951"/>
                 </a:stretch>
@@ -18467,7 +22595,7 @@
           <p:nvPr/>
         </p:nvPicPr>
         <p:blipFill>
-          <a:blip r:embed="rId2"/>
+          <a:blip r:embed="rId3"/>
           <a:stretch>
             <a:fillRect/>
           </a:stretch>
@@ -19150,7 +23278,7 @@
           </p:nvPr>
         </p:nvPicPr>
         <p:blipFill>
-          <a:blip r:embed="rId2"/>
+          <a:blip r:embed="rId3"/>
           <a:stretch>
             <a:fillRect/>
           </a:stretch>
@@ -19210,7 +23338,7 @@
           <p:nvPr/>
         </p:nvPicPr>
         <p:blipFill>
-          <a:blip r:embed="rId2"/>
+          <a:blip r:embed="rId3"/>
           <a:stretch>
             <a:fillRect/>
           </a:stretch>
@@ -19802,7 +23930,7 @@
           <p:nvPr/>
         </p:nvPicPr>
         <p:blipFill>
-          <a:blip r:embed="rId2"/>
+          <a:blip r:embed="rId3"/>
           <a:stretch>
             <a:fillRect/>
           </a:stretch>
@@ -20168,7 +24296,7 @@
           <p:nvPr/>
         </p:nvPicPr>
         <p:blipFill>
-          <a:blip r:embed="rId2"/>
+          <a:blip r:embed="rId3"/>
           <a:stretch>
             <a:fillRect/>
           </a:stretch>
@@ -20228,7 +24356,7 @@
           <p:nvPr/>
         </p:nvPicPr>
         <p:blipFill>
-          <a:blip r:embed="rId2"/>
+          <a:blip r:embed="rId3"/>
           <a:stretch>
             <a:fillRect/>
           </a:stretch>
@@ -20471,7 +24599,7 @@
           <p:nvPr/>
         </p:nvPicPr>
         <p:blipFill>
-          <a:blip r:embed="rId2"/>
+          <a:blip r:embed="rId3"/>
           <a:stretch>
             <a:fillRect/>
           </a:stretch>
@@ -20531,7 +24659,7 @@
           <p:nvPr/>
         </p:nvPicPr>
         <p:blipFill>
-          <a:blip r:embed="rId2"/>
+          <a:blip r:embed="rId3"/>
           <a:stretch>
             <a:fillRect/>
           </a:stretch>
@@ -20795,7 +24923,7 @@
           <p:nvPr/>
         </p:nvPicPr>
         <p:blipFill>
-          <a:blip r:embed="rId2"/>
+          <a:blip r:embed="rId3"/>
           <a:stretch>
             <a:fillRect/>
           </a:stretch>
@@ -21247,7 +25375,7 @@
           </p:nvPr>
         </p:nvPicPr>
         <p:blipFill>
-          <a:blip r:embed="rId2"/>
+          <a:blip r:embed="rId3"/>
           <a:stretch>
             <a:fillRect/>
           </a:stretch>
@@ -21466,7 +25594,7 @@
           </p:nvPr>
         </p:nvPicPr>
         <p:blipFill>
-          <a:blip r:embed="rId2"/>
+          <a:blip r:embed="rId3"/>
           <a:stretch>
             <a:fillRect/>
           </a:stretch>
@@ -23416,21 +27544,6 @@
 </file>
 
 <file path=customXml/item1.xml><?xml version="1.0" encoding="utf-8"?>
-<p:properties xmlns:p="http://schemas.microsoft.com/office/2006/metadata/properties" xmlns:xsi="http://www.w3.org/2001/XMLSchema-instance" xmlns:pc="http://schemas.microsoft.com/office/infopath/2007/PartnerControls">
-  <documentManagement/>
-</p:properties>
-</file>
-
-<file path=customXml/item2.xml><?xml version="1.0" encoding="utf-8"?>
-<?mso-contentType ?>
-<FormTemplates xmlns="http://schemas.microsoft.com/sharepoint/v3/contenttype/forms">
-  <Display>DocumentLibraryForm</Display>
-  <Edit>DocumentLibraryForm</Edit>
-  <New>DocumentLibraryForm</New>
-</FormTemplates>
-</file>
-
-<file path=customXml/item3.xml><?xml version="1.0" encoding="utf-8"?>
 <ct:contentTypeSchema xmlns:ct="http://schemas.microsoft.com/office/2006/metadata/contentType" xmlns:ma="http://schemas.microsoft.com/office/2006/metadata/properties/metaAttributes" ct:_="" ma:_="" ma:contentTypeName="Dokument" ma:contentTypeID="0x010100086B82B2E673BB48BBFD907EF88B1F72" ma:contentTypeVersion="0" ma:contentTypeDescription="Opprett et nytt dokument." ma:contentTypeScope="" ma:versionID="0653049da3c7d6103ba0b9e54f21c3f6">
   <xsd:schema xmlns:xsd="http://www.w3.org/2001/XMLSchema" xmlns:xs="http://www.w3.org/2001/XMLSchema" xmlns:p="http://schemas.microsoft.com/office/2006/metadata/properties" targetNamespace="http://schemas.microsoft.com/office/2006/metadata/properties" ma:root="true" ma:fieldsID="3e2500873ed525c1cf306a41cba81ed5">
     <xsd:element name="properties">
@@ -23544,7 +27657,38 @@
 </ct:contentTypeSchema>
 </file>
 
+<file path=customXml/item2.xml><?xml version="1.0" encoding="utf-8"?>
+<p:properties xmlns:p="http://schemas.microsoft.com/office/2006/metadata/properties" xmlns:xsi="http://www.w3.org/2001/XMLSchema-instance" xmlns:pc="http://schemas.microsoft.com/office/infopath/2007/PartnerControls">
+  <documentManagement/>
+</p:properties>
+</file>
+
+<file path=customXml/item3.xml><?xml version="1.0" encoding="utf-8"?>
+<?mso-contentType ?>
+<FormTemplates xmlns="http://schemas.microsoft.com/sharepoint/v3/contenttype/forms">
+  <Display>DocumentLibraryForm</Display>
+  <Edit>DocumentLibraryForm</Edit>
+  <New>DocumentLibraryForm</New>
+</FormTemplates>
+</file>
+
 <file path=customXml/itemProps1.xml><?xml version="1.0" encoding="utf-8"?>
+<ds:datastoreItem xmlns:ds="http://schemas.openxmlformats.org/officeDocument/2006/customXml" ds:itemID="{C299F0B8-F1FA-4547-8345-D1C345C8ADDE}">
+  <ds:schemaRefs>
+    <ds:schemaRef ds:uri="http://schemas.microsoft.com/office/2006/metadata/contentType"/>
+    <ds:schemaRef ds:uri="http://schemas.microsoft.com/office/2006/metadata/properties/metaAttributes"/>
+    <ds:schemaRef ds:uri="http://www.w3.org/2001/XMLSchema"/>
+    <ds:schemaRef ds:uri="http://schemas.microsoft.com/office/2006/metadata/properties"/>
+    <ds:schemaRef ds:uri="http://schemas.openxmlformats.org/package/2006/metadata/core-properties"/>
+    <ds:schemaRef ds:uri="http://purl.org/dc/elements/1.1/"/>
+    <ds:schemaRef ds:uri="http://purl.org/dc/terms/"/>
+    <ds:schemaRef ds:uri="http://schemas.microsoft.com/internal/obd"/>
+    <ds:schemaRef ds:uri="http://schemas.microsoft.com/office/infopath/2007/PartnerControls"/>
+  </ds:schemaRefs>
+</ds:datastoreItem>
+</file>
+
+<file path=customXml/itemProps2.xml><?xml version="1.0" encoding="utf-8"?>
 <ds:datastoreItem xmlns:ds="http://schemas.openxmlformats.org/officeDocument/2006/customXml" ds:itemID="{3CAC7484-FE6E-40E6-83CA-83D55D847BA8}">
   <ds:schemaRefs>
     <ds:schemaRef ds:uri="http://schemas.microsoft.com/office/2006/documentManagement/types"/>
@@ -23559,26 +27703,10 @@
 </ds:datastoreItem>
 </file>
 
-<file path=customXml/itemProps2.xml><?xml version="1.0" encoding="utf-8"?>
+<file path=customXml/itemProps3.xml><?xml version="1.0" encoding="utf-8"?>
 <ds:datastoreItem xmlns:ds="http://schemas.openxmlformats.org/officeDocument/2006/customXml" ds:itemID="{27479CE2-CFF2-495B-B6E0-2F66375CDBBB}">
   <ds:schemaRefs>
     <ds:schemaRef ds:uri="http://schemas.microsoft.com/sharepoint/v3/contenttype/forms"/>
   </ds:schemaRefs>
 </ds:datastoreItem>
-</file>
-
-<file path=customXml/itemProps3.xml><?xml version="1.0" encoding="utf-8"?>
-<ds:datastoreItem xmlns:ds="http://schemas.openxmlformats.org/officeDocument/2006/customXml" ds:itemID="{C299F0B8-F1FA-4547-8345-D1C345C8ADDE}">
-  <ds:schemaRefs>
-    <ds:schemaRef ds:uri="http://schemas.microsoft.com/office/2006/metadata/contentType"/>
-    <ds:schemaRef ds:uri="http://schemas.microsoft.com/office/2006/metadata/properties/metaAttributes"/>
-    <ds:schemaRef ds:uri="http://www.w3.org/2001/XMLSchema"/>
-    <ds:schemaRef ds:uri="http://schemas.microsoft.com/office/2006/metadata/properties"/>
-    <ds:schemaRef ds:uri="http://schemas.openxmlformats.org/package/2006/metadata/core-properties"/>
-    <ds:schemaRef ds:uri="http://purl.org/dc/elements/1.1/"/>
-    <ds:schemaRef ds:uri="http://purl.org/dc/terms/"/>
-    <ds:schemaRef ds:uri="http://schemas.microsoft.com/internal/obd"/>
-    <ds:schemaRef ds:uri="http://schemas.microsoft.com/office/infopath/2007/PartnerControls"/>
-  </ds:schemaRefs>
-</ds:datastoreItem>
 </file>
--- a/lectures/L2.pptx
+++ b/lectures/L2.pptx
@@ -17707,7 +17707,7 @@
             </a:r>
             <a:r>
               <a:rPr lang="en-US" dirty="0"/>
-              <a:t>:  trade-off between the selected good and all the other goods</a:t>
+              <a:t>: trade-off between the selected good and all the other goods</a:t>
             </a:r>
           </a:p>
           <a:p>
@@ -20143,7 +20143,25 @@
                       <a:rPr lang="it-IT" b="0" i="1" smtClean="0">
                         <a:latin typeface="Cambria Math" panose="02040503050406030204" pitchFamily="18" charset="0"/>
                       </a:rPr>
-                      <m:t>=0.5</m:t>
+                      <m:t>=</m:t>
+                    </m:r>
+                    <m:r>
+                      <a:rPr lang="it-IT" b="0" i="1" smtClean="0">
+                        <a:latin typeface="Cambria Math" panose="02040503050406030204" pitchFamily="18" charset="0"/>
+                      </a:rPr>
+                      <m:t>0</m:t>
+                    </m:r>
+                    <m:r>
+                      <a:rPr lang="it-IT" b="0" i="1" smtClean="0">
+                        <a:latin typeface="Cambria Math" panose="02040503050406030204" pitchFamily="18" charset="0"/>
+                      </a:rPr>
+                      <m:t>.</m:t>
+                    </m:r>
+                    <m:r>
+                      <a:rPr lang="it-IT" b="0" i="1" smtClean="0">
+                        <a:latin typeface="Cambria Math" panose="02040503050406030204" pitchFamily="18" charset="0"/>
+                      </a:rPr>
+                      <m:t>5</m:t>
                     </m:r>
                   </m:oMath>
                 </a14:m>
@@ -20232,7 +20250,13 @@
                       <a:rPr lang="it-IT" b="0" i="1" smtClean="0">
                         <a:latin typeface="Cambria Math" panose="02040503050406030204" pitchFamily="18" charset="0"/>
                       </a:rPr>
-                      <m:t>=2</m:t>
+                      <m:t>=</m:t>
+                    </m:r>
+                    <m:r>
+                      <a:rPr lang="it-IT" b="0" i="1" smtClean="0">
+                        <a:latin typeface="Cambria Math" panose="02040503050406030204" pitchFamily="18" charset="0"/>
+                      </a:rPr>
+                      <m:t>2</m:t>
                     </m:r>
                   </m:oMath>
                 </a14:m>
@@ -21405,8 +21429,8 @@
           </p:sp>
         </mc:Fallback>
       </mc:AlternateContent>
-      <mc:AlternateContent xmlns:mc="http://schemas.openxmlformats.org/markup-compatibility/2006" xmlns:a14="http://schemas.microsoft.com/office/drawing/2010/main">
-        <mc:Choice Requires="a14">
+      <mc:AlternateContent xmlns:mc="http://schemas.openxmlformats.org/markup-compatibility/2006">
+        <mc:Choice xmlns:a14="http://schemas.microsoft.com/office/drawing/2010/main" Requires="a14">
           <p:sp>
             <p:nvSpPr>
               <p:cNvPr id="5" name="TextBox 4">
@@ -21457,7 +21481,7 @@
                       </a:glow>
                     </a:effectLst>
                   </a:rPr>
-                  <a:t>David</a:t>
+                  <a:t>Sherry</a:t>
                 </a:r>
                 <a:r>
                   <a:rPr lang="it-IT" dirty="0"/>
@@ -21546,7 +21570,7 @@
                         </a:effectLst>
                         <a:latin typeface="Cambria Math" panose="02040503050406030204" pitchFamily="18" charset="0"/>
                       </a:rPr>
-                      <m:t>𝟐</m:t>
+                      <m:t>𝟏</m:t>
                     </m:r>
                     <m:r>
                       <a:rPr lang="it-IT" b="1" i="1" spc="50" smtClean="0">
@@ -21570,7 +21594,7 @@
                         </a:effectLst>
                         <a:latin typeface="Cambria Math" panose="02040503050406030204" pitchFamily="18" charset="0"/>
                       </a:rPr>
-                      <m:t>&gt;</m:t>
+                      <m:t>&lt;</m:t>
                     </m:r>
                     <m:r>
                       <a:rPr lang="it-IT" b="1" i="1" spc="50" smtClean="0">
@@ -21594,7 +21618,7 @@
                         </a:effectLst>
                         <a:latin typeface="Cambria Math" panose="02040503050406030204" pitchFamily="18" charset="0"/>
                       </a:rPr>
-                      <m:t>𝟏</m:t>
+                      <m:t>𝟐</m:t>
                     </m:r>
                     <m:r>
                       <a:rPr lang="it-IT" b="1" i="1" spc="50" smtClean="0">
@@ -21643,7 +21667,7 @@
                       </a:glow>
                     </a:effectLst>
                   </a:rPr>
-                  <a:t>Sherry </a:t>
+                  <a:t>David </a:t>
                 </a:r>
                 <a:r>
                   <a:rPr lang="it-IT" dirty="0">
@@ -21689,7 +21713,7 @@
             </p:txBody>
           </p:sp>
         </mc:Choice>
-        <mc:Fallback xmlns="">
+        <mc:Fallback>
           <p:sp>
             <p:nvSpPr>
               <p:cNvPr id="5" name="TextBox 4">
@@ -23396,7 +23420,7 @@
             </a:r>
             <a:r>
               <a:rPr lang="en-US" sz="1300" dirty="0"/>
-              <a:t>should stop chopping wood and start gathering food. For 1 kg of food, she will lose 1 wood.</a:t>
+              <a:t>should stop chopping wood and start gathering food. For 1 unit of food, she will lose 1 unit of wood.</a:t>
             </a:r>
           </a:p>
         </p:txBody>
@@ -27544,6 +27568,15 @@
 </file>
 
 <file path=customXml/item1.xml><?xml version="1.0" encoding="utf-8"?>
+<?mso-contentType ?>
+<FormTemplates xmlns="http://schemas.microsoft.com/sharepoint/v3/contenttype/forms">
+  <Display>DocumentLibraryForm</Display>
+  <Edit>DocumentLibraryForm</Edit>
+  <New>DocumentLibraryForm</New>
+</FormTemplates>
+</file>
+
+<file path=customXml/item2.xml><?xml version="1.0" encoding="utf-8"?>
 <ct:contentTypeSchema xmlns:ct="http://schemas.microsoft.com/office/2006/metadata/contentType" xmlns:ma="http://schemas.microsoft.com/office/2006/metadata/properties/metaAttributes" ct:_="" ma:_="" ma:contentTypeName="Dokument" ma:contentTypeID="0x010100086B82B2E673BB48BBFD907EF88B1F72" ma:contentTypeVersion="0" ma:contentTypeDescription="Opprett et nytt dokument." ma:contentTypeScope="" ma:versionID="0653049da3c7d6103ba0b9e54f21c3f6">
   <xsd:schema xmlns:xsd="http://www.w3.org/2001/XMLSchema" xmlns:xs="http://www.w3.org/2001/XMLSchema" xmlns:p="http://schemas.microsoft.com/office/2006/metadata/properties" targetNamespace="http://schemas.microsoft.com/office/2006/metadata/properties" ma:root="true" ma:fieldsID="3e2500873ed525c1cf306a41cba81ed5">
     <xsd:element name="properties">
@@ -27657,22 +27690,21 @@
 </ct:contentTypeSchema>
 </file>
 
-<file path=customXml/item2.xml><?xml version="1.0" encoding="utf-8"?>
+<file path=customXml/item3.xml><?xml version="1.0" encoding="utf-8"?>
 <p:properties xmlns:p="http://schemas.microsoft.com/office/2006/metadata/properties" xmlns:xsi="http://www.w3.org/2001/XMLSchema-instance" xmlns:pc="http://schemas.microsoft.com/office/infopath/2007/PartnerControls">
   <documentManagement/>
 </p:properties>
 </file>
 
-<file path=customXml/item3.xml><?xml version="1.0" encoding="utf-8"?>
-<?mso-contentType ?>
-<FormTemplates xmlns="http://schemas.microsoft.com/sharepoint/v3/contenttype/forms">
-  <Display>DocumentLibraryForm</Display>
-  <Edit>DocumentLibraryForm</Edit>
-  <New>DocumentLibraryForm</New>
-</FormTemplates>
+<file path=customXml/itemProps1.xml><?xml version="1.0" encoding="utf-8"?>
+<ds:datastoreItem xmlns:ds="http://schemas.openxmlformats.org/officeDocument/2006/customXml" ds:itemID="{27479CE2-CFF2-495B-B6E0-2F66375CDBBB}">
+  <ds:schemaRefs>
+    <ds:schemaRef ds:uri="http://schemas.microsoft.com/sharepoint/v3/contenttype/forms"/>
+  </ds:schemaRefs>
+</ds:datastoreItem>
 </file>
 
-<file path=customXml/itemProps1.xml><?xml version="1.0" encoding="utf-8"?>
+<file path=customXml/itemProps2.xml><?xml version="1.0" encoding="utf-8"?>
 <ds:datastoreItem xmlns:ds="http://schemas.openxmlformats.org/officeDocument/2006/customXml" ds:itemID="{C299F0B8-F1FA-4547-8345-D1C345C8ADDE}">
   <ds:schemaRefs>
     <ds:schemaRef ds:uri="http://schemas.microsoft.com/office/2006/metadata/contentType"/>
@@ -27688,7 +27720,7 @@
 </ds:datastoreItem>
 </file>
 
-<file path=customXml/itemProps2.xml><?xml version="1.0" encoding="utf-8"?>
+<file path=customXml/itemProps3.xml><?xml version="1.0" encoding="utf-8"?>
 <ds:datastoreItem xmlns:ds="http://schemas.openxmlformats.org/officeDocument/2006/customXml" ds:itemID="{3CAC7484-FE6E-40E6-83CA-83D55D847BA8}">
   <ds:schemaRefs>
     <ds:schemaRef ds:uri="http://schemas.microsoft.com/office/2006/documentManagement/types"/>
@@ -27701,12 +27733,4 @@
     <ds:schemaRef ds:uri="http://purl.org/dc/elements/1.1/"/>
   </ds:schemaRefs>
 </ds:datastoreItem>
-</file>
-
-<file path=customXml/itemProps3.xml><?xml version="1.0" encoding="utf-8"?>
-<ds:datastoreItem xmlns:ds="http://schemas.openxmlformats.org/officeDocument/2006/customXml" ds:itemID="{27479CE2-CFF2-495B-B6E0-2F66375CDBBB}">
-  <ds:schemaRefs>
-    <ds:schemaRef ds:uri="http://schemas.microsoft.com/sharepoint/v3/contenttype/forms"/>
-  </ds:schemaRefs>
-</ds:datastoreItem>
 </file>
--- a/lectures/L2.pptx
+++ b/lectures/L2.pptx
@@ -2107,7 +2107,7 @@
           <a:p>
             <a:fld id="{BF2DB236-4285-4D88-9992-9FF3E224851F}" type="datetime1">
               <a:rPr lang="nb-NO" smtClean="0"/>
-              <a:t>27.07.2026</a:t>
+              <a:t>30.07.2026</a:t>
             </a:fld>
             <a:endParaRPr lang="nb-NO" dirty="0"/>
           </a:p>
@@ -2285,7 +2285,7 @@
           <a:p>
             <a:fld id="{5601FF98-C2FA-4DFE-9608-59BE2C73CA2C}" type="datetime1">
               <a:rPr lang="nb-NO" smtClean="0"/>
-              <a:t>27.07.2026</a:t>
+              <a:t>30.07.2026</a:t>
             </a:fld>
             <a:endParaRPr lang="nb-NO" dirty="0"/>
           </a:p>
@@ -16393,6 +16393,9 @@
           <a:prstGeom prst="rect">
             <a:avLst/>
           </a:prstGeom>
+          <a:solidFill>
+            <a:schemeClr val="bg1"/>
+          </a:solidFill>
         </p:spPr>
       </p:pic>
       <p:sp>
@@ -16409,8 +16412,8 @@
         </p:nvSpPr>
         <p:spPr>
           <a:xfrm>
-            <a:off x="3590013" y="2257336"/>
-            <a:ext cx="4572000" cy="1200329"/>
+            <a:off x="5830293" y="1845283"/>
+            <a:ext cx="2890797" cy="1569660"/>
           </a:xfrm>
           <a:prstGeom prst="rect">
             <a:avLst/>
@@ -16519,6 +16522,9 @@
           <a:prstGeom prst="rect">
             <a:avLst/>
           </a:prstGeom>
+          <a:solidFill>
+            <a:schemeClr val="bg1"/>
+          </a:solidFill>
         </p:spPr>
       </p:pic>
       <p:sp>
@@ -16537,7 +16543,7 @@
         </p:nvSpPr>
         <p:spPr bwMode="auto">
           <a:xfrm>
-            <a:off x="4658140" y="2072670"/>
+            <a:off x="5486400" y="1855500"/>
             <a:ext cx="3657600" cy="1569660"/>
           </a:xfrm>
           <a:prstGeom prst="rect">
@@ -16747,6 +16753,9 @@
           <a:prstGeom prst="rect">
             <a:avLst/>
           </a:prstGeom>
+          <a:solidFill>
+            <a:schemeClr val="bg1"/>
+          </a:solidFill>
         </p:spPr>
       </p:pic>
     </p:spTree>
@@ -16838,6 +16847,9 @@
           <a:prstGeom prst="rect">
             <a:avLst/>
           </a:prstGeom>
+          <a:solidFill>
+            <a:schemeClr val="bg1"/>
+          </a:solidFill>
         </p:spPr>
       </p:pic>
     </p:spTree>
@@ -16929,6 +16941,9 @@
           <a:prstGeom prst="rect">
             <a:avLst/>
           </a:prstGeom>
+          <a:solidFill>
+            <a:schemeClr val="bg1"/>
+          </a:solidFill>
         </p:spPr>
       </p:pic>
     </p:spTree>
@@ -17020,6 +17035,9 @@
           <a:prstGeom prst="rect">
             <a:avLst/>
           </a:prstGeom>
+          <a:solidFill>
+            <a:schemeClr val="bg1"/>
+          </a:solidFill>
         </p:spPr>
       </p:pic>
     </p:spTree>
@@ -17111,6 +17129,9 @@
           <a:prstGeom prst="rect">
             <a:avLst/>
           </a:prstGeom>
+          <a:solidFill>
+            <a:schemeClr val="bg1"/>
+          </a:solidFill>
         </p:spPr>
       </p:pic>
     </p:spTree>
@@ -17204,6 +17225,9 @@
           <a:prstGeom prst="rect">
             <a:avLst/>
           </a:prstGeom>
+          <a:solidFill>
+            <a:schemeClr val="bg1"/>
+          </a:solidFill>
         </p:spPr>
       </p:pic>
     </p:spTree>
@@ -21429,8 +21453,8 @@
           </p:sp>
         </mc:Fallback>
       </mc:AlternateContent>
-      <mc:AlternateContent xmlns:mc="http://schemas.openxmlformats.org/markup-compatibility/2006">
-        <mc:Choice xmlns:a14="http://schemas.microsoft.com/office/drawing/2010/main" Requires="a14">
+      <mc:AlternateContent xmlns:mc="http://schemas.openxmlformats.org/markup-compatibility/2006" xmlns:a14="http://schemas.microsoft.com/office/drawing/2010/main">
+        <mc:Choice Requires="a14">
           <p:sp>
             <p:nvSpPr>
               <p:cNvPr id="5" name="TextBox 4">
@@ -21713,7 +21737,7 @@
             </p:txBody>
           </p:sp>
         </mc:Choice>
-        <mc:Fallback>
+        <mc:Fallback xmlns="">
           <p:sp>
             <p:nvSpPr>
               <p:cNvPr id="5" name="TextBox 4">
@@ -23375,6 +23399,9 @@
           <a:prstGeom prst="rect">
             <a:avLst/>
           </a:prstGeom>
+          <a:solidFill>
+            <a:schemeClr val="bg1"/>
+          </a:solidFill>
         </p:spPr>
       </p:pic>
       <p:sp>
@@ -23391,8 +23418,8 @@
         </p:nvSpPr>
         <p:spPr>
           <a:xfrm>
-            <a:off x="3050691" y="579755"/>
-            <a:ext cx="2564308" cy="1107996"/>
+            <a:off x="3103560" y="278857"/>
+            <a:ext cx="2458569" cy="1107996"/>
           </a:xfrm>
           <a:prstGeom prst="rect">
             <a:avLst/>
@@ -23955,18 +23982,20 @@
         </p:nvPicPr>
         <p:blipFill>
           <a:blip r:embed="rId3"/>
-          <a:stretch>
-            <a:fillRect/>
-          </a:stretch>
+          <a:srcRect/>
+          <a:stretch/>
         </p:blipFill>
         <p:spPr>
           <a:xfrm>
-            <a:off x="184431" y="1096933"/>
-            <a:ext cx="3956647" cy="4011516"/>
+            <a:off x="752321" y="1366883"/>
+            <a:ext cx="3963124" cy="3224367"/>
           </a:xfrm>
           <a:prstGeom prst="rect">
             <a:avLst/>
           </a:prstGeom>
+          <a:solidFill>
+            <a:schemeClr val="bg1"/>
+          </a:solidFill>
         </p:spPr>
       </p:pic>
       <p:sp>
@@ -23983,8 +24012,8 @@
         </p:nvSpPr>
         <p:spPr>
           <a:xfrm>
-            <a:off x="3340257" y="1440802"/>
-            <a:ext cx="5214974" cy="1477328"/>
+            <a:off x="5326382" y="1534061"/>
+            <a:ext cx="3509008" cy="1815882"/>
           </a:xfrm>
           <a:prstGeom prst="rect">
             <a:avLst/>
@@ -23998,10 +24027,10 @@
           <a:lstStyle/>
           <a:p>
             <a:r>
-              <a:rPr lang="en-US" dirty="0"/>
+              <a:rPr lang="en-US" sz="1600" dirty="0"/>
               <a:t>David has a comparative advantage in producing food. He can spend 25 days (200/8) producing food and 5 days chopping woods. Sherry is going to just chop woods. Therefore, they produce 200  units of food and 320 ((4*5)+(10*30)) units of wood.</a:t>
             </a:r>
-            <a:endParaRPr lang="he-IL" dirty="0"/>
+            <a:endParaRPr lang="he-IL" sz="1600" dirty="0"/>
           </a:p>
         </p:txBody>
       </p:sp>
@@ -24381,18 +24410,20 @@
         </p:nvPicPr>
         <p:blipFill>
           <a:blip r:embed="rId3"/>
-          <a:stretch>
-            <a:fillRect/>
-          </a:stretch>
+          <a:srcRect/>
+          <a:stretch/>
         </p:blipFill>
         <p:spPr>
           <a:xfrm>
-            <a:off x="758622" y="656654"/>
-            <a:ext cx="7114722" cy="4106178"/>
+            <a:off x="758622" y="405340"/>
+            <a:ext cx="7630998" cy="4401399"/>
           </a:xfrm>
           <a:prstGeom prst="rect">
             <a:avLst/>
           </a:prstGeom>
+          <a:solidFill>
+            <a:schemeClr val="bg1"/>
+          </a:solidFill>
         </p:spPr>
       </p:pic>
       <p:sp>
@@ -24409,8 +24440,8 @@
         </p:nvSpPr>
         <p:spPr>
           <a:xfrm>
-            <a:off x="3929026" y="1225709"/>
-            <a:ext cx="5214974" cy="1477328"/>
+            <a:off x="4260496" y="1036379"/>
+            <a:ext cx="4129124" cy="1569660"/>
           </a:xfrm>
           <a:prstGeom prst="rect">
             <a:avLst/>
@@ -24424,10 +24455,10 @@
           <a:lstStyle/>
           <a:p>
             <a:r>
-              <a:rPr lang="en-US" dirty="0"/>
+              <a:rPr lang="en-US" sz="1600" dirty="0"/>
               <a:t>The opportunity cost of producing 1 food is either 1 or 0.5. In both cases the opportunity cost is lower than in trading. Therefore, David and Sherry will produce only food (540 units of food) and sell the extra 340 units of food for 680 units of wood.</a:t>
             </a:r>
-            <a:endParaRPr lang="he-IL" dirty="0"/>
+            <a:endParaRPr lang="he-IL" sz="1600" dirty="0"/>
           </a:p>
         </p:txBody>
       </p:sp>
@@ -24684,18 +24715,20 @@
         </p:nvPicPr>
         <p:blipFill>
           <a:blip r:embed="rId3"/>
-          <a:stretch>
-            <a:fillRect/>
-          </a:stretch>
+          <a:srcRect/>
+          <a:stretch/>
         </p:blipFill>
         <p:spPr>
           <a:xfrm>
-            <a:off x="663205" y="561238"/>
-            <a:ext cx="7626757" cy="4401693"/>
+            <a:off x="665593" y="561238"/>
+            <a:ext cx="7621980" cy="4401693"/>
           </a:xfrm>
           <a:prstGeom prst="rect">
             <a:avLst/>
           </a:prstGeom>
+          <a:solidFill>
+            <a:schemeClr val="bg1"/>
+          </a:solidFill>
         </p:spPr>
       </p:pic>
       <p:sp>
@@ -24712,8 +24745,8 @@
         </p:nvSpPr>
         <p:spPr>
           <a:xfrm>
-            <a:off x="3676655" y="1658416"/>
-            <a:ext cx="5214974" cy="1754326"/>
+            <a:off x="3813815" y="1212646"/>
+            <a:ext cx="4210045" cy="2031325"/>
           </a:xfrm>
           <a:prstGeom prst="rect">
             <a:avLst/>
@@ -24728,7 +24761,15 @@
           <a:p>
             <a:r>
               <a:rPr lang="en-US" dirty="0"/>
-              <a:t>The opportunity cost of producing 1 unit of food is either 1 or 0.5. David has a comparative advantage in producing food while Sherry in wood. Production point: (300,240). Consumption point: (330,200)</a:t>
+              <a:t>The opportunity cost of producing 1 unit of food is either 1 or 0.5. David has a </a:t>
+            </a:r>
+            <a:r>
+              <a:rPr lang="en-US" sz="1600" dirty="0"/>
+              <a:t>comparative</a:t>
+            </a:r>
+            <a:r>
+              <a:rPr lang="en-US" dirty="0"/>
+              <a:t> advantage in producing food while Sherry in wood. Production point: (300,240). Consumption point: (330,200)</a:t>
             </a:r>
             <a:endParaRPr lang="nb-NO" dirty="0"/>
           </a:p>
@@ -27568,15 +27609,6 @@
 </file>
 
 <file path=customXml/item1.xml><?xml version="1.0" encoding="utf-8"?>
-<?mso-contentType ?>
-<FormTemplates xmlns="http://schemas.microsoft.com/sharepoint/v3/contenttype/forms">
-  <Display>DocumentLibraryForm</Display>
-  <Edit>DocumentLibraryForm</Edit>
-  <New>DocumentLibraryForm</New>
-</FormTemplates>
-</file>
-
-<file path=customXml/item2.xml><?xml version="1.0" encoding="utf-8"?>
 <ct:contentTypeSchema xmlns:ct="http://schemas.microsoft.com/office/2006/metadata/contentType" xmlns:ma="http://schemas.microsoft.com/office/2006/metadata/properties/metaAttributes" ct:_="" ma:_="" ma:contentTypeName="Dokument" ma:contentTypeID="0x010100086B82B2E673BB48BBFD907EF88B1F72" ma:contentTypeVersion="0" ma:contentTypeDescription="Opprett et nytt dokument." ma:contentTypeScope="" ma:versionID="0653049da3c7d6103ba0b9e54f21c3f6">
   <xsd:schema xmlns:xsd="http://www.w3.org/2001/XMLSchema" xmlns:xs="http://www.w3.org/2001/XMLSchema" xmlns:p="http://schemas.microsoft.com/office/2006/metadata/properties" targetNamespace="http://schemas.microsoft.com/office/2006/metadata/properties" ma:root="true" ma:fieldsID="3e2500873ed525c1cf306a41cba81ed5">
     <xsd:element name="properties">
@@ -27690,21 +27722,22 @@
 </ct:contentTypeSchema>
 </file>
 
-<file path=customXml/item3.xml><?xml version="1.0" encoding="utf-8"?>
+<file path=customXml/item2.xml><?xml version="1.0" encoding="utf-8"?>
 <p:properties xmlns:p="http://schemas.microsoft.com/office/2006/metadata/properties" xmlns:xsi="http://www.w3.org/2001/XMLSchema-instance" xmlns:pc="http://schemas.microsoft.com/office/infopath/2007/PartnerControls">
   <documentManagement/>
 </p:properties>
 </file>
 
-<file path=customXml/itemProps1.xml><?xml version="1.0" encoding="utf-8"?>
-<ds:datastoreItem xmlns:ds="http://schemas.openxmlformats.org/officeDocument/2006/customXml" ds:itemID="{27479CE2-CFF2-495B-B6E0-2F66375CDBBB}">
-  <ds:schemaRefs>
-    <ds:schemaRef ds:uri="http://schemas.microsoft.com/sharepoint/v3/contenttype/forms"/>
-  </ds:schemaRefs>
-</ds:datastoreItem>
+<file path=customXml/item3.xml><?xml version="1.0" encoding="utf-8"?>
+<?mso-contentType ?>
+<FormTemplates xmlns="http://schemas.microsoft.com/sharepoint/v3/contenttype/forms">
+  <Display>DocumentLibraryForm</Display>
+  <Edit>DocumentLibraryForm</Edit>
+  <New>DocumentLibraryForm</New>
+</FormTemplates>
 </file>
 
-<file path=customXml/itemProps2.xml><?xml version="1.0" encoding="utf-8"?>
+<file path=customXml/itemProps1.xml><?xml version="1.0" encoding="utf-8"?>
 <ds:datastoreItem xmlns:ds="http://schemas.openxmlformats.org/officeDocument/2006/customXml" ds:itemID="{C299F0B8-F1FA-4547-8345-D1C345C8ADDE}">
   <ds:schemaRefs>
     <ds:schemaRef ds:uri="http://schemas.microsoft.com/office/2006/metadata/contentType"/>
@@ -27720,7 +27753,7 @@
 </ds:datastoreItem>
 </file>
 
-<file path=customXml/itemProps3.xml><?xml version="1.0" encoding="utf-8"?>
+<file path=customXml/itemProps2.xml><?xml version="1.0" encoding="utf-8"?>
 <ds:datastoreItem xmlns:ds="http://schemas.openxmlformats.org/officeDocument/2006/customXml" ds:itemID="{3CAC7484-FE6E-40E6-83CA-83D55D847BA8}">
   <ds:schemaRefs>
     <ds:schemaRef ds:uri="http://schemas.microsoft.com/office/2006/documentManagement/types"/>
@@ -27733,4 +27766,12 @@
     <ds:schemaRef ds:uri="http://purl.org/dc/elements/1.1/"/>
   </ds:schemaRefs>
 </ds:datastoreItem>
+</file>
+
+<file path=customXml/itemProps3.xml><?xml version="1.0" encoding="utf-8"?>
+<ds:datastoreItem xmlns:ds="http://schemas.openxmlformats.org/officeDocument/2006/customXml" ds:itemID="{27479CE2-CFF2-495B-B6E0-2F66375CDBBB}">
+  <ds:schemaRefs>
+    <ds:schemaRef ds:uri="http://schemas.microsoft.com/sharepoint/v3/contenttype/forms"/>
+  </ds:schemaRefs>
+</ds:datastoreItem>
 </file>
--- a/lectures/L2.pptx
+++ b/lectures/L2.pptx
@@ -2107,7 +2107,7 @@
           <a:p>
             <a:fld id="{BF2DB236-4285-4D88-9992-9FF3E224851F}" type="datetime1">
               <a:rPr lang="nb-NO" smtClean="0"/>
-              <a:t>30.07.2026</a:t>
+              <a:t>16.08.2026</a:t>
             </a:fld>
             <a:endParaRPr lang="nb-NO" dirty="0"/>
           </a:p>
@@ -2285,7 +2285,7 @@
           <a:p>
             <a:fld id="{5601FF98-C2FA-4DFE-9608-59BE2C73CA2C}" type="datetime1">
               <a:rPr lang="nb-NO" smtClean="0"/>
-              <a:t>30.07.2026</a:t>
+              <a:t>16.08.2026</a:t>
             </a:fld>
             <a:endParaRPr lang="nb-NO" dirty="0"/>
           </a:p>
@@ -16387,7 +16387,7 @@
         </p:blipFill>
         <p:spPr>
           <a:xfrm>
-            <a:off x="628650" y="740647"/>
+            <a:off x="765810" y="1462711"/>
             <a:ext cx="4913710" cy="3522506"/>
           </a:xfrm>
           <a:prstGeom prst="rect">
@@ -20167,25 +20167,7 @@
                       <a:rPr lang="it-IT" b="0" i="1" smtClean="0">
                         <a:latin typeface="Cambria Math" panose="02040503050406030204" pitchFamily="18" charset="0"/>
                       </a:rPr>
-                      <m:t>=</m:t>
-                    </m:r>
-                    <m:r>
-                      <a:rPr lang="it-IT" b="0" i="1" smtClean="0">
-                        <a:latin typeface="Cambria Math" panose="02040503050406030204" pitchFamily="18" charset="0"/>
-                      </a:rPr>
-                      <m:t>0</m:t>
-                    </m:r>
-                    <m:r>
-                      <a:rPr lang="it-IT" b="0" i="1" smtClean="0">
-                        <a:latin typeface="Cambria Math" panose="02040503050406030204" pitchFamily="18" charset="0"/>
-                      </a:rPr>
-                      <m:t>.</m:t>
-                    </m:r>
-                    <m:r>
-                      <a:rPr lang="it-IT" b="0" i="1" smtClean="0">
-                        <a:latin typeface="Cambria Math" panose="02040503050406030204" pitchFamily="18" charset="0"/>
-                      </a:rPr>
-                      <m:t>5</m:t>
+                      <m:t>=0.5</m:t>
                     </m:r>
                   </m:oMath>
                 </a14:m>
@@ -20274,13 +20256,7 @@
                       <a:rPr lang="it-IT" b="0" i="1" smtClean="0">
                         <a:latin typeface="Cambria Math" panose="02040503050406030204" pitchFamily="18" charset="0"/>
                       </a:rPr>
-                      <m:t>=</m:t>
-                    </m:r>
-                    <m:r>
-                      <a:rPr lang="it-IT" b="0" i="1" smtClean="0">
-                        <a:latin typeface="Cambria Math" panose="02040503050406030204" pitchFamily="18" charset="0"/>
-                      </a:rPr>
-                      <m:t>2</m:t>
+                      <m:t>=2</m:t>
                     </m:r>
                   </m:oMath>
                 </a14:m>
@@ -20789,13 +20765,7 @@
                       <a:rPr lang="it-IT" b="0" i="1" smtClean="0">
                         <a:latin typeface="Cambria Math" panose="02040503050406030204" pitchFamily="18" charset="0"/>
                       </a:rPr>
-                      <m:t>=</m:t>
-                    </m:r>
-                    <m:r>
-                      <a:rPr lang="it-IT" b="0" i="1" smtClean="0">
-                        <a:latin typeface="Cambria Math" panose="02040503050406030204" pitchFamily="18" charset="0"/>
-                      </a:rPr>
-                      <m:t>1</m:t>
+                      <m:t>=1</m:t>
                     </m:r>
                   </m:oMath>
                 </a14:m>
@@ -27609,6 +27579,15 @@
 </file>
 
 <file path=customXml/item1.xml><?xml version="1.0" encoding="utf-8"?>
+<?mso-contentType ?>
+<FormTemplates xmlns="http://schemas.microsoft.com/sharepoint/v3/contenttype/forms">
+  <Display>DocumentLibraryForm</Display>
+  <Edit>DocumentLibraryForm</Edit>
+  <New>DocumentLibraryForm</New>
+</FormTemplates>
+</file>
+
+<file path=customXml/item2.xml><?xml version="1.0" encoding="utf-8"?>
 <ct:contentTypeSchema xmlns:ct="http://schemas.microsoft.com/office/2006/metadata/contentType" xmlns:ma="http://schemas.microsoft.com/office/2006/metadata/properties/metaAttributes" ct:_="" ma:_="" ma:contentTypeName="Dokument" ma:contentTypeID="0x010100086B82B2E673BB48BBFD907EF88B1F72" ma:contentTypeVersion="0" ma:contentTypeDescription="Opprett et nytt dokument." ma:contentTypeScope="" ma:versionID="0653049da3c7d6103ba0b9e54f21c3f6">
   <xsd:schema xmlns:xsd="http://www.w3.org/2001/XMLSchema" xmlns:xs="http://www.w3.org/2001/XMLSchema" xmlns:p="http://schemas.microsoft.com/office/2006/metadata/properties" targetNamespace="http://schemas.microsoft.com/office/2006/metadata/properties" ma:root="true" ma:fieldsID="3e2500873ed525c1cf306a41cba81ed5">
     <xsd:element name="properties">
@@ -27722,22 +27701,21 @@
 </ct:contentTypeSchema>
 </file>
 
-<file path=customXml/item2.xml><?xml version="1.0" encoding="utf-8"?>
+<file path=customXml/item3.xml><?xml version="1.0" encoding="utf-8"?>
 <p:properties xmlns:p="http://schemas.microsoft.com/office/2006/metadata/properties" xmlns:xsi="http://www.w3.org/2001/XMLSchema-instance" xmlns:pc="http://schemas.microsoft.com/office/infopath/2007/PartnerControls">
   <documentManagement/>
 </p:properties>
 </file>
 
-<file path=customXml/item3.xml><?xml version="1.0" encoding="utf-8"?>
-<?mso-contentType ?>
-<FormTemplates xmlns="http://schemas.microsoft.com/sharepoint/v3/contenttype/forms">
-  <Display>DocumentLibraryForm</Display>
-  <Edit>DocumentLibraryForm</Edit>
-  <New>DocumentLibraryForm</New>
-</FormTemplates>
+<file path=customXml/itemProps1.xml><?xml version="1.0" encoding="utf-8"?>
+<ds:datastoreItem xmlns:ds="http://schemas.openxmlformats.org/officeDocument/2006/customXml" ds:itemID="{27479CE2-CFF2-495B-B6E0-2F66375CDBBB}">
+  <ds:schemaRefs>
+    <ds:schemaRef ds:uri="http://schemas.microsoft.com/sharepoint/v3/contenttype/forms"/>
+  </ds:schemaRefs>
+</ds:datastoreItem>
 </file>
 
-<file path=customXml/itemProps1.xml><?xml version="1.0" encoding="utf-8"?>
+<file path=customXml/itemProps2.xml><?xml version="1.0" encoding="utf-8"?>
 <ds:datastoreItem xmlns:ds="http://schemas.openxmlformats.org/officeDocument/2006/customXml" ds:itemID="{C299F0B8-F1FA-4547-8345-D1C345C8ADDE}">
   <ds:schemaRefs>
     <ds:schemaRef ds:uri="http://schemas.microsoft.com/office/2006/metadata/contentType"/>
@@ -27753,7 +27731,7 @@
 </ds:datastoreItem>
 </file>
 
-<file path=customXml/itemProps2.xml><?xml version="1.0" encoding="utf-8"?>
+<file path=customXml/itemProps3.xml><?xml version="1.0" encoding="utf-8"?>
 <ds:datastoreItem xmlns:ds="http://schemas.openxmlformats.org/officeDocument/2006/customXml" ds:itemID="{3CAC7484-FE6E-40E6-83CA-83D55D847BA8}">
   <ds:schemaRefs>
     <ds:schemaRef ds:uri="http://schemas.microsoft.com/office/2006/documentManagement/types"/>
@@ -27766,12 +27744,4 @@
     <ds:schemaRef ds:uri="http://purl.org/dc/elements/1.1/"/>
   </ds:schemaRefs>
 </ds:datastoreItem>
-</file>
-
-<file path=customXml/itemProps3.xml><?xml version="1.0" encoding="utf-8"?>
-<ds:datastoreItem xmlns:ds="http://schemas.openxmlformats.org/officeDocument/2006/customXml" ds:itemID="{27479CE2-CFF2-495B-B6E0-2F66375CDBBB}">
-  <ds:schemaRefs>
-    <ds:schemaRef ds:uri="http://schemas.microsoft.com/sharepoint/v3/contenttype/forms"/>
-  </ds:schemaRefs>
-</ds:datastoreItem>
 </file>